--- a/Portal_Metrics_Monthly_Sep-26.pptx
+++ b/Portal_Metrics_Monthly_Sep-26.pptx
@@ -106,641 +106,6 @@
     </a:lvl9pPr>
   </p:defaultTextStyle>
 </p:presentation>
-</file>
-
-<file path=ppt/charts/chart1.xml><?xml version="1.0" encoding="utf-8"?>
-<c:chartSpace xmlns:c="http://schemas.openxmlformats.org/drawingml/2006/chart" xmlns:a="http://schemas.openxmlformats.org/drawingml/2006/main" xmlns:r="http://schemas.openxmlformats.org/officeDocument/2006/relationships">
-  <c:date1904 val="0"/>
-  <c:roundedCorners val="1"/>
-  <c:chart>
-    <c:title>
-      <c:tx>
-        <c:rich>
-          <a:bodyPr/>
-          <a:lstStyle/>
-          <a:p>
-            <a:pPr>
-              <a:defRPr sz="1300" b="0" i="0" u="none" strike="noStrike">
-                <a:solidFill>
-                  <a:srgbClr val="158158"/>
-                </a:solidFill>
-                <a:latin typeface="Calibri"/>
-              </a:defRPr>
-            </a:pPr>
-            <a:r>
-              <a:rPr sz="1300" b="0" i="0" u="none" strike="noStrike">
-                <a:solidFill>
-                  <a:srgbClr val="158158"/>
-                </a:solidFill>
-                <a:latin typeface="Calibri"/>
-              </a:rPr>
-              <a:t>Resolution distribution (%)</a:t>
-            </a:r>
-          </a:p>
-        </c:rich>
-      </c:tx>
-      <c:layout/>
-      <c:overlay val="0"/>
-    </c:title>
-    <c:autoTitleDeleted val="0"/>
-    <c:plotArea>
-      <c:layout/>
-      <c:doughnutChart>
-        <c:varyColors val="1"/>
-        <c:ser>
-          <c:idx val="0"/>
-          <c:order val="0"/>
-          <c:tx>
-            <c:strRef>
-              <c:f>Sheet1!$B$1</c:f>
-              <c:strCache>
-                <c:ptCount val="1"/>
-                <c:pt idx="0">
-                  <c:v>Distribution</c:v>
-                </c:pt>
-              </c:strCache>
-            </c:strRef>
-          </c:tx>
-          <c:spPr>
-            <a:solidFill>
-              <a:schemeClr val="accent1"/>
-            </a:solidFill>
-            <a:ln w="9525" cap="flat">
-              <a:solidFill>
-                <a:srgbClr val="F9F9F9"/>
-              </a:solidFill>
-              <a:prstDash val="solid"/>
-              <a:round/>
-            </a:ln>
-            <a:effectLst/>
-          </c:spPr>
-          <c:dPt>
-            <c:idx val="0"/>
-            <c:bubble3D val="0"/>
-            <c:spPr>
-              <a:solidFill>
-                <a:srgbClr val="50B432"/>
-              </a:solidFill>
-              <a:effectLst/>
-            </c:spPr>
-          </c:dPt>
-          <c:dPt>
-            <c:idx val="1"/>
-            <c:bubble3D val="0"/>
-            <c:spPr>
-              <a:solidFill>
-                <a:srgbClr val="53B5E0"/>
-              </a:solidFill>
-              <a:effectLst/>
-            </c:spPr>
-          </c:dPt>
-          <c:dPt>
-            <c:idx val="2"/>
-            <c:bubble3D val="0"/>
-            <c:spPr>
-              <a:solidFill>
-                <a:srgbClr val="4292E1"/>
-              </a:solidFill>
-              <a:effectLst/>
-            </c:spPr>
-          </c:dPt>
-          <c:dPt>
-            <c:idx val="3"/>
-            <c:bubble3D val="0"/>
-            <c:spPr>
-              <a:solidFill>
-                <a:srgbClr val="ED8B1B"/>
-              </a:solidFill>
-              <a:effectLst/>
-            </c:spPr>
-          </c:dPt>
-          <c:dPt>
-            <c:idx val="4"/>
-            <c:bubble3D val="0"/>
-            <c:spPr>
-              <a:solidFill>
-                <a:srgbClr val="4A2ADB"/>
-              </a:solidFill>
-              <a:effectLst/>
-            </c:spPr>
-          </c:dPt>
-          <c:dLbls>
-            <c:dLbl>
-              <c:idx val="0"/>
-              <c:numFmt formatCode="0%" sourceLinked="0"/>
-              <c:spPr/>
-              <c:txPr>
-                <a:bodyPr/>
-                <a:lstStyle/>
-                <a:p>
-                  <a:pPr>
-                    <a:defRPr sz="900" b="0" i="0" u="none" strike="noStrike">
-                      <a:solidFill>
-                        <a:srgbClr val="FFFFFF"/>
-                      </a:solidFill>
-                      <a:latin typeface="Calibri"/>
-                    </a:defRPr>
-                  </a:pPr>
-                </a:p>
-              </c:txPr>
-              <c:showLegendKey val="0"/>
-              <c:showVal val="0"/>
-              <c:showCatName val="0"/>
-              <c:showSerName val="0"/>
-              <c:showPercent val="1"/>
-              <c:showBubbleSize val="0"/>
-            </c:dLbl>
-            <c:dLbl>
-              <c:idx val="1"/>
-              <c:numFmt formatCode="0%" sourceLinked="0"/>
-              <c:spPr/>
-              <c:txPr>
-                <a:bodyPr/>
-                <a:lstStyle/>
-                <a:p>
-                  <a:pPr>
-                    <a:defRPr sz="900" b="0" i="0" u="none" strike="noStrike">
-                      <a:solidFill>
-                        <a:srgbClr val="FFFFFF"/>
-                      </a:solidFill>
-                      <a:latin typeface="Calibri"/>
-                    </a:defRPr>
-                  </a:pPr>
-                </a:p>
-              </c:txPr>
-              <c:showLegendKey val="0"/>
-              <c:showVal val="0"/>
-              <c:showCatName val="0"/>
-              <c:showSerName val="0"/>
-              <c:showPercent val="1"/>
-              <c:showBubbleSize val="0"/>
-            </c:dLbl>
-            <c:dLbl>
-              <c:idx val="2"/>
-              <c:numFmt formatCode="0%" sourceLinked="0"/>
-              <c:spPr/>
-              <c:txPr>
-                <a:bodyPr/>
-                <a:lstStyle/>
-                <a:p>
-                  <a:pPr>
-                    <a:defRPr sz="900" b="0" i="0" u="none" strike="noStrike">
-                      <a:solidFill>
-                        <a:srgbClr val="FFFFFF"/>
-                      </a:solidFill>
-                      <a:latin typeface="Calibri"/>
-                    </a:defRPr>
-                  </a:pPr>
-                </a:p>
-              </c:txPr>
-              <c:showLegendKey val="0"/>
-              <c:showVal val="0"/>
-              <c:showCatName val="0"/>
-              <c:showSerName val="0"/>
-              <c:showPercent val="1"/>
-              <c:showBubbleSize val="0"/>
-            </c:dLbl>
-            <c:dLbl>
-              <c:idx val="3"/>
-              <c:numFmt formatCode="0%" sourceLinked="0"/>
-              <c:spPr/>
-              <c:txPr>
-                <a:bodyPr/>
-                <a:lstStyle/>
-                <a:p>
-                  <a:pPr>
-                    <a:defRPr sz="900" b="0" i="0" u="none" strike="noStrike">
-                      <a:solidFill>
-                        <a:srgbClr val="FFFFFF"/>
-                      </a:solidFill>
-                      <a:latin typeface="Calibri"/>
-                    </a:defRPr>
-                  </a:pPr>
-                </a:p>
-              </c:txPr>
-              <c:showLegendKey val="0"/>
-              <c:showVal val="0"/>
-              <c:showCatName val="0"/>
-              <c:showSerName val="0"/>
-              <c:showPercent val="1"/>
-              <c:showBubbleSize val="0"/>
-            </c:dLbl>
-            <c:dLbl>
-              <c:idx val="4"/>
-              <c:numFmt formatCode="0%" sourceLinked="0"/>
-              <c:spPr/>
-              <c:txPr>
-                <a:bodyPr/>
-                <a:lstStyle/>
-                <a:p>
-                  <a:pPr>
-                    <a:defRPr sz="900" b="0" i="0" u="none" strike="noStrike">
-                      <a:solidFill>
-                        <a:srgbClr val="FFFFFF"/>
-                      </a:solidFill>
-                      <a:latin typeface="Calibri"/>
-                    </a:defRPr>
-                  </a:pPr>
-                </a:p>
-              </c:txPr>
-              <c:showLegendKey val="0"/>
-              <c:showVal val="0"/>
-              <c:showCatName val="0"/>
-              <c:showSerName val="0"/>
-              <c:showPercent val="1"/>
-              <c:showBubbleSize val="0"/>
-            </c:dLbl>
-            <c:numFmt formatCode="0%" sourceLinked="0"/>
-            <c:txPr>
-              <a:bodyPr/>
-              <a:lstStyle/>
-              <a:p>
-                <a:pPr>
-                  <a:defRPr sz="1800" b="0" i="0" u="none" strike="noStrike">
-                    <a:solidFill>
-                      <a:srgbClr val="000000"/>
-                    </a:solidFill>
-                    <a:latin typeface="Arial"/>
-                  </a:defRPr>
-                </a:pPr>
-              </a:p>
-            </c:txPr>
-            <c:showLegendKey val="0"/>
-            <c:showVal val="0"/>
-            <c:showCatName val="1"/>
-            <c:showSerName val="0"/>
-            <c:showPercent val="1"/>
-            <c:showBubbleSize val="0"/>
-            <c:showLeaderLines val="0"/>
-          </c:dLbls>
-          <c:cat>
-            <c:strRef>
-              <c:f>Sheet1!$A$2:$A$6</c:f>
-              <c:strCache>
-                <c:ptCount val="5"/>
-                <c:pt idx="0">
-                  <c:v>Same day</c:v>
-                </c:pt>
-                <c:pt idx="1">
-                  <c:v>1-2 d</c:v>
-                </c:pt>
-                <c:pt idx="2">
-                  <c:v>2-4 d</c:v>
-                </c:pt>
-                <c:pt idx="3">
-                  <c:v>4-7 d</c:v>
-                </c:pt>
-                <c:pt idx="4">
-                  <c:v>&gt;7 d</c:v>
-                </c:pt>
-              </c:strCache>
-            </c:strRef>
-          </c:cat>
-          <c:val>
-            <c:numRef>
-              <c:f>Sheet1!$B$2:$B$6</c:f>
-              <c:numCache>
-                <c:ptCount val="5"/>
-                <c:pt idx="0">
-                  <c:v>62</c:v>
-                </c:pt>
-                <c:pt idx="1">
-                  <c:v>10</c:v>
-                </c:pt>
-                <c:pt idx="2">
-                  <c:v>0</c:v>
-                </c:pt>
-                <c:pt idx="3">
-                  <c:v>0</c:v>
-                </c:pt>
-                <c:pt idx="4">
-                  <c:v>1</c:v>
-                </c:pt>
-              </c:numCache>
-            </c:numRef>
-          </c:val>
-        </c:ser>
-        <c:firstSliceAng val="0"/>
-        <c:holeSize val="58"/>
-      </c:doughnutChart>
-      <c:spPr>
-        <a:noFill/>
-        <a:ln>
-          <a:noFill/>
-        </a:ln>
-        <a:effectLst/>
-      </c:spPr>
-    </c:plotArea>
-    <c:legend>
-      <c:legendPos val="r"/>
-      <c:overlay val="0"/>
-      <c:txPr>
-        <a:bodyPr/>
-        <a:lstStyle/>
-        <a:p>
-          <a:pPr>
-            <a:defRPr sz="1000">
-              <a:solidFill>
-                <a:srgbClr val="1F2A44"/>
-              </a:solidFill>
-              <a:latin typeface="Calibri"/>
-              <a:cs typeface="Calibri"/>
-            </a:defRPr>
-          </a:pPr>
-          <a:endParaRPr lang="en-US"/>
-        </a:p>
-      </c:txPr>
-    </c:legend>
-    <c:plotVisOnly val="1"/>
-    <c:dispBlanksAs val="span"/>
-  </c:chart>
-  <c:spPr>
-    <a:noFill/>
-    <a:ln>
-      <a:noFill/>
-    </a:ln>
-    <a:effectLst/>
-  </c:spPr>
-  <c:externalData r:id="rId1">
-    <c:autoUpdate val="0"/>
-  </c:externalData>
-</c:chartSpace>
-</file>
-
-<file path=ppt/charts/chart2.xml><?xml version="1.0" encoding="utf-8"?>
-<c:chartSpace xmlns:c="http://schemas.openxmlformats.org/drawingml/2006/chart" xmlns:a="http://schemas.openxmlformats.org/drawingml/2006/main" xmlns:r="http://schemas.openxmlformats.org/officeDocument/2006/relationships">
-  <c:date1904 val="0"/>
-  <c:roundedCorners val="1"/>
-  <c:chart>
-    <c:title>
-      <c:tx>
-        <c:rich>
-          <a:bodyPr/>
-          <a:lstStyle/>
-          <a:p>
-            <a:pPr>
-              <a:defRPr sz="1200" b="0" i="0" u="none" strike="noStrike">
-                <a:solidFill>
-                  <a:srgbClr val="158158"/>
-                </a:solidFill>
-                <a:latin typeface="Calibri"/>
-              </a:defRPr>
-            </a:pPr>
-            <a:r>
-              <a:rPr sz="1200" b="0" i="0" u="none" strike="noStrike">
-                <a:solidFill>
-                  <a:srgbClr val="158158"/>
-                </a:solidFill>
-                <a:latin typeface="Calibri"/>
-              </a:rPr>
-              <a:t>Invoices by portal (platforms we use most)</a:t>
-            </a:r>
-          </a:p>
-        </c:rich>
-      </c:tx>
-      <c:layout/>
-      <c:overlay val="0"/>
-    </c:title>
-    <c:autoTitleDeleted val="0"/>
-    <c:plotArea>
-      <c:layout/>
-      <c:barChart>
-        <c:barDir val="bar"/>
-        <c:grouping val="clustered"/>
-        <c:varyColors val="0"/>
-        <c:ser>
-          <c:idx val="0"/>
-          <c:order val="0"/>
-          <c:tx>
-            <c:strRef>
-              <c:f>Sheet1!$B$1</c:f>
-              <c:strCache>
-                <c:ptCount val="1"/>
-                <c:pt idx="0">
-                  <c:v>Invoices</c:v>
-                </c:pt>
-              </c:strCache>
-            </c:strRef>
-          </c:tx>
-          <c:spPr>
-            <a:solidFill>
-              <a:srgbClr val="158158"/>
-            </a:solidFill>
-            <a:effectLst/>
-          </c:spPr>
-          <c:invertIfNegative val="0"/>
-          <c:dLbls>
-            <c:numFmt formatCode="#,##0" sourceLinked="0"/>
-            <c:txPr>
-              <a:bodyPr/>
-              <a:lstStyle/>
-              <a:p>
-                <a:pPr>
-                  <a:defRPr b="0" i="0" strike="noStrike" sz="1000" u="none">
-                    <a:solidFill>
-                      <a:srgbClr val="1F2A44"/>
-                    </a:solidFill>
-                    <a:latin typeface="Calibri"/>
-                  </a:defRPr>
-                </a:pPr>
-              </a:p>
-            </c:txPr>
-            <c:showLegendKey val="0"/>
-            <c:showVal val="1"/>
-            <c:showCatName val="0"/>
-            <c:showSerName val="0"/>
-            <c:showPercent val="0"/>
-            <c:showBubbleSize val="0"/>
-            <c:showLeaderLines val="0"/>
-          </c:dLbls>
-          <c:cat>
-            <c:multiLvlStrRef>
-              <c:f>Sheet1!$A$2:$A$7</c:f>
-              <c:multiLvlStrCache>
-                <c:ptCount val="6"/>
-                <c:lvl>
-                  <c:pt idx="0">
-                    <c:v>Coupa</c:v>
-                  </c:pt>
-                  <c:pt idx="1">
-                    <c:v>Ariba</c:v>
-                  </c:pt>
-                  <c:pt idx="2">
-                    <c:v>Taulia</c:v>
-                  </c:pt>
-                  <c:pt idx="3">
-                    <c:v>URL</c:v>
-                  </c:pt>
-                  <c:pt idx="4">
-                    <c:v>Chorus Pro</c:v>
-                  </c:pt>
-                  <c:pt idx="5">
-                    <c:v>Oracle</c:v>
-                  </c:pt>
-                </c:lvl>
-              </c:multiLvlStrCache>
-            </c:multiLvlStrRef>
-          </c:cat>
-          <c:val>
-            <c:numRef>
-              <c:f>Sheet1!$B$2:$B$7</c:f>
-              <c:numCache>
-                <c:formatCode>General</c:formatCode>
-                <c:ptCount val="6"/>
-                <c:pt idx="0">
-                  <c:v>28</c:v>
-                </c:pt>
-                <c:pt idx="1">
-                  <c:v>18</c:v>
-                </c:pt>
-                <c:pt idx="2">
-                  <c:v>9</c:v>
-                </c:pt>
-                <c:pt idx="3">
-                  <c:v>6</c:v>
-                </c:pt>
-                <c:pt idx="4">
-                  <c:v>5</c:v>
-                </c:pt>
-                <c:pt idx="5">
-                  <c:v>3</c:v>
-                </c:pt>
-              </c:numCache>
-            </c:numRef>
-          </c:val>
-        </c:ser>
-        <c:dLbls>
-          <c:numFmt formatCode="#,##0" sourceLinked="0"/>
-          <c:txPr>
-            <a:bodyPr/>
-            <a:lstStyle/>
-            <a:p>
-              <a:pPr>
-                <a:defRPr b="0" i="0" strike="noStrike" sz="1000" u="none">
-                  <a:solidFill>
-                    <a:srgbClr val="1F2A44"/>
-                  </a:solidFill>
-                  <a:latin typeface="Calibri"/>
-                </a:defRPr>
-              </a:pPr>
-            </a:p>
-          </c:txPr>
-          <c:showLegendKey val="0"/>
-          <c:showVal val="1"/>
-          <c:showCatName val="0"/>
-          <c:showSerName val="0"/>
-          <c:showPercent val="0"/>
-          <c:showBubbleSize val="0"/>
-          <c:showLeaderLines val="0"/>
-        </c:dLbls>
-        <c:gapWidth val="150"/>
-        <c:overlap val="0"/>
-        <c:axId val="2094734554"/>
-        <c:axId val="2094734552"/>
-        <c:axId val="2094734556"/>
-      </c:barChart>
-      <c:catAx>
-        <c:axId val="2094734554"/>
-        <c:scaling>
-          <c:orientation val="minMax"/>
-        </c:scaling>
-        <c:delete val="0"/>
-        <c:axPos val="l"/>
-        <c:numFmt formatCode="General" sourceLinked="1"/>
-        <c:majorTickMark val="out"/>
-        <c:minorTickMark val="none"/>
-        <c:tickLblPos val="nextTo"/>
-        <c:spPr>
-          <a:ln w="12700" cap="flat">
-            <a:solidFill>
-              <a:srgbClr val="888888"/>
-            </a:solidFill>
-            <a:prstDash val="solid"/>
-            <a:round/>
-          </a:ln>
-        </c:spPr>
-        <c:txPr>
-          <a:bodyPr/>
-          <a:lstStyle/>
-          <a:p>
-            <a:pPr>
-              <a:defRPr sz="1000" b="0" i="0" u="none" strike="noStrike">
-                <a:solidFill>
-                  <a:srgbClr val="6B7B84"/>
-                </a:solidFill>
-                <a:latin typeface="Calibri"/>
-              </a:defRPr>
-            </a:pPr>
-            <a:endParaRPr lang="en-US"/>
-          </a:p>
-        </c:txPr>
-        <c:crossAx val="2094734552"/>
-        <c:crosses val="autoZero"/>
-        <c:auto val="1"/>
-        <c:lblAlgn val="ctr"/>
-        <c:noMultiLvlLbl val="1"/>
-      </c:catAx>
-      <c:valAx>
-        <c:axId val="2094734552"/>
-        <c:scaling>
-          <c:orientation val="minMax"/>
-        </c:scaling>
-        <c:delete val="1"/>
-        <c:axPos val="b"/>
-        <c:numFmt formatCode="General" sourceLinked="0"/>
-        <c:majorTickMark val="out"/>
-        <c:minorTickMark val="none"/>
-        <c:tickLblPos val="low"/>
-        <c:spPr>
-          <a:ln w="12700" cap="flat">
-            <a:solidFill>
-              <a:srgbClr val="888888"/>
-            </a:solidFill>
-            <a:prstDash val="solid"/>
-            <a:round/>
-          </a:ln>
-        </c:spPr>
-        <c:txPr>
-          <a:bodyPr/>
-          <a:lstStyle/>
-          <a:p>
-            <a:pPr>
-              <a:defRPr sz="1200" b="0" i="0" u="none" strike="noStrike">
-                <a:solidFill>
-                  <a:srgbClr val="000000"/>
-                </a:solidFill>
-                <a:latin typeface="Arial"/>
-              </a:defRPr>
-            </a:pPr>
-            <a:endParaRPr lang="en-US"/>
-          </a:p>
-        </c:txPr>
-        <c:crossAx val="2094734554"/>
-        <c:crosses val="autoZero"/>
-        <c:crossBetween val="between"/>
-      </c:valAx>
-      <c:spPr>
-        <a:noFill/>
-        <a:ln>
-          <a:noFill/>
-        </a:ln>
-        <a:effectLst/>
-      </c:spPr>
-    </c:plotArea>
-    <c:plotVisOnly val="1"/>
-    <c:dispBlanksAs val="span"/>
-  </c:chart>
-  <c:spPr>
-    <a:noFill/>
-    <a:ln>
-      <a:noFill/>
-    </a:ln>
-    <a:effectLst/>
-  </c:spPr>
-  <c:externalData r:id="rId1">
-    <c:autoUpdate val="0"/>
-  </c:externalData>
-</c:chartSpace>
 </file>
 
 <file path=ppt/notesMasters/notesMaster1.xml><?xml version="1.0" encoding="utf-8"?>
@@ -2195,6 +1560,74 @@
                     <a:bodyPr/>
                     <a:lstStyle/>
                     <a:p>
+                      <a:pPr algn="l" indent="0" marL="0">
+                        <a:buNone/>
+                      </a:pPr>
+                      <a:r>
+                        <a:rPr lang="en-US" sz="1100" b="1" dirty="0">
+                          <a:solidFill>
+                            <a:srgbClr val="FFFFFF"/>
+                          </a:solidFill>
+                          <a:latin typeface="Calibri" pitchFamily="34" charset="0"/>
+                          <a:ea typeface="Calibri" pitchFamily="34" charset="-122"/>
+                          <a:cs typeface="Calibri" pitchFamily="34" charset="-120"/>
+                        </a:rPr>
+                        <a:t>Month</a:t>
+                      </a:r>
+                      <a:endParaRPr lang="en-US" sz="1100" dirty="0">
+                        <a:latin typeface="Calibri" charset="0"/>
+                        <a:ea typeface="Calibri" charset="0"/>
+                        <a:cs typeface="Calibri" charset="0"/>
+                      </a:endParaRPr>
+                    </a:p>
+                  </a:txBody>
+                  <a:tcPr marL="38100" marR="12700" marT="12700" marB="12700" anchor="ctr">
+                    <a:lnL w="6350" cap="flat" cmpd="sng" algn="ctr">
+                      <a:solidFill>
+                        <a:srgbClr val="DDDDDD"/>
+                      </a:solidFill>
+                      <a:prstDash val="solid"/>
+                      <a:round/>
+                      <a:headEnd type="none" w="med" len="med"/>
+                      <a:tailEnd type="none" w="med" len="med"/>
+                    </a:lnL>
+                    <a:lnR w="6350" cap="flat" cmpd="sng" algn="ctr">
+                      <a:solidFill>
+                        <a:srgbClr val="DDDDDD"/>
+                      </a:solidFill>
+                      <a:prstDash val="solid"/>
+                      <a:round/>
+                      <a:headEnd type="none" w="med" len="med"/>
+                      <a:tailEnd type="none" w="med" len="med"/>
+                    </a:lnR>
+                    <a:lnT w="6350" cap="flat" cmpd="sng" algn="ctr">
+                      <a:solidFill>
+                        <a:srgbClr val="DDDDDD"/>
+                      </a:solidFill>
+                      <a:prstDash val="solid"/>
+                      <a:round/>
+                      <a:headEnd type="none" w="med" len="med"/>
+                      <a:tailEnd type="none" w="med" len="med"/>
+                    </a:lnT>
+                    <a:lnB w="6350" cap="flat" cmpd="sng" algn="ctr">
+                      <a:solidFill>
+                        <a:srgbClr val="DDDDDD"/>
+                      </a:solidFill>
+                      <a:prstDash val="solid"/>
+                      <a:round/>
+                      <a:headEnd type="none" w="med" len="med"/>
+                      <a:tailEnd type="none" w="med" len="med"/>
+                    </a:lnB>
+                    <a:solidFill>
+                      <a:srgbClr val="158158"/>
+                    </a:solidFill>
+                  </a:tcPr>
+                </a:tc>
+                <a:tc>
+                  <a:txBody>
+                    <a:bodyPr/>
+                    <a:lstStyle/>
+                    <a:p>
                       <a:pPr algn="ctr" indent="0" marL="0">
                         <a:buNone/>
                       </a:pPr>
@@ -2207,7 +1640,7 @@
                           <a:ea typeface="Calibri" pitchFamily="34" charset="-122"/>
                           <a:cs typeface="Calibri" pitchFamily="34" charset="-120"/>
                         </a:rPr>
-                        <a:t>Month</a:t>
+                        <a:t>Uploads</a:t>
                       </a:r>
                       <a:endParaRPr lang="en-US" sz="1100" dirty="0">
                         <a:latin typeface="Calibri" charset="0"/>
@@ -2216,7 +1649,7 @@
                       </a:endParaRPr>
                     </a:p>
                   </a:txBody>
-                  <a:tcPr marL="91440" marR="91440" marT="45720" marB="45720" anchor="ctr">
+                  <a:tcPr marL="38100" marR="12700" marT="12700" marB="12700" anchor="ctr">
                     <a:lnL w="6350" cap="flat" cmpd="sng" algn="ctr">
                       <a:solidFill>
                         <a:srgbClr val="DDDDDD"/>
@@ -2275,7 +1708,7 @@
                           <a:ea typeface="Calibri" pitchFamily="34" charset="-122"/>
                           <a:cs typeface="Calibri" pitchFamily="34" charset="-120"/>
                         </a:rPr>
-                        <a:t>Uploads</a:t>
+                        <a:t>Resolved</a:t>
                       </a:r>
                       <a:endParaRPr lang="en-US" sz="1100" dirty="0">
                         <a:latin typeface="Calibri" charset="0"/>
@@ -2284,7 +1717,7 @@
                       </a:endParaRPr>
                     </a:p>
                   </a:txBody>
-                  <a:tcPr marL="91440" marR="91440" marT="45720" marB="45720" anchor="ctr">
+                  <a:tcPr marL="38100" marR="12700" marT="12700" marB="12700" anchor="ctr">
                     <a:lnL w="6350" cap="flat" cmpd="sng" algn="ctr">
                       <a:solidFill>
                         <a:srgbClr val="DDDDDD"/>
@@ -2343,7 +1776,7 @@
                           <a:ea typeface="Calibri" pitchFamily="34" charset="-122"/>
                           <a:cs typeface="Calibri" pitchFamily="34" charset="-120"/>
                         </a:rPr>
-                        <a:t>Resolved</a:t>
+                        <a:t>Avg. days</a:t>
                       </a:r>
                       <a:endParaRPr lang="en-US" sz="1100" dirty="0">
                         <a:latin typeface="Calibri" charset="0"/>
@@ -2352,7 +1785,7 @@
                       </a:endParaRPr>
                     </a:p>
                   </a:txBody>
-                  <a:tcPr marL="91440" marR="91440" marT="45720" marB="45720" anchor="ctr">
+                  <a:tcPr marL="38100" marR="12700" marT="12700" marB="12700" anchor="ctr">
                     <a:lnL w="6350" cap="flat" cmpd="sng" algn="ctr">
                       <a:solidFill>
                         <a:srgbClr val="DDDDDD"/>
@@ -2411,7 +1844,7 @@
                           <a:ea typeface="Calibri" pitchFamily="34" charset="-122"/>
                           <a:cs typeface="Calibri" pitchFamily="34" charset="-120"/>
                         </a:rPr>
-                        <a:t>Avg. days</a:t>
+                        <a:t>% same day</a:t>
                       </a:r>
                       <a:endParaRPr lang="en-US" sz="1100" dirty="0">
                         <a:latin typeface="Calibri" charset="0"/>
@@ -2420,75 +1853,7 @@
                       </a:endParaRPr>
                     </a:p>
                   </a:txBody>
-                  <a:tcPr marL="91440" marR="91440" marT="45720" marB="45720" anchor="ctr">
-                    <a:lnL w="6350" cap="flat" cmpd="sng" algn="ctr">
-                      <a:solidFill>
-                        <a:srgbClr val="DDDDDD"/>
-                      </a:solidFill>
-                      <a:prstDash val="solid"/>
-                      <a:round/>
-                      <a:headEnd type="none" w="med" len="med"/>
-                      <a:tailEnd type="none" w="med" len="med"/>
-                    </a:lnL>
-                    <a:lnR w="6350" cap="flat" cmpd="sng" algn="ctr">
-                      <a:solidFill>
-                        <a:srgbClr val="DDDDDD"/>
-                      </a:solidFill>
-                      <a:prstDash val="solid"/>
-                      <a:round/>
-                      <a:headEnd type="none" w="med" len="med"/>
-                      <a:tailEnd type="none" w="med" len="med"/>
-                    </a:lnR>
-                    <a:lnT w="6350" cap="flat" cmpd="sng" algn="ctr">
-                      <a:solidFill>
-                        <a:srgbClr val="DDDDDD"/>
-                      </a:solidFill>
-                      <a:prstDash val="solid"/>
-                      <a:round/>
-                      <a:headEnd type="none" w="med" len="med"/>
-                      <a:tailEnd type="none" w="med" len="med"/>
-                    </a:lnT>
-                    <a:lnB w="6350" cap="flat" cmpd="sng" algn="ctr">
-                      <a:solidFill>
-                        <a:srgbClr val="DDDDDD"/>
-                      </a:solidFill>
-                      <a:prstDash val="solid"/>
-                      <a:round/>
-                      <a:headEnd type="none" w="med" len="med"/>
-                      <a:tailEnd type="none" w="med" len="med"/>
-                    </a:lnB>
-                    <a:solidFill>
-                      <a:srgbClr val="158158"/>
-                    </a:solidFill>
-                  </a:tcPr>
-                </a:tc>
-                <a:tc>
-                  <a:txBody>
-                    <a:bodyPr/>
-                    <a:lstStyle/>
-                    <a:p>
-                      <a:pPr algn="ctr" indent="0" marL="0">
-                        <a:buNone/>
-                      </a:pPr>
-                      <a:r>
-                        <a:rPr lang="en-US" sz="1100" b="1" dirty="0">
-                          <a:solidFill>
-                            <a:srgbClr val="FFFFFF"/>
-                          </a:solidFill>
-                          <a:latin typeface="Calibri" pitchFamily="34" charset="0"/>
-                          <a:ea typeface="Calibri" pitchFamily="34" charset="-122"/>
-                          <a:cs typeface="Calibri" pitchFamily="34" charset="-120"/>
-                        </a:rPr>
-                        <a:t>% same day</a:t>
-                      </a:r>
-                      <a:endParaRPr lang="en-US" sz="1100" dirty="0">
-                        <a:latin typeface="Calibri" charset="0"/>
-                        <a:ea typeface="Calibri" charset="0"/>
-                        <a:cs typeface="Calibri" charset="0"/>
-                      </a:endParaRPr>
-                    </a:p>
-                  </a:txBody>
-                  <a:tcPr marL="91440" marR="91440" marT="45720" marB="45720" anchor="ctr">
+                  <a:tcPr marL="38100" marR="12700" marT="12700" marB="12700" anchor="ctr">
                     <a:lnL w="6350" cap="flat" cmpd="sng" algn="ctr">
                       <a:solidFill>
                         <a:srgbClr val="DDDDDD"/>
@@ -2537,6 +1902,74 @@
                     <a:bodyPr/>
                     <a:lstStyle/>
                     <a:p>
+                      <a:pPr algn="l" indent="0" marL="0">
+                        <a:buNone/>
+                      </a:pPr>
+                      <a:r>
+                        <a:rPr lang="en-US" sz="1100" dirty="0">
+                          <a:solidFill>
+                            <a:srgbClr val="1F2A44"/>
+                          </a:solidFill>
+                          <a:latin typeface="Calibri" pitchFamily="34" charset="0"/>
+                          <a:ea typeface="Calibri" pitchFamily="34" charset="-122"/>
+                          <a:cs typeface="Calibri" pitchFamily="34" charset="-120"/>
+                        </a:rPr>
+                        <a:t>Jul - 26</a:t>
+                      </a:r>
+                      <a:endParaRPr lang="en-US" sz="1100" dirty="0">
+                        <a:latin typeface="Calibri" charset="0"/>
+                        <a:ea typeface="Calibri" charset="0"/>
+                        <a:cs typeface="Calibri" charset="0"/>
+                      </a:endParaRPr>
+                    </a:p>
+                  </a:txBody>
+                  <a:tcPr marL="38100" marR="12700" marT="12700" marB="12700" anchor="ctr">
+                    <a:lnL w="6350" cap="flat" cmpd="sng" algn="ctr">
+                      <a:solidFill>
+                        <a:srgbClr val="DDDDDD"/>
+                      </a:solidFill>
+                      <a:prstDash val="solid"/>
+                      <a:round/>
+                      <a:headEnd type="none" w="med" len="med"/>
+                      <a:tailEnd type="none" w="med" len="med"/>
+                    </a:lnL>
+                    <a:lnR w="6350" cap="flat" cmpd="sng" algn="ctr">
+                      <a:solidFill>
+                        <a:srgbClr val="DDDDDD"/>
+                      </a:solidFill>
+                      <a:prstDash val="solid"/>
+                      <a:round/>
+                      <a:headEnd type="none" w="med" len="med"/>
+                      <a:tailEnd type="none" w="med" len="med"/>
+                    </a:lnR>
+                    <a:lnT w="6350" cap="flat" cmpd="sng" algn="ctr">
+                      <a:solidFill>
+                        <a:srgbClr val="DDDDDD"/>
+                      </a:solidFill>
+                      <a:prstDash val="solid"/>
+                      <a:round/>
+                      <a:headEnd type="none" w="med" len="med"/>
+                      <a:tailEnd type="none" w="med" len="med"/>
+                    </a:lnT>
+                    <a:lnB w="6350" cap="flat" cmpd="sng" algn="ctr">
+                      <a:solidFill>
+                        <a:srgbClr val="DDDDDD"/>
+                      </a:solidFill>
+                      <a:prstDash val="solid"/>
+                      <a:round/>
+                      <a:headEnd type="none" w="med" len="med"/>
+                      <a:tailEnd type="none" w="med" len="med"/>
+                    </a:lnB>
+                    <a:solidFill>
+                      <a:srgbClr val="FFFFFF"/>
+                    </a:solidFill>
+                  </a:tcPr>
+                </a:tc>
+                <a:tc>
+                  <a:txBody>
+                    <a:bodyPr/>
+                    <a:lstStyle/>
+                    <a:p>
                       <a:pPr algn="ctr" indent="0" marL="0">
                         <a:buNone/>
                       </a:pPr>
@@ -2549,7 +1982,7 @@
                           <a:ea typeface="Calibri" pitchFamily="34" charset="-122"/>
                           <a:cs typeface="Calibri" pitchFamily="34" charset="-120"/>
                         </a:rPr>
-                        <a:t>Jul - 26</a:t>
+                        <a:t>62</a:t>
                       </a:r>
                       <a:endParaRPr lang="en-US" sz="1100" dirty="0">
                         <a:latin typeface="Calibri" charset="0"/>
@@ -2558,7 +1991,7 @@
                       </a:endParaRPr>
                     </a:p>
                   </a:txBody>
-                  <a:tcPr marL="91440" marR="91440" marT="45720" marB="45720" anchor="ctr">
+                  <a:tcPr marL="38100" marR="12700" marT="12700" marB="12700" anchor="ctr">
                     <a:lnL w="6350" cap="flat" cmpd="sng" algn="ctr">
                       <a:solidFill>
                         <a:srgbClr val="DDDDDD"/>
@@ -2617,7 +2050,7 @@
                           <a:ea typeface="Calibri" pitchFamily="34" charset="-122"/>
                           <a:cs typeface="Calibri" pitchFamily="34" charset="-120"/>
                         </a:rPr>
-                        <a:t>62</a:t>
+                        <a:t>61</a:t>
                       </a:r>
                       <a:endParaRPr lang="en-US" sz="1100" dirty="0">
                         <a:latin typeface="Calibri" charset="0"/>
@@ -2626,7 +2059,7 @@
                       </a:endParaRPr>
                     </a:p>
                   </a:txBody>
-                  <a:tcPr marL="91440" marR="91440" marT="45720" marB="45720" anchor="ctr">
+                  <a:tcPr marL="38100" marR="12700" marT="12700" marB="12700" anchor="ctr">
                     <a:lnL w="6350" cap="flat" cmpd="sng" algn="ctr">
                       <a:solidFill>
                         <a:srgbClr val="DDDDDD"/>
@@ -2685,7 +2118,7 @@
                           <a:ea typeface="Calibri" pitchFamily="34" charset="-122"/>
                           <a:cs typeface="Calibri" pitchFamily="34" charset="-120"/>
                         </a:rPr>
-                        <a:t>61</a:t>
+                        <a:t>2.9</a:t>
                       </a:r>
                       <a:endParaRPr lang="en-US" sz="1100" dirty="0">
                         <a:latin typeface="Calibri" charset="0"/>
@@ -2694,7 +2127,7 @@
                       </a:endParaRPr>
                     </a:p>
                   </a:txBody>
-                  <a:tcPr marL="91440" marR="91440" marT="45720" marB="45720" anchor="ctr">
+                  <a:tcPr marL="38100" marR="12700" marT="12700" marB="12700" anchor="ctr">
                     <a:lnL w="6350" cap="flat" cmpd="sng" algn="ctr">
                       <a:solidFill>
                         <a:srgbClr val="DDDDDD"/>
@@ -2753,7 +2186,7 @@
                           <a:ea typeface="Calibri" pitchFamily="34" charset="-122"/>
                           <a:cs typeface="Calibri" pitchFamily="34" charset="-120"/>
                         </a:rPr>
-                        <a:t>2.9</a:t>
+                        <a:t>77%</a:t>
                       </a:r>
                       <a:endParaRPr lang="en-US" sz="1100" dirty="0">
                         <a:latin typeface="Calibri" charset="0"/>
@@ -2762,75 +2195,7 @@
                       </a:endParaRPr>
                     </a:p>
                   </a:txBody>
-                  <a:tcPr marL="91440" marR="91440" marT="45720" marB="45720" anchor="ctr">
-                    <a:lnL w="6350" cap="flat" cmpd="sng" algn="ctr">
-                      <a:solidFill>
-                        <a:srgbClr val="DDDDDD"/>
-                      </a:solidFill>
-                      <a:prstDash val="solid"/>
-                      <a:round/>
-                      <a:headEnd type="none" w="med" len="med"/>
-                      <a:tailEnd type="none" w="med" len="med"/>
-                    </a:lnL>
-                    <a:lnR w="6350" cap="flat" cmpd="sng" algn="ctr">
-                      <a:solidFill>
-                        <a:srgbClr val="DDDDDD"/>
-                      </a:solidFill>
-                      <a:prstDash val="solid"/>
-                      <a:round/>
-                      <a:headEnd type="none" w="med" len="med"/>
-                      <a:tailEnd type="none" w="med" len="med"/>
-                    </a:lnR>
-                    <a:lnT w="6350" cap="flat" cmpd="sng" algn="ctr">
-                      <a:solidFill>
-                        <a:srgbClr val="DDDDDD"/>
-                      </a:solidFill>
-                      <a:prstDash val="solid"/>
-                      <a:round/>
-                      <a:headEnd type="none" w="med" len="med"/>
-                      <a:tailEnd type="none" w="med" len="med"/>
-                    </a:lnT>
-                    <a:lnB w="6350" cap="flat" cmpd="sng" algn="ctr">
-                      <a:solidFill>
-                        <a:srgbClr val="DDDDDD"/>
-                      </a:solidFill>
-                      <a:prstDash val="solid"/>
-                      <a:round/>
-                      <a:headEnd type="none" w="med" len="med"/>
-                      <a:tailEnd type="none" w="med" len="med"/>
-                    </a:lnB>
-                    <a:solidFill>
-                      <a:srgbClr val="FFFFFF"/>
-                    </a:solidFill>
-                  </a:tcPr>
-                </a:tc>
-                <a:tc>
-                  <a:txBody>
-                    <a:bodyPr/>
-                    <a:lstStyle/>
-                    <a:p>
-                      <a:pPr algn="ctr" indent="0" marL="0">
-                        <a:buNone/>
-                      </a:pPr>
-                      <a:r>
-                        <a:rPr lang="en-US" sz="1100" dirty="0">
-                          <a:solidFill>
-                            <a:srgbClr val="1F2A44"/>
-                          </a:solidFill>
-                          <a:latin typeface="Calibri" pitchFamily="34" charset="0"/>
-                          <a:ea typeface="Calibri" pitchFamily="34" charset="-122"/>
-                          <a:cs typeface="Calibri" pitchFamily="34" charset="-120"/>
-                        </a:rPr>
-                        <a:t>77%</a:t>
-                      </a:r>
-                      <a:endParaRPr lang="en-US" sz="1100" dirty="0">
-                        <a:latin typeface="Calibri" charset="0"/>
-                        <a:ea typeface="Calibri" charset="0"/>
-                        <a:cs typeface="Calibri" charset="0"/>
-                      </a:endParaRPr>
-                    </a:p>
-                  </a:txBody>
-                  <a:tcPr marL="91440" marR="91440" marT="45720" marB="45720" anchor="ctr">
+                  <a:tcPr marL="38100" marR="12700" marT="12700" marB="12700" anchor="ctr">
                     <a:lnL w="6350" cap="flat" cmpd="sng" algn="ctr">
                       <a:solidFill>
                         <a:srgbClr val="DDDDDD"/>
@@ -2879,6 +2244,74 @@
                     <a:bodyPr/>
                     <a:lstStyle/>
                     <a:p>
+                      <a:pPr algn="l" indent="0" marL="0">
+                        <a:buNone/>
+                      </a:pPr>
+                      <a:r>
+                        <a:rPr lang="en-US" sz="1100" dirty="0">
+                          <a:solidFill>
+                            <a:srgbClr val="1F2A44"/>
+                          </a:solidFill>
+                          <a:latin typeface="Calibri" pitchFamily="34" charset="0"/>
+                          <a:ea typeface="Calibri" pitchFamily="34" charset="-122"/>
+                          <a:cs typeface="Calibri" pitchFamily="34" charset="-120"/>
+                        </a:rPr>
+                        <a:t>Aug - 26</a:t>
+                      </a:r>
+                      <a:endParaRPr lang="en-US" sz="1100" dirty="0">
+                        <a:latin typeface="Calibri" charset="0"/>
+                        <a:ea typeface="Calibri" charset="0"/>
+                        <a:cs typeface="Calibri" charset="0"/>
+                      </a:endParaRPr>
+                    </a:p>
+                  </a:txBody>
+                  <a:tcPr marL="38100" marR="12700" marT="12700" marB="12700" anchor="ctr">
+                    <a:lnL w="6350" cap="flat" cmpd="sng" algn="ctr">
+                      <a:solidFill>
+                        <a:srgbClr val="DDDDDD"/>
+                      </a:solidFill>
+                      <a:prstDash val="solid"/>
+                      <a:round/>
+                      <a:headEnd type="none" w="med" len="med"/>
+                      <a:tailEnd type="none" w="med" len="med"/>
+                    </a:lnL>
+                    <a:lnR w="6350" cap="flat" cmpd="sng" algn="ctr">
+                      <a:solidFill>
+                        <a:srgbClr val="DDDDDD"/>
+                      </a:solidFill>
+                      <a:prstDash val="solid"/>
+                      <a:round/>
+                      <a:headEnd type="none" w="med" len="med"/>
+                      <a:tailEnd type="none" w="med" len="med"/>
+                    </a:lnR>
+                    <a:lnT w="6350" cap="flat" cmpd="sng" algn="ctr">
+                      <a:solidFill>
+                        <a:srgbClr val="DDDDDD"/>
+                      </a:solidFill>
+                      <a:prstDash val="solid"/>
+                      <a:round/>
+                      <a:headEnd type="none" w="med" len="med"/>
+                      <a:tailEnd type="none" w="med" len="med"/>
+                    </a:lnT>
+                    <a:lnB w="6350" cap="flat" cmpd="sng" algn="ctr">
+                      <a:solidFill>
+                        <a:srgbClr val="DDDDDD"/>
+                      </a:solidFill>
+                      <a:prstDash val="solid"/>
+                      <a:round/>
+                      <a:headEnd type="none" w="med" len="med"/>
+                      <a:tailEnd type="none" w="med" len="med"/>
+                    </a:lnB>
+                    <a:solidFill>
+                      <a:srgbClr val="FFFFFF"/>
+                    </a:solidFill>
+                  </a:tcPr>
+                </a:tc>
+                <a:tc>
+                  <a:txBody>
+                    <a:bodyPr/>
+                    <a:lstStyle/>
+                    <a:p>
                       <a:pPr algn="ctr" indent="0" marL="0">
                         <a:buNone/>
                       </a:pPr>
@@ -2891,7 +2324,7 @@
                           <a:ea typeface="Calibri" pitchFamily="34" charset="-122"/>
                           <a:cs typeface="Calibri" pitchFamily="34" charset="-120"/>
                         </a:rPr>
-                        <a:t>Aug - 26</a:t>
+                        <a:t>46</a:t>
                       </a:r>
                       <a:endParaRPr lang="en-US" sz="1100" dirty="0">
                         <a:latin typeface="Calibri" charset="0"/>
@@ -2900,7 +2333,7 @@
                       </a:endParaRPr>
                     </a:p>
                   </a:txBody>
-                  <a:tcPr marL="91440" marR="91440" marT="45720" marB="45720" anchor="ctr">
+                  <a:tcPr marL="38100" marR="12700" marT="12700" marB="12700" anchor="ctr">
                     <a:lnL w="6350" cap="flat" cmpd="sng" algn="ctr">
                       <a:solidFill>
                         <a:srgbClr val="DDDDDD"/>
@@ -2959,7 +2392,7 @@
                           <a:ea typeface="Calibri" pitchFamily="34" charset="-122"/>
                           <a:cs typeface="Calibri" pitchFamily="34" charset="-120"/>
                         </a:rPr>
-                        <a:t>46</a:t>
+                        <a:t>43</a:t>
                       </a:r>
                       <a:endParaRPr lang="en-US" sz="1100" dirty="0">
                         <a:latin typeface="Calibri" charset="0"/>
@@ -2968,7 +2401,7 @@
                       </a:endParaRPr>
                     </a:p>
                   </a:txBody>
-                  <a:tcPr marL="91440" marR="91440" marT="45720" marB="45720" anchor="ctr">
+                  <a:tcPr marL="38100" marR="12700" marT="12700" marB="12700" anchor="ctr">
                     <a:lnL w="6350" cap="flat" cmpd="sng" algn="ctr">
                       <a:solidFill>
                         <a:srgbClr val="DDDDDD"/>
@@ -3027,7 +2460,7 @@
                           <a:ea typeface="Calibri" pitchFamily="34" charset="-122"/>
                           <a:cs typeface="Calibri" pitchFamily="34" charset="-120"/>
                         </a:rPr>
-                        <a:t>43</a:t>
+                        <a:t>1.7</a:t>
                       </a:r>
                       <a:endParaRPr lang="en-US" sz="1100" dirty="0">
                         <a:latin typeface="Calibri" charset="0"/>
@@ -3036,7 +2469,7 @@
                       </a:endParaRPr>
                     </a:p>
                   </a:txBody>
-                  <a:tcPr marL="91440" marR="91440" marT="45720" marB="45720" anchor="ctr">
+                  <a:tcPr marL="38100" marR="12700" marT="12700" marB="12700" anchor="ctr">
                     <a:lnL w="6350" cap="flat" cmpd="sng" algn="ctr">
                       <a:solidFill>
                         <a:srgbClr val="DDDDDD"/>
@@ -3095,7 +2528,7 @@
                           <a:ea typeface="Calibri" pitchFamily="34" charset="-122"/>
                           <a:cs typeface="Calibri" pitchFamily="34" charset="-120"/>
                         </a:rPr>
-                        <a:t>1.7</a:t>
+                        <a:t>81%</a:t>
                       </a:r>
                       <a:endParaRPr lang="en-US" sz="1100" dirty="0">
                         <a:latin typeface="Calibri" charset="0"/>
@@ -3104,75 +2537,7 @@
                       </a:endParaRPr>
                     </a:p>
                   </a:txBody>
-                  <a:tcPr marL="91440" marR="91440" marT="45720" marB="45720" anchor="ctr">
-                    <a:lnL w="6350" cap="flat" cmpd="sng" algn="ctr">
-                      <a:solidFill>
-                        <a:srgbClr val="DDDDDD"/>
-                      </a:solidFill>
-                      <a:prstDash val="solid"/>
-                      <a:round/>
-                      <a:headEnd type="none" w="med" len="med"/>
-                      <a:tailEnd type="none" w="med" len="med"/>
-                    </a:lnL>
-                    <a:lnR w="6350" cap="flat" cmpd="sng" algn="ctr">
-                      <a:solidFill>
-                        <a:srgbClr val="DDDDDD"/>
-                      </a:solidFill>
-                      <a:prstDash val="solid"/>
-                      <a:round/>
-                      <a:headEnd type="none" w="med" len="med"/>
-                      <a:tailEnd type="none" w="med" len="med"/>
-                    </a:lnR>
-                    <a:lnT w="6350" cap="flat" cmpd="sng" algn="ctr">
-                      <a:solidFill>
-                        <a:srgbClr val="DDDDDD"/>
-                      </a:solidFill>
-                      <a:prstDash val="solid"/>
-                      <a:round/>
-                      <a:headEnd type="none" w="med" len="med"/>
-                      <a:tailEnd type="none" w="med" len="med"/>
-                    </a:lnT>
-                    <a:lnB w="6350" cap="flat" cmpd="sng" algn="ctr">
-                      <a:solidFill>
-                        <a:srgbClr val="DDDDDD"/>
-                      </a:solidFill>
-                      <a:prstDash val="solid"/>
-                      <a:round/>
-                      <a:headEnd type="none" w="med" len="med"/>
-                      <a:tailEnd type="none" w="med" len="med"/>
-                    </a:lnB>
-                    <a:solidFill>
-                      <a:srgbClr val="FFFFFF"/>
-                    </a:solidFill>
-                  </a:tcPr>
-                </a:tc>
-                <a:tc>
-                  <a:txBody>
-                    <a:bodyPr/>
-                    <a:lstStyle/>
-                    <a:p>
-                      <a:pPr algn="ctr" indent="0" marL="0">
-                        <a:buNone/>
-                      </a:pPr>
-                      <a:r>
-                        <a:rPr lang="en-US" sz="1100" dirty="0">
-                          <a:solidFill>
-                            <a:srgbClr val="1F2A44"/>
-                          </a:solidFill>
-                          <a:latin typeface="Calibri" pitchFamily="34" charset="0"/>
-                          <a:ea typeface="Calibri" pitchFamily="34" charset="-122"/>
-                          <a:cs typeface="Calibri" pitchFamily="34" charset="-120"/>
-                        </a:rPr>
-                        <a:t>81%</a:t>
-                      </a:r>
-                      <a:endParaRPr lang="en-US" sz="1100" dirty="0">
-                        <a:latin typeface="Calibri" charset="0"/>
-                        <a:ea typeface="Calibri" charset="0"/>
-                        <a:cs typeface="Calibri" charset="0"/>
-                      </a:endParaRPr>
-                    </a:p>
-                  </a:txBody>
-                  <a:tcPr marL="91440" marR="91440" marT="45720" marB="45720" anchor="ctr">
+                  <a:tcPr marL="38100" marR="12700" marT="12700" marB="12700" anchor="ctr">
                     <a:lnL w="6350" cap="flat" cmpd="sng" algn="ctr">
                       <a:solidFill>
                         <a:srgbClr val="DDDDDD"/>
@@ -3221,6 +2586,74 @@
                     <a:bodyPr/>
                     <a:lstStyle/>
                     <a:p>
+                      <a:pPr algn="l" indent="0" marL="0">
+                        <a:buNone/>
+                      </a:pPr>
+                      <a:r>
+                        <a:rPr lang="en-US" sz="1100" b="1" dirty="0">
+                          <a:solidFill>
+                            <a:srgbClr val="1F2A44"/>
+                          </a:solidFill>
+                          <a:latin typeface="Calibri" pitchFamily="34" charset="0"/>
+                          <a:ea typeface="Calibri" pitchFamily="34" charset="-122"/>
+                          <a:cs typeface="Calibri" pitchFamily="34" charset="-120"/>
+                        </a:rPr>
+                        <a:t>Sep - 26</a:t>
+                      </a:r>
+                      <a:endParaRPr lang="en-US" sz="1100" dirty="0">
+                        <a:latin typeface="Calibri" charset="0"/>
+                        <a:ea typeface="Calibri" charset="0"/>
+                        <a:cs typeface="Calibri" charset="0"/>
+                      </a:endParaRPr>
+                    </a:p>
+                  </a:txBody>
+                  <a:tcPr marL="38100" marR="12700" marT="12700" marB="12700" anchor="ctr">
+                    <a:lnL w="6350" cap="flat" cmpd="sng" algn="ctr">
+                      <a:solidFill>
+                        <a:srgbClr val="DDDDDD"/>
+                      </a:solidFill>
+                      <a:prstDash val="solid"/>
+                      <a:round/>
+                      <a:headEnd type="none" w="med" len="med"/>
+                      <a:tailEnd type="none" w="med" len="med"/>
+                    </a:lnL>
+                    <a:lnR w="6350" cap="flat" cmpd="sng" algn="ctr">
+                      <a:solidFill>
+                        <a:srgbClr val="DDDDDD"/>
+                      </a:solidFill>
+                      <a:prstDash val="solid"/>
+                      <a:round/>
+                      <a:headEnd type="none" w="med" len="med"/>
+                      <a:tailEnd type="none" w="med" len="med"/>
+                    </a:lnR>
+                    <a:lnT w="6350" cap="flat" cmpd="sng" algn="ctr">
+                      <a:solidFill>
+                        <a:srgbClr val="DDDDDD"/>
+                      </a:solidFill>
+                      <a:prstDash val="solid"/>
+                      <a:round/>
+                      <a:headEnd type="none" w="med" len="med"/>
+                      <a:tailEnd type="none" w="med" len="med"/>
+                    </a:lnT>
+                    <a:lnB w="6350" cap="flat" cmpd="sng" algn="ctr">
+                      <a:solidFill>
+                        <a:srgbClr val="DDDDDD"/>
+                      </a:solidFill>
+                      <a:prstDash val="solid"/>
+                      <a:round/>
+                      <a:headEnd type="none" w="med" len="med"/>
+                      <a:tailEnd type="none" w="med" len="med"/>
+                    </a:lnB>
+                    <a:solidFill>
+                      <a:srgbClr val="E9F3EF"/>
+                    </a:solidFill>
+                  </a:tcPr>
+                </a:tc>
+                <a:tc>
+                  <a:txBody>
+                    <a:bodyPr/>
+                    <a:lstStyle/>
+                    <a:p>
                       <a:pPr algn="ctr" indent="0" marL="0">
                         <a:buNone/>
                       </a:pPr>
@@ -3233,7 +2666,7 @@
                           <a:ea typeface="Calibri" pitchFamily="34" charset="-122"/>
                           <a:cs typeface="Calibri" pitchFamily="34" charset="-120"/>
                         </a:rPr>
-                        <a:t>Sep - 26</a:t>
+                        <a:t>85</a:t>
                       </a:r>
                       <a:endParaRPr lang="en-US" sz="1100" dirty="0">
                         <a:latin typeface="Calibri" charset="0"/>
@@ -3242,7 +2675,7 @@
                       </a:endParaRPr>
                     </a:p>
                   </a:txBody>
-                  <a:tcPr marL="91440" marR="91440" marT="45720" marB="45720" anchor="ctr">
+                  <a:tcPr marL="38100" marR="12700" marT="12700" marB="12700" anchor="ctr">
                     <a:lnL w="6350" cap="flat" cmpd="sng" algn="ctr">
                       <a:solidFill>
                         <a:srgbClr val="DDDDDD"/>
@@ -3301,7 +2734,7 @@
                           <a:ea typeface="Calibri" pitchFamily="34" charset="-122"/>
                           <a:cs typeface="Calibri" pitchFamily="34" charset="-120"/>
                         </a:rPr>
-                        <a:t>85</a:t>
+                        <a:t>73</a:t>
                       </a:r>
                       <a:endParaRPr lang="en-US" sz="1100" dirty="0">
                         <a:latin typeface="Calibri" charset="0"/>
@@ -3310,7 +2743,7 @@
                       </a:endParaRPr>
                     </a:p>
                   </a:txBody>
-                  <a:tcPr marL="91440" marR="91440" marT="45720" marB="45720" anchor="ctr">
+                  <a:tcPr marL="38100" marR="12700" marT="12700" marB="12700" anchor="ctr">
                     <a:lnL w="6350" cap="flat" cmpd="sng" algn="ctr">
                       <a:solidFill>
                         <a:srgbClr val="DDDDDD"/>
@@ -3369,7 +2802,7 @@
                           <a:ea typeface="Calibri" pitchFamily="34" charset="-122"/>
                           <a:cs typeface="Calibri" pitchFamily="34" charset="-120"/>
                         </a:rPr>
-                        <a:t>73</a:t>
+                        <a:t>0.7</a:t>
                       </a:r>
                       <a:endParaRPr lang="en-US" sz="1100" dirty="0">
                         <a:latin typeface="Calibri" charset="0"/>
@@ -3378,7 +2811,7 @@
                       </a:endParaRPr>
                     </a:p>
                   </a:txBody>
-                  <a:tcPr marL="91440" marR="91440" marT="45720" marB="45720" anchor="ctr">
+                  <a:tcPr marL="38100" marR="12700" marT="12700" marB="12700" anchor="ctr">
                     <a:lnL w="6350" cap="flat" cmpd="sng" algn="ctr">
                       <a:solidFill>
                         <a:srgbClr val="DDDDDD"/>
@@ -3437,7 +2870,7 @@
                           <a:ea typeface="Calibri" pitchFamily="34" charset="-122"/>
                           <a:cs typeface="Calibri" pitchFamily="34" charset="-120"/>
                         </a:rPr>
-                        <a:t>0.7</a:t>
+                        <a:t>85%</a:t>
                       </a:r>
                       <a:endParaRPr lang="en-US" sz="1100" dirty="0">
                         <a:latin typeface="Calibri" charset="0"/>
@@ -3446,75 +2879,7 @@
                       </a:endParaRPr>
                     </a:p>
                   </a:txBody>
-                  <a:tcPr marL="91440" marR="91440" marT="45720" marB="45720" anchor="ctr">
-                    <a:lnL w="6350" cap="flat" cmpd="sng" algn="ctr">
-                      <a:solidFill>
-                        <a:srgbClr val="DDDDDD"/>
-                      </a:solidFill>
-                      <a:prstDash val="solid"/>
-                      <a:round/>
-                      <a:headEnd type="none" w="med" len="med"/>
-                      <a:tailEnd type="none" w="med" len="med"/>
-                    </a:lnL>
-                    <a:lnR w="6350" cap="flat" cmpd="sng" algn="ctr">
-                      <a:solidFill>
-                        <a:srgbClr val="DDDDDD"/>
-                      </a:solidFill>
-                      <a:prstDash val="solid"/>
-                      <a:round/>
-                      <a:headEnd type="none" w="med" len="med"/>
-                      <a:tailEnd type="none" w="med" len="med"/>
-                    </a:lnR>
-                    <a:lnT w="6350" cap="flat" cmpd="sng" algn="ctr">
-                      <a:solidFill>
-                        <a:srgbClr val="DDDDDD"/>
-                      </a:solidFill>
-                      <a:prstDash val="solid"/>
-                      <a:round/>
-                      <a:headEnd type="none" w="med" len="med"/>
-                      <a:tailEnd type="none" w="med" len="med"/>
-                    </a:lnT>
-                    <a:lnB w="6350" cap="flat" cmpd="sng" algn="ctr">
-                      <a:solidFill>
-                        <a:srgbClr val="DDDDDD"/>
-                      </a:solidFill>
-                      <a:prstDash val="solid"/>
-                      <a:round/>
-                      <a:headEnd type="none" w="med" len="med"/>
-                      <a:tailEnd type="none" w="med" len="med"/>
-                    </a:lnB>
-                    <a:solidFill>
-                      <a:srgbClr val="E9F3EF"/>
-                    </a:solidFill>
-                  </a:tcPr>
-                </a:tc>
-                <a:tc>
-                  <a:txBody>
-                    <a:bodyPr/>
-                    <a:lstStyle/>
-                    <a:p>
-                      <a:pPr algn="ctr" indent="0" marL="0">
-                        <a:buNone/>
-                      </a:pPr>
-                      <a:r>
-                        <a:rPr lang="en-US" sz="1100" b="1" dirty="0">
-                          <a:solidFill>
-                            <a:srgbClr val="1F2A44"/>
-                          </a:solidFill>
-                          <a:latin typeface="Calibri" pitchFamily="34" charset="0"/>
-                          <a:ea typeface="Calibri" pitchFamily="34" charset="-122"/>
-                          <a:cs typeface="Calibri" pitchFamily="34" charset="-120"/>
-                        </a:rPr>
-                        <a:t>85%</a:t>
-                      </a:r>
-                      <a:endParaRPr lang="en-US" sz="1100" dirty="0">
-                        <a:latin typeface="Calibri" charset="0"/>
-                        <a:ea typeface="Calibri" charset="0"/>
-                        <a:cs typeface="Calibri" charset="0"/>
-                      </a:endParaRPr>
-                    </a:p>
-                  </a:txBody>
-                  <a:tcPr marL="91440" marR="91440" marT="45720" marB="45720" anchor="ctr">
+                  <a:tcPr marL="38100" marR="12700" marT="12700" marB="12700" anchor="ctr">
                     <a:lnL w="6350" cap="flat" cmpd="sng" algn="ctr">
                       <a:solidFill>
                         <a:srgbClr val="DDDDDD"/>
@@ -3561,19 +2926,1515 @@
           </a:graphicData>
         </a:graphic>
       </p:graphicFrame>
+      <p:sp>
+        <p:nvSpPr>
+          <p:cNvPr id="19" name="Text 15"/>
+          <p:cNvSpPr txBox="1"/>
+          <p:nvPr/>
+        </p:nvSpPr>
+        <p:spPr>
+          <a:xfrm>
+            <a:off x="5394960" y="2542032"/>
+            <a:ext cx="3474720" cy="256032"/>
+          </a:xfrm>
+          <a:prstGeom prst="rect">
+            <a:avLst/>
+          </a:prstGeom>
+          <a:noFill/>
+          <a:ln/>
+        </p:spPr>
+        <p:txBody>
+          <a:bodyPr wrap="square" lIns="0" tIns="0" rIns="0" bIns="0" rtlCol="0" anchor="ctr"/>
+          <a:lstStyle/>
+          <a:p>
+            <a:pPr indent="0" marL="0">
+              <a:buNone/>
+            </a:pPr>
+            <a:r>
+              <a:rPr lang="en-US" sz="1200" b="1" dirty="0">
+                <a:solidFill>
+                  <a:srgbClr val="158158"/>
+                </a:solidFill>
+                <a:latin typeface="Calibri" pitchFamily="34" charset="0"/>
+                <a:ea typeface="Calibri" pitchFamily="34" charset="-122"/>
+                <a:cs typeface="Calibri" pitchFamily="34" charset="-120"/>
+              </a:rPr>
+              <a:t>Resolution distribution</a:t>
+            </a:r>
+            <a:endParaRPr lang="en-US" sz="1200" dirty="0"/>
+          </a:p>
+        </p:txBody>
+      </p:sp>
       <p:graphicFrame>
         <p:nvGraphicFramePr>
-          <p:cNvPr id="19" name="Chart 0" descr=""/>
-          <p:cNvGraphicFramePr/>
-          <p:nvPr/>
+          <p:cNvPr id="3" name="Table 1"/>
+          <p:cNvGraphicFramePr>
+            <a:graphicFrameLocks noGrp="1"/>
+          </p:cNvGraphicFramePr>
+          <p:nvPr>
+            <p:extLst>
+              <p:ext uri="{D42A27DB-BD31-4B8C-83A1-F6EECF244321}">
+                <p14:modId xmlns:p14="http://schemas.microsoft.com/office/powerpoint/2010/main" val="1579011935"/>
+              </p:ext>
+            </p:extLst>
+          </p:nvPr>
         </p:nvGraphicFramePr>
         <p:xfrm>
-          <a:off x="5394960" y="2468880"/>
-          <a:ext cx="3474720" cy="2331720"/>
+          <a:off x="5394960" y="2880360"/>
+          <a:ext cx="3474720" cy="914400"/>
         </p:xfrm>
-        <a:graphic xmlns:a="http://schemas.openxmlformats.org/drawingml/2006/main">
-          <a:graphicData uri="http://schemas.openxmlformats.org/drawingml/2006/chart">
-            <c:chart xmlns:c="http://schemas.openxmlformats.org/drawingml/2006/chart" r:id="rId2"/>
+        <a:graphic>
+          <a:graphicData uri="http://schemas.openxmlformats.org/drawingml/2006/table">
+            <a:tbl>
+              <a:tblPr/>
+              <a:tblGrid>
+                <a:gridCol w="1737360"/>
+                <a:gridCol w="914400"/>
+                <a:gridCol w="822960"/>
+              </a:tblGrid>
+              <a:tr h="274320">
+                <a:tc>
+                  <a:txBody>
+                    <a:bodyPr/>
+                    <a:lstStyle/>
+                    <a:p>
+                      <a:pPr algn="l" indent="0" marL="0">
+                        <a:buNone/>
+                      </a:pPr>
+                      <a:r>
+                        <a:rPr lang="en-US" sz="1100" b="1" dirty="0">
+                          <a:solidFill>
+                            <a:srgbClr val="FFFFFF"/>
+                          </a:solidFill>
+                          <a:latin typeface="Calibri" pitchFamily="34" charset="0"/>
+                          <a:ea typeface="Calibri" pitchFamily="34" charset="-122"/>
+                          <a:cs typeface="Calibri" pitchFamily="34" charset="-120"/>
+                        </a:rPr>
+                        <a:t>Range</a:t>
+                      </a:r>
+                      <a:endParaRPr lang="en-US" sz="1100" dirty="0">
+                        <a:latin typeface="Calibri" charset="0"/>
+                        <a:ea typeface="Calibri" charset="0"/>
+                        <a:cs typeface="Calibri" charset="0"/>
+                      </a:endParaRPr>
+                    </a:p>
+                  </a:txBody>
+                  <a:tcPr marL="38100" marR="12700" marT="12700" marB="12700" anchor="ctr">
+                    <a:lnL w="6350" cap="flat" cmpd="sng" algn="ctr">
+                      <a:solidFill>
+                        <a:srgbClr val="DDDDDD"/>
+                      </a:solidFill>
+                      <a:prstDash val="solid"/>
+                      <a:round/>
+                      <a:headEnd type="none" w="med" len="med"/>
+                      <a:tailEnd type="none" w="med" len="med"/>
+                    </a:lnL>
+                    <a:lnR w="6350" cap="flat" cmpd="sng" algn="ctr">
+                      <a:solidFill>
+                        <a:srgbClr val="DDDDDD"/>
+                      </a:solidFill>
+                      <a:prstDash val="solid"/>
+                      <a:round/>
+                      <a:headEnd type="none" w="med" len="med"/>
+                      <a:tailEnd type="none" w="med" len="med"/>
+                    </a:lnR>
+                    <a:lnT w="6350" cap="flat" cmpd="sng" algn="ctr">
+                      <a:solidFill>
+                        <a:srgbClr val="DDDDDD"/>
+                      </a:solidFill>
+                      <a:prstDash val="solid"/>
+                      <a:round/>
+                      <a:headEnd type="none" w="med" len="med"/>
+                      <a:tailEnd type="none" w="med" len="med"/>
+                    </a:lnT>
+                    <a:lnB w="6350" cap="flat" cmpd="sng" algn="ctr">
+                      <a:solidFill>
+                        <a:srgbClr val="DDDDDD"/>
+                      </a:solidFill>
+                      <a:prstDash val="solid"/>
+                      <a:round/>
+                      <a:headEnd type="none" w="med" len="med"/>
+                      <a:tailEnd type="none" w="med" len="med"/>
+                    </a:lnB>
+                    <a:solidFill>
+                      <a:srgbClr val="158158"/>
+                    </a:solidFill>
+                  </a:tcPr>
+                </a:tc>
+                <a:tc>
+                  <a:txBody>
+                    <a:bodyPr/>
+                    <a:lstStyle/>
+                    <a:p>
+                      <a:pPr algn="ctr" indent="0" marL="0">
+                        <a:buNone/>
+                      </a:pPr>
+                      <a:r>
+                        <a:rPr lang="en-US" sz="1100" b="1" dirty="0">
+                          <a:solidFill>
+                            <a:srgbClr val="FFFFFF"/>
+                          </a:solidFill>
+                          <a:latin typeface="Calibri" pitchFamily="34" charset="0"/>
+                          <a:ea typeface="Calibri" pitchFamily="34" charset="-122"/>
+                          <a:cs typeface="Calibri" pitchFamily="34" charset="-120"/>
+                        </a:rPr>
+                        <a:t># Uploads</a:t>
+                      </a:r>
+                      <a:endParaRPr lang="en-US" sz="1100" dirty="0">
+                        <a:latin typeface="Calibri" charset="0"/>
+                        <a:ea typeface="Calibri" charset="0"/>
+                        <a:cs typeface="Calibri" charset="0"/>
+                      </a:endParaRPr>
+                    </a:p>
+                  </a:txBody>
+                  <a:tcPr marL="38100" marR="12700" marT="12700" marB="12700" anchor="ctr">
+                    <a:lnL w="6350" cap="flat" cmpd="sng" algn="ctr">
+                      <a:solidFill>
+                        <a:srgbClr val="DDDDDD"/>
+                      </a:solidFill>
+                      <a:prstDash val="solid"/>
+                      <a:round/>
+                      <a:headEnd type="none" w="med" len="med"/>
+                      <a:tailEnd type="none" w="med" len="med"/>
+                    </a:lnL>
+                    <a:lnR w="6350" cap="flat" cmpd="sng" algn="ctr">
+                      <a:solidFill>
+                        <a:srgbClr val="DDDDDD"/>
+                      </a:solidFill>
+                      <a:prstDash val="solid"/>
+                      <a:round/>
+                      <a:headEnd type="none" w="med" len="med"/>
+                      <a:tailEnd type="none" w="med" len="med"/>
+                    </a:lnR>
+                    <a:lnT w="6350" cap="flat" cmpd="sng" algn="ctr">
+                      <a:solidFill>
+                        <a:srgbClr val="DDDDDD"/>
+                      </a:solidFill>
+                      <a:prstDash val="solid"/>
+                      <a:round/>
+                      <a:headEnd type="none" w="med" len="med"/>
+                      <a:tailEnd type="none" w="med" len="med"/>
+                    </a:lnT>
+                    <a:lnB w="6350" cap="flat" cmpd="sng" algn="ctr">
+                      <a:solidFill>
+                        <a:srgbClr val="DDDDDD"/>
+                      </a:solidFill>
+                      <a:prstDash val="solid"/>
+                      <a:round/>
+                      <a:headEnd type="none" w="med" len="med"/>
+                      <a:tailEnd type="none" w="med" len="med"/>
+                    </a:lnB>
+                    <a:solidFill>
+                      <a:srgbClr val="158158"/>
+                    </a:solidFill>
+                  </a:tcPr>
+                </a:tc>
+                <a:tc>
+                  <a:txBody>
+                    <a:bodyPr/>
+                    <a:lstStyle/>
+                    <a:p>
+                      <a:pPr algn="ctr" indent="0" marL="0">
+                        <a:buNone/>
+                      </a:pPr>
+                      <a:r>
+                        <a:rPr lang="en-US" sz="1100" b="1" dirty="0">
+                          <a:solidFill>
+                            <a:srgbClr val="FFFFFF"/>
+                          </a:solidFill>
+                          <a:latin typeface="Calibri" pitchFamily="34" charset="0"/>
+                          <a:ea typeface="Calibri" pitchFamily="34" charset="-122"/>
+                          <a:cs typeface="Calibri" pitchFamily="34" charset="-120"/>
+                        </a:rPr>
+                        <a:t>% of total</a:t>
+                      </a:r>
+                      <a:endParaRPr lang="en-US" sz="1100" dirty="0">
+                        <a:latin typeface="Calibri" charset="0"/>
+                        <a:ea typeface="Calibri" charset="0"/>
+                        <a:cs typeface="Calibri" charset="0"/>
+                      </a:endParaRPr>
+                    </a:p>
+                  </a:txBody>
+                  <a:tcPr marL="38100" marR="12700" marT="12700" marB="12700" anchor="ctr">
+                    <a:lnL w="6350" cap="flat" cmpd="sng" algn="ctr">
+                      <a:solidFill>
+                        <a:srgbClr val="DDDDDD"/>
+                      </a:solidFill>
+                      <a:prstDash val="solid"/>
+                      <a:round/>
+                      <a:headEnd type="none" w="med" len="med"/>
+                      <a:tailEnd type="none" w="med" len="med"/>
+                    </a:lnL>
+                    <a:lnR w="6350" cap="flat" cmpd="sng" algn="ctr">
+                      <a:solidFill>
+                        <a:srgbClr val="DDDDDD"/>
+                      </a:solidFill>
+                      <a:prstDash val="solid"/>
+                      <a:round/>
+                      <a:headEnd type="none" w="med" len="med"/>
+                      <a:tailEnd type="none" w="med" len="med"/>
+                    </a:lnR>
+                    <a:lnT w="6350" cap="flat" cmpd="sng" algn="ctr">
+                      <a:solidFill>
+                        <a:srgbClr val="DDDDDD"/>
+                      </a:solidFill>
+                      <a:prstDash val="solid"/>
+                      <a:round/>
+                      <a:headEnd type="none" w="med" len="med"/>
+                      <a:tailEnd type="none" w="med" len="med"/>
+                    </a:lnT>
+                    <a:lnB w="6350" cap="flat" cmpd="sng" algn="ctr">
+                      <a:solidFill>
+                        <a:srgbClr val="DDDDDD"/>
+                      </a:solidFill>
+                      <a:prstDash val="solid"/>
+                      <a:round/>
+                      <a:headEnd type="none" w="med" len="med"/>
+                      <a:tailEnd type="none" w="med" len="med"/>
+                    </a:lnB>
+                    <a:solidFill>
+                      <a:srgbClr val="158158"/>
+                    </a:solidFill>
+                  </a:tcPr>
+                </a:tc>
+              </a:tr>
+              <a:tr h="274320">
+                <a:tc>
+                  <a:txBody>
+                    <a:bodyPr/>
+                    <a:lstStyle/>
+                    <a:p>
+                      <a:pPr algn="l" indent="0" marL="0">
+                        <a:buNone/>
+                      </a:pPr>
+                      <a:r>
+                        <a:rPr lang="en-US" sz="1100" dirty="0">
+                          <a:solidFill>
+                            <a:srgbClr val="1F2A44"/>
+                          </a:solidFill>
+                          <a:latin typeface="Calibri" pitchFamily="34" charset="0"/>
+                          <a:ea typeface="Calibri" pitchFamily="34" charset="-122"/>
+                          <a:cs typeface="Calibri" pitchFamily="34" charset="-120"/>
+                        </a:rPr>
+                        <a:t>Same day (&lt; 24 h)</a:t>
+                      </a:r>
+                      <a:endParaRPr lang="en-US" sz="1100" dirty="0">
+                        <a:latin typeface="Calibri" charset="0"/>
+                        <a:ea typeface="Calibri" charset="0"/>
+                        <a:cs typeface="Calibri" charset="0"/>
+                      </a:endParaRPr>
+                    </a:p>
+                  </a:txBody>
+                  <a:tcPr marL="38100" marR="12700" marT="12700" marB="12700" anchor="ctr">
+                    <a:lnL w="6350" cap="flat" cmpd="sng" algn="ctr">
+                      <a:solidFill>
+                        <a:srgbClr val="DDDDDD"/>
+                      </a:solidFill>
+                      <a:prstDash val="solid"/>
+                      <a:round/>
+                      <a:headEnd type="none" w="med" len="med"/>
+                      <a:tailEnd type="none" w="med" len="med"/>
+                    </a:lnL>
+                    <a:lnR w="6350" cap="flat" cmpd="sng" algn="ctr">
+                      <a:solidFill>
+                        <a:srgbClr val="DDDDDD"/>
+                      </a:solidFill>
+                      <a:prstDash val="solid"/>
+                      <a:round/>
+                      <a:headEnd type="none" w="med" len="med"/>
+                      <a:tailEnd type="none" w="med" len="med"/>
+                    </a:lnR>
+                    <a:lnT w="6350" cap="flat" cmpd="sng" algn="ctr">
+                      <a:solidFill>
+                        <a:srgbClr val="DDDDDD"/>
+                      </a:solidFill>
+                      <a:prstDash val="solid"/>
+                      <a:round/>
+                      <a:headEnd type="none" w="med" len="med"/>
+                      <a:tailEnd type="none" w="med" len="med"/>
+                    </a:lnT>
+                    <a:lnB w="6350" cap="flat" cmpd="sng" algn="ctr">
+                      <a:solidFill>
+                        <a:srgbClr val="DDDDDD"/>
+                      </a:solidFill>
+                      <a:prstDash val="solid"/>
+                      <a:round/>
+                      <a:headEnd type="none" w="med" len="med"/>
+                      <a:tailEnd type="none" w="med" len="med"/>
+                    </a:lnB>
+                    <a:solidFill>
+                      <a:srgbClr val="FFFFFF"/>
+                    </a:solidFill>
+                  </a:tcPr>
+                </a:tc>
+                <a:tc>
+                  <a:txBody>
+                    <a:bodyPr/>
+                    <a:lstStyle/>
+                    <a:p>
+                      <a:pPr algn="ctr" indent="0" marL="0">
+                        <a:buNone/>
+                      </a:pPr>
+                      <a:r>
+                        <a:rPr lang="en-US" sz="1100" dirty="0">
+                          <a:solidFill>
+                            <a:srgbClr val="1F2A44"/>
+                          </a:solidFill>
+                          <a:latin typeface="Calibri" pitchFamily="34" charset="0"/>
+                          <a:ea typeface="Calibri" pitchFamily="34" charset="-122"/>
+                          <a:cs typeface="Calibri" pitchFamily="34" charset="-120"/>
+                        </a:rPr>
+                        <a:t>62</a:t>
+                      </a:r>
+                      <a:endParaRPr lang="en-US" sz="1100" dirty="0">
+                        <a:latin typeface="Calibri" charset="0"/>
+                        <a:ea typeface="Calibri" charset="0"/>
+                        <a:cs typeface="Calibri" charset="0"/>
+                      </a:endParaRPr>
+                    </a:p>
+                  </a:txBody>
+                  <a:tcPr marL="38100" marR="12700" marT="12700" marB="12700" anchor="ctr">
+                    <a:lnL w="6350" cap="flat" cmpd="sng" algn="ctr">
+                      <a:solidFill>
+                        <a:srgbClr val="DDDDDD"/>
+                      </a:solidFill>
+                      <a:prstDash val="solid"/>
+                      <a:round/>
+                      <a:headEnd type="none" w="med" len="med"/>
+                      <a:tailEnd type="none" w="med" len="med"/>
+                    </a:lnL>
+                    <a:lnR w="6350" cap="flat" cmpd="sng" algn="ctr">
+                      <a:solidFill>
+                        <a:srgbClr val="DDDDDD"/>
+                      </a:solidFill>
+                      <a:prstDash val="solid"/>
+                      <a:round/>
+                      <a:headEnd type="none" w="med" len="med"/>
+                      <a:tailEnd type="none" w="med" len="med"/>
+                    </a:lnR>
+                    <a:lnT w="6350" cap="flat" cmpd="sng" algn="ctr">
+                      <a:solidFill>
+                        <a:srgbClr val="DDDDDD"/>
+                      </a:solidFill>
+                      <a:prstDash val="solid"/>
+                      <a:round/>
+                      <a:headEnd type="none" w="med" len="med"/>
+                      <a:tailEnd type="none" w="med" len="med"/>
+                    </a:lnT>
+                    <a:lnB w="6350" cap="flat" cmpd="sng" algn="ctr">
+                      <a:solidFill>
+                        <a:srgbClr val="DDDDDD"/>
+                      </a:solidFill>
+                      <a:prstDash val="solid"/>
+                      <a:round/>
+                      <a:headEnd type="none" w="med" len="med"/>
+                      <a:tailEnd type="none" w="med" len="med"/>
+                    </a:lnB>
+                    <a:solidFill>
+                      <a:srgbClr val="FFFFFF"/>
+                    </a:solidFill>
+                  </a:tcPr>
+                </a:tc>
+                <a:tc>
+                  <a:txBody>
+                    <a:bodyPr/>
+                    <a:lstStyle/>
+                    <a:p>
+                      <a:pPr algn="ctr" indent="0" marL="0">
+                        <a:buNone/>
+                      </a:pPr>
+                      <a:r>
+                        <a:rPr lang="en-US" sz="1100" dirty="0">
+                          <a:solidFill>
+                            <a:srgbClr val="1F2A44"/>
+                          </a:solidFill>
+                          <a:latin typeface="Calibri" pitchFamily="34" charset="0"/>
+                          <a:ea typeface="Calibri" pitchFamily="34" charset="-122"/>
+                          <a:cs typeface="Calibri" pitchFamily="34" charset="-120"/>
+                        </a:rPr>
+                        <a:t>84.9%</a:t>
+                      </a:r>
+                      <a:endParaRPr lang="en-US" sz="1100" dirty="0">
+                        <a:latin typeface="Calibri" charset="0"/>
+                        <a:ea typeface="Calibri" charset="0"/>
+                        <a:cs typeface="Calibri" charset="0"/>
+                      </a:endParaRPr>
+                    </a:p>
+                  </a:txBody>
+                  <a:tcPr marL="38100" marR="12700" marT="12700" marB="12700" anchor="ctr">
+                    <a:lnL w="6350" cap="flat" cmpd="sng" algn="ctr">
+                      <a:solidFill>
+                        <a:srgbClr val="DDDDDD"/>
+                      </a:solidFill>
+                      <a:prstDash val="solid"/>
+                      <a:round/>
+                      <a:headEnd type="none" w="med" len="med"/>
+                      <a:tailEnd type="none" w="med" len="med"/>
+                    </a:lnL>
+                    <a:lnR w="6350" cap="flat" cmpd="sng" algn="ctr">
+                      <a:solidFill>
+                        <a:srgbClr val="DDDDDD"/>
+                      </a:solidFill>
+                      <a:prstDash val="solid"/>
+                      <a:round/>
+                      <a:headEnd type="none" w="med" len="med"/>
+                      <a:tailEnd type="none" w="med" len="med"/>
+                    </a:lnR>
+                    <a:lnT w="6350" cap="flat" cmpd="sng" algn="ctr">
+                      <a:solidFill>
+                        <a:srgbClr val="DDDDDD"/>
+                      </a:solidFill>
+                      <a:prstDash val="solid"/>
+                      <a:round/>
+                      <a:headEnd type="none" w="med" len="med"/>
+                      <a:tailEnd type="none" w="med" len="med"/>
+                    </a:lnT>
+                    <a:lnB w="6350" cap="flat" cmpd="sng" algn="ctr">
+                      <a:solidFill>
+                        <a:srgbClr val="DDDDDD"/>
+                      </a:solidFill>
+                      <a:prstDash val="solid"/>
+                      <a:round/>
+                      <a:headEnd type="none" w="med" len="med"/>
+                      <a:tailEnd type="none" w="med" len="med"/>
+                    </a:lnB>
+                    <a:solidFill>
+                      <a:srgbClr val="FFFFFF"/>
+                    </a:solidFill>
+                  </a:tcPr>
+                </a:tc>
+              </a:tr>
+              <a:tr h="274320">
+                <a:tc>
+                  <a:txBody>
+                    <a:bodyPr/>
+                    <a:lstStyle/>
+                    <a:p>
+                      <a:pPr algn="l" indent="0" marL="0">
+                        <a:buNone/>
+                      </a:pPr>
+                      <a:r>
+                        <a:rPr lang="en-US" sz="1100" dirty="0">
+                          <a:solidFill>
+                            <a:srgbClr val="1F2A44"/>
+                          </a:solidFill>
+                          <a:latin typeface="Calibri" pitchFamily="34" charset="0"/>
+                          <a:ea typeface="Calibri" pitchFamily="34" charset="-122"/>
+                          <a:cs typeface="Calibri" pitchFamily="34" charset="-120"/>
+                        </a:rPr>
+                        <a:t>1 – 2 days</a:t>
+                      </a:r>
+                      <a:endParaRPr lang="en-US" sz="1100" dirty="0">
+                        <a:latin typeface="Calibri" charset="0"/>
+                        <a:ea typeface="Calibri" charset="0"/>
+                        <a:cs typeface="Calibri" charset="0"/>
+                      </a:endParaRPr>
+                    </a:p>
+                  </a:txBody>
+                  <a:tcPr marL="38100" marR="12700" marT="12700" marB="12700" anchor="ctr">
+                    <a:lnL w="6350" cap="flat" cmpd="sng" algn="ctr">
+                      <a:solidFill>
+                        <a:srgbClr val="DDDDDD"/>
+                      </a:solidFill>
+                      <a:prstDash val="solid"/>
+                      <a:round/>
+                      <a:headEnd type="none" w="med" len="med"/>
+                      <a:tailEnd type="none" w="med" len="med"/>
+                    </a:lnL>
+                    <a:lnR w="6350" cap="flat" cmpd="sng" algn="ctr">
+                      <a:solidFill>
+                        <a:srgbClr val="DDDDDD"/>
+                      </a:solidFill>
+                      <a:prstDash val="solid"/>
+                      <a:round/>
+                      <a:headEnd type="none" w="med" len="med"/>
+                      <a:tailEnd type="none" w="med" len="med"/>
+                    </a:lnR>
+                    <a:lnT w="6350" cap="flat" cmpd="sng" algn="ctr">
+                      <a:solidFill>
+                        <a:srgbClr val="DDDDDD"/>
+                      </a:solidFill>
+                      <a:prstDash val="solid"/>
+                      <a:round/>
+                      <a:headEnd type="none" w="med" len="med"/>
+                      <a:tailEnd type="none" w="med" len="med"/>
+                    </a:lnT>
+                    <a:lnB w="6350" cap="flat" cmpd="sng" algn="ctr">
+                      <a:solidFill>
+                        <a:srgbClr val="DDDDDD"/>
+                      </a:solidFill>
+                      <a:prstDash val="solid"/>
+                      <a:round/>
+                      <a:headEnd type="none" w="med" len="med"/>
+                      <a:tailEnd type="none" w="med" len="med"/>
+                    </a:lnB>
+                    <a:solidFill>
+                      <a:srgbClr val="FFFFFF"/>
+                    </a:solidFill>
+                  </a:tcPr>
+                </a:tc>
+                <a:tc>
+                  <a:txBody>
+                    <a:bodyPr/>
+                    <a:lstStyle/>
+                    <a:p>
+                      <a:pPr algn="ctr" indent="0" marL="0">
+                        <a:buNone/>
+                      </a:pPr>
+                      <a:r>
+                        <a:rPr lang="en-US" sz="1100" dirty="0">
+                          <a:solidFill>
+                            <a:srgbClr val="1F2A44"/>
+                          </a:solidFill>
+                          <a:latin typeface="Calibri" pitchFamily="34" charset="0"/>
+                          <a:ea typeface="Calibri" pitchFamily="34" charset="-122"/>
+                          <a:cs typeface="Calibri" pitchFamily="34" charset="-120"/>
+                        </a:rPr>
+                        <a:t>10</a:t>
+                      </a:r>
+                      <a:endParaRPr lang="en-US" sz="1100" dirty="0">
+                        <a:latin typeface="Calibri" charset="0"/>
+                        <a:ea typeface="Calibri" charset="0"/>
+                        <a:cs typeface="Calibri" charset="0"/>
+                      </a:endParaRPr>
+                    </a:p>
+                  </a:txBody>
+                  <a:tcPr marL="38100" marR="12700" marT="12700" marB="12700" anchor="ctr">
+                    <a:lnL w="6350" cap="flat" cmpd="sng" algn="ctr">
+                      <a:solidFill>
+                        <a:srgbClr val="DDDDDD"/>
+                      </a:solidFill>
+                      <a:prstDash val="solid"/>
+                      <a:round/>
+                      <a:headEnd type="none" w="med" len="med"/>
+                      <a:tailEnd type="none" w="med" len="med"/>
+                    </a:lnL>
+                    <a:lnR w="6350" cap="flat" cmpd="sng" algn="ctr">
+                      <a:solidFill>
+                        <a:srgbClr val="DDDDDD"/>
+                      </a:solidFill>
+                      <a:prstDash val="solid"/>
+                      <a:round/>
+                      <a:headEnd type="none" w="med" len="med"/>
+                      <a:tailEnd type="none" w="med" len="med"/>
+                    </a:lnR>
+                    <a:lnT w="6350" cap="flat" cmpd="sng" algn="ctr">
+                      <a:solidFill>
+                        <a:srgbClr val="DDDDDD"/>
+                      </a:solidFill>
+                      <a:prstDash val="solid"/>
+                      <a:round/>
+                      <a:headEnd type="none" w="med" len="med"/>
+                      <a:tailEnd type="none" w="med" len="med"/>
+                    </a:lnT>
+                    <a:lnB w="6350" cap="flat" cmpd="sng" algn="ctr">
+                      <a:solidFill>
+                        <a:srgbClr val="DDDDDD"/>
+                      </a:solidFill>
+                      <a:prstDash val="solid"/>
+                      <a:round/>
+                      <a:headEnd type="none" w="med" len="med"/>
+                      <a:tailEnd type="none" w="med" len="med"/>
+                    </a:lnB>
+                    <a:solidFill>
+                      <a:srgbClr val="FFFFFF"/>
+                    </a:solidFill>
+                  </a:tcPr>
+                </a:tc>
+                <a:tc>
+                  <a:txBody>
+                    <a:bodyPr/>
+                    <a:lstStyle/>
+                    <a:p>
+                      <a:pPr algn="ctr" indent="0" marL="0">
+                        <a:buNone/>
+                      </a:pPr>
+                      <a:r>
+                        <a:rPr lang="en-US" sz="1100" dirty="0">
+                          <a:solidFill>
+                            <a:srgbClr val="1F2A44"/>
+                          </a:solidFill>
+                          <a:latin typeface="Calibri" pitchFamily="34" charset="0"/>
+                          <a:ea typeface="Calibri" pitchFamily="34" charset="-122"/>
+                          <a:cs typeface="Calibri" pitchFamily="34" charset="-120"/>
+                        </a:rPr>
+                        <a:t>13.7%</a:t>
+                      </a:r>
+                      <a:endParaRPr lang="en-US" sz="1100" dirty="0">
+                        <a:latin typeface="Calibri" charset="0"/>
+                        <a:ea typeface="Calibri" charset="0"/>
+                        <a:cs typeface="Calibri" charset="0"/>
+                      </a:endParaRPr>
+                    </a:p>
+                  </a:txBody>
+                  <a:tcPr marL="38100" marR="12700" marT="12700" marB="12700" anchor="ctr">
+                    <a:lnL w="6350" cap="flat" cmpd="sng" algn="ctr">
+                      <a:solidFill>
+                        <a:srgbClr val="DDDDDD"/>
+                      </a:solidFill>
+                      <a:prstDash val="solid"/>
+                      <a:round/>
+                      <a:headEnd type="none" w="med" len="med"/>
+                      <a:tailEnd type="none" w="med" len="med"/>
+                    </a:lnL>
+                    <a:lnR w="6350" cap="flat" cmpd="sng" algn="ctr">
+                      <a:solidFill>
+                        <a:srgbClr val="DDDDDD"/>
+                      </a:solidFill>
+                      <a:prstDash val="solid"/>
+                      <a:round/>
+                      <a:headEnd type="none" w="med" len="med"/>
+                      <a:tailEnd type="none" w="med" len="med"/>
+                    </a:lnR>
+                    <a:lnT w="6350" cap="flat" cmpd="sng" algn="ctr">
+                      <a:solidFill>
+                        <a:srgbClr val="DDDDDD"/>
+                      </a:solidFill>
+                      <a:prstDash val="solid"/>
+                      <a:round/>
+                      <a:headEnd type="none" w="med" len="med"/>
+                      <a:tailEnd type="none" w="med" len="med"/>
+                    </a:lnT>
+                    <a:lnB w="6350" cap="flat" cmpd="sng" algn="ctr">
+                      <a:solidFill>
+                        <a:srgbClr val="DDDDDD"/>
+                      </a:solidFill>
+                      <a:prstDash val="solid"/>
+                      <a:round/>
+                      <a:headEnd type="none" w="med" len="med"/>
+                      <a:tailEnd type="none" w="med" len="med"/>
+                    </a:lnB>
+                    <a:solidFill>
+                      <a:srgbClr val="FFFFFF"/>
+                    </a:solidFill>
+                  </a:tcPr>
+                </a:tc>
+              </a:tr>
+              <a:tr h="274320">
+                <a:tc>
+                  <a:txBody>
+                    <a:bodyPr/>
+                    <a:lstStyle/>
+                    <a:p>
+                      <a:pPr algn="l" indent="0" marL="0">
+                        <a:buNone/>
+                      </a:pPr>
+                      <a:r>
+                        <a:rPr lang="en-US" sz="1100" dirty="0">
+                          <a:solidFill>
+                            <a:srgbClr val="1F2A44"/>
+                          </a:solidFill>
+                          <a:latin typeface="Calibri" pitchFamily="34" charset="0"/>
+                          <a:ea typeface="Calibri" pitchFamily="34" charset="-122"/>
+                          <a:cs typeface="Calibri" pitchFamily="34" charset="-120"/>
+                        </a:rPr>
+                        <a:t>2 – 4 days</a:t>
+                      </a:r>
+                      <a:endParaRPr lang="en-US" sz="1100" dirty="0">
+                        <a:latin typeface="Calibri" charset="0"/>
+                        <a:ea typeface="Calibri" charset="0"/>
+                        <a:cs typeface="Calibri" charset="0"/>
+                      </a:endParaRPr>
+                    </a:p>
+                  </a:txBody>
+                  <a:tcPr marL="38100" marR="12700" marT="12700" marB="12700" anchor="ctr">
+                    <a:lnL w="6350" cap="flat" cmpd="sng" algn="ctr">
+                      <a:solidFill>
+                        <a:srgbClr val="DDDDDD"/>
+                      </a:solidFill>
+                      <a:prstDash val="solid"/>
+                      <a:round/>
+                      <a:headEnd type="none" w="med" len="med"/>
+                      <a:tailEnd type="none" w="med" len="med"/>
+                    </a:lnL>
+                    <a:lnR w="6350" cap="flat" cmpd="sng" algn="ctr">
+                      <a:solidFill>
+                        <a:srgbClr val="DDDDDD"/>
+                      </a:solidFill>
+                      <a:prstDash val="solid"/>
+                      <a:round/>
+                      <a:headEnd type="none" w="med" len="med"/>
+                      <a:tailEnd type="none" w="med" len="med"/>
+                    </a:lnR>
+                    <a:lnT w="6350" cap="flat" cmpd="sng" algn="ctr">
+                      <a:solidFill>
+                        <a:srgbClr val="DDDDDD"/>
+                      </a:solidFill>
+                      <a:prstDash val="solid"/>
+                      <a:round/>
+                      <a:headEnd type="none" w="med" len="med"/>
+                      <a:tailEnd type="none" w="med" len="med"/>
+                    </a:lnT>
+                    <a:lnB w="6350" cap="flat" cmpd="sng" algn="ctr">
+                      <a:solidFill>
+                        <a:srgbClr val="DDDDDD"/>
+                      </a:solidFill>
+                      <a:prstDash val="solid"/>
+                      <a:round/>
+                      <a:headEnd type="none" w="med" len="med"/>
+                      <a:tailEnd type="none" w="med" len="med"/>
+                    </a:lnB>
+                    <a:solidFill>
+                      <a:srgbClr val="FFFFFF"/>
+                    </a:solidFill>
+                  </a:tcPr>
+                </a:tc>
+                <a:tc>
+                  <a:txBody>
+                    <a:bodyPr/>
+                    <a:lstStyle/>
+                    <a:p>
+                      <a:pPr algn="ctr" indent="0" marL="0">
+                        <a:buNone/>
+                      </a:pPr>
+                      <a:r>
+                        <a:rPr lang="en-US" sz="1100" dirty="0">
+                          <a:solidFill>
+                            <a:srgbClr val="1F2A44"/>
+                          </a:solidFill>
+                          <a:latin typeface="Calibri" pitchFamily="34" charset="0"/>
+                          <a:ea typeface="Calibri" pitchFamily="34" charset="-122"/>
+                          <a:cs typeface="Calibri" pitchFamily="34" charset="-120"/>
+                        </a:rPr>
+                        <a:t>0</a:t>
+                      </a:r>
+                      <a:endParaRPr lang="en-US" sz="1100" dirty="0">
+                        <a:latin typeface="Calibri" charset="0"/>
+                        <a:ea typeface="Calibri" charset="0"/>
+                        <a:cs typeface="Calibri" charset="0"/>
+                      </a:endParaRPr>
+                    </a:p>
+                  </a:txBody>
+                  <a:tcPr marL="38100" marR="12700" marT="12700" marB="12700" anchor="ctr">
+                    <a:lnL w="6350" cap="flat" cmpd="sng" algn="ctr">
+                      <a:solidFill>
+                        <a:srgbClr val="DDDDDD"/>
+                      </a:solidFill>
+                      <a:prstDash val="solid"/>
+                      <a:round/>
+                      <a:headEnd type="none" w="med" len="med"/>
+                      <a:tailEnd type="none" w="med" len="med"/>
+                    </a:lnL>
+                    <a:lnR w="6350" cap="flat" cmpd="sng" algn="ctr">
+                      <a:solidFill>
+                        <a:srgbClr val="DDDDDD"/>
+                      </a:solidFill>
+                      <a:prstDash val="solid"/>
+                      <a:round/>
+                      <a:headEnd type="none" w="med" len="med"/>
+                      <a:tailEnd type="none" w="med" len="med"/>
+                    </a:lnR>
+                    <a:lnT w="6350" cap="flat" cmpd="sng" algn="ctr">
+                      <a:solidFill>
+                        <a:srgbClr val="DDDDDD"/>
+                      </a:solidFill>
+                      <a:prstDash val="solid"/>
+                      <a:round/>
+                      <a:headEnd type="none" w="med" len="med"/>
+                      <a:tailEnd type="none" w="med" len="med"/>
+                    </a:lnT>
+                    <a:lnB w="6350" cap="flat" cmpd="sng" algn="ctr">
+                      <a:solidFill>
+                        <a:srgbClr val="DDDDDD"/>
+                      </a:solidFill>
+                      <a:prstDash val="solid"/>
+                      <a:round/>
+                      <a:headEnd type="none" w="med" len="med"/>
+                      <a:tailEnd type="none" w="med" len="med"/>
+                    </a:lnB>
+                    <a:solidFill>
+                      <a:srgbClr val="FFFFFF"/>
+                    </a:solidFill>
+                  </a:tcPr>
+                </a:tc>
+                <a:tc>
+                  <a:txBody>
+                    <a:bodyPr/>
+                    <a:lstStyle/>
+                    <a:p>
+                      <a:pPr algn="ctr" indent="0" marL="0">
+                        <a:buNone/>
+                      </a:pPr>
+                      <a:r>
+                        <a:rPr lang="en-US" sz="1100" dirty="0">
+                          <a:solidFill>
+                            <a:srgbClr val="1F2A44"/>
+                          </a:solidFill>
+                          <a:latin typeface="Calibri" pitchFamily="34" charset="0"/>
+                          <a:ea typeface="Calibri" pitchFamily="34" charset="-122"/>
+                          <a:cs typeface="Calibri" pitchFamily="34" charset="-120"/>
+                        </a:rPr>
+                        <a:t>0.0%</a:t>
+                      </a:r>
+                      <a:endParaRPr lang="en-US" sz="1100" dirty="0">
+                        <a:latin typeface="Calibri" charset="0"/>
+                        <a:ea typeface="Calibri" charset="0"/>
+                        <a:cs typeface="Calibri" charset="0"/>
+                      </a:endParaRPr>
+                    </a:p>
+                  </a:txBody>
+                  <a:tcPr marL="38100" marR="12700" marT="12700" marB="12700" anchor="ctr">
+                    <a:lnL w="6350" cap="flat" cmpd="sng" algn="ctr">
+                      <a:solidFill>
+                        <a:srgbClr val="DDDDDD"/>
+                      </a:solidFill>
+                      <a:prstDash val="solid"/>
+                      <a:round/>
+                      <a:headEnd type="none" w="med" len="med"/>
+                      <a:tailEnd type="none" w="med" len="med"/>
+                    </a:lnL>
+                    <a:lnR w="6350" cap="flat" cmpd="sng" algn="ctr">
+                      <a:solidFill>
+                        <a:srgbClr val="DDDDDD"/>
+                      </a:solidFill>
+                      <a:prstDash val="solid"/>
+                      <a:round/>
+                      <a:headEnd type="none" w="med" len="med"/>
+                      <a:tailEnd type="none" w="med" len="med"/>
+                    </a:lnR>
+                    <a:lnT w="6350" cap="flat" cmpd="sng" algn="ctr">
+                      <a:solidFill>
+                        <a:srgbClr val="DDDDDD"/>
+                      </a:solidFill>
+                      <a:prstDash val="solid"/>
+                      <a:round/>
+                      <a:headEnd type="none" w="med" len="med"/>
+                      <a:tailEnd type="none" w="med" len="med"/>
+                    </a:lnT>
+                    <a:lnB w="6350" cap="flat" cmpd="sng" algn="ctr">
+                      <a:solidFill>
+                        <a:srgbClr val="DDDDDD"/>
+                      </a:solidFill>
+                      <a:prstDash val="solid"/>
+                      <a:round/>
+                      <a:headEnd type="none" w="med" len="med"/>
+                      <a:tailEnd type="none" w="med" len="med"/>
+                    </a:lnB>
+                    <a:solidFill>
+                      <a:srgbClr val="FFFFFF"/>
+                    </a:solidFill>
+                  </a:tcPr>
+                </a:tc>
+              </a:tr>
+              <a:tr h="274320">
+                <a:tc>
+                  <a:txBody>
+                    <a:bodyPr/>
+                    <a:lstStyle/>
+                    <a:p>
+                      <a:pPr algn="l" indent="0" marL="0">
+                        <a:buNone/>
+                      </a:pPr>
+                      <a:r>
+                        <a:rPr lang="en-US" sz="1100" dirty="0">
+                          <a:solidFill>
+                            <a:srgbClr val="1F2A44"/>
+                          </a:solidFill>
+                          <a:latin typeface="Calibri" pitchFamily="34" charset="0"/>
+                          <a:ea typeface="Calibri" pitchFamily="34" charset="-122"/>
+                          <a:cs typeface="Calibri" pitchFamily="34" charset="-120"/>
+                        </a:rPr>
+                        <a:t>4 – 7 days</a:t>
+                      </a:r>
+                      <a:endParaRPr lang="en-US" sz="1100" dirty="0">
+                        <a:latin typeface="Calibri" charset="0"/>
+                        <a:ea typeface="Calibri" charset="0"/>
+                        <a:cs typeface="Calibri" charset="0"/>
+                      </a:endParaRPr>
+                    </a:p>
+                  </a:txBody>
+                  <a:tcPr marL="38100" marR="12700" marT="12700" marB="12700" anchor="ctr">
+                    <a:lnL w="6350" cap="flat" cmpd="sng" algn="ctr">
+                      <a:solidFill>
+                        <a:srgbClr val="DDDDDD"/>
+                      </a:solidFill>
+                      <a:prstDash val="solid"/>
+                      <a:round/>
+                      <a:headEnd type="none" w="med" len="med"/>
+                      <a:tailEnd type="none" w="med" len="med"/>
+                    </a:lnL>
+                    <a:lnR w="6350" cap="flat" cmpd="sng" algn="ctr">
+                      <a:solidFill>
+                        <a:srgbClr val="DDDDDD"/>
+                      </a:solidFill>
+                      <a:prstDash val="solid"/>
+                      <a:round/>
+                      <a:headEnd type="none" w="med" len="med"/>
+                      <a:tailEnd type="none" w="med" len="med"/>
+                    </a:lnR>
+                    <a:lnT w="6350" cap="flat" cmpd="sng" algn="ctr">
+                      <a:solidFill>
+                        <a:srgbClr val="DDDDDD"/>
+                      </a:solidFill>
+                      <a:prstDash val="solid"/>
+                      <a:round/>
+                      <a:headEnd type="none" w="med" len="med"/>
+                      <a:tailEnd type="none" w="med" len="med"/>
+                    </a:lnT>
+                    <a:lnB w="6350" cap="flat" cmpd="sng" algn="ctr">
+                      <a:solidFill>
+                        <a:srgbClr val="DDDDDD"/>
+                      </a:solidFill>
+                      <a:prstDash val="solid"/>
+                      <a:round/>
+                      <a:headEnd type="none" w="med" len="med"/>
+                      <a:tailEnd type="none" w="med" len="med"/>
+                    </a:lnB>
+                    <a:solidFill>
+                      <a:srgbClr val="FFFFFF"/>
+                    </a:solidFill>
+                  </a:tcPr>
+                </a:tc>
+                <a:tc>
+                  <a:txBody>
+                    <a:bodyPr/>
+                    <a:lstStyle/>
+                    <a:p>
+                      <a:pPr algn="ctr" indent="0" marL="0">
+                        <a:buNone/>
+                      </a:pPr>
+                      <a:r>
+                        <a:rPr lang="en-US" sz="1100" dirty="0">
+                          <a:solidFill>
+                            <a:srgbClr val="1F2A44"/>
+                          </a:solidFill>
+                          <a:latin typeface="Calibri" pitchFamily="34" charset="0"/>
+                          <a:ea typeface="Calibri" pitchFamily="34" charset="-122"/>
+                          <a:cs typeface="Calibri" pitchFamily="34" charset="-120"/>
+                        </a:rPr>
+                        <a:t>0</a:t>
+                      </a:r>
+                      <a:endParaRPr lang="en-US" sz="1100" dirty="0">
+                        <a:latin typeface="Calibri" charset="0"/>
+                        <a:ea typeface="Calibri" charset="0"/>
+                        <a:cs typeface="Calibri" charset="0"/>
+                      </a:endParaRPr>
+                    </a:p>
+                  </a:txBody>
+                  <a:tcPr marL="38100" marR="12700" marT="12700" marB="12700" anchor="ctr">
+                    <a:lnL w="6350" cap="flat" cmpd="sng" algn="ctr">
+                      <a:solidFill>
+                        <a:srgbClr val="DDDDDD"/>
+                      </a:solidFill>
+                      <a:prstDash val="solid"/>
+                      <a:round/>
+                      <a:headEnd type="none" w="med" len="med"/>
+                      <a:tailEnd type="none" w="med" len="med"/>
+                    </a:lnL>
+                    <a:lnR w="6350" cap="flat" cmpd="sng" algn="ctr">
+                      <a:solidFill>
+                        <a:srgbClr val="DDDDDD"/>
+                      </a:solidFill>
+                      <a:prstDash val="solid"/>
+                      <a:round/>
+                      <a:headEnd type="none" w="med" len="med"/>
+                      <a:tailEnd type="none" w="med" len="med"/>
+                    </a:lnR>
+                    <a:lnT w="6350" cap="flat" cmpd="sng" algn="ctr">
+                      <a:solidFill>
+                        <a:srgbClr val="DDDDDD"/>
+                      </a:solidFill>
+                      <a:prstDash val="solid"/>
+                      <a:round/>
+                      <a:headEnd type="none" w="med" len="med"/>
+                      <a:tailEnd type="none" w="med" len="med"/>
+                    </a:lnT>
+                    <a:lnB w="6350" cap="flat" cmpd="sng" algn="ctr">
+                      <a:solidFill>
+                        <a:srgbClr val="DDDDDD"/>
+                      </a:solidFill>
+                      <a:prstDash val="solid"/>
+                      <a:round/>
+                      <a:headEnd type="none" w="med" len="med"/>
+                      <a:tailEnd type="none" w="med" len="med"/>
+                    </a:lnB>
+                    <a:solidFill>
+                      <a:srgbClr val="FFFFFF"/>
+                    </a:solidFill>
+                  </a:tcPr>
+                </a:tc>
+                <a:tc>
+                  <a:txBody>
+                    <a:bodyPr/>
+                    <a:lstStyle/>
+                    <a:p>
+                      <a:pPr algn="ctr" indent="0" marL="0">
+                        <a:buNone/>
+                      </a:pPr>
+                      <a:r>
+                        <a:rPr lang="en-US" sz="1100" dirty="0">
+                          <a:solidFill>
+                            <a:srgbClr val="1F2A44"/>
+                          </a:solidFill>
+                          <a:latin typeface="Calibri" pitchFamily="34" charset="0"/>
+                          <a:ea typeface="Calibri" pitchFamily="34" charset="-122"/>
+                          <a:cs typeface="Calibri" pitchFamily="34" charset="-120"/>
+                        </a:rPr>
+                        <a:t>0.0%</a:t>
+                      </a:r>
+                      <a:endParaRPr lang="en-US" sz="1100" dirty="0">
+                        <a:latin typeface="Calibri" charset="0"/>
+                        <a:ea typeface="Calibri" charset="0"/>
+                        <a:cs typeface="Calibri" charset="0"/>
+                      </a:endParaRPr>
+                    </a:p>
+                  </a:txBody>
+                  <a:tcPr marL="38100" marR="12700" marT="12700" marB="12700" anchor="ctr">
+                    <a:lnL w="6350" cap="flat" cmpd="sng" algn="ctr">
+                      <a:solidFill>
+                        <a:srgbClr val="DDDDDD"/>
+                      </a:solidFill>
+                      <a:prstDash val="solid"/>
+                      <a:round/>
+                      <a:headEnd type="none" w="med" len="med"/>
+                      <a:tailEnd type="none" w="med" len="med"/>
+                    </a:lnL>
+                    <a:lnR w="6350" cap="flat" cmpd="sng" algn="ctr">
+                      <a:solidFill>
+                        <a:srgbClr val="DDDDDD"/>
+                      </a:solidFill>
+                      <a:prstDash val="solid"/>
+                      <a:round/>
+                      <a:headEnd type="none" w="med" len="med"/>
+                      <a:tailEnd type="none" w="med" len="med"/>
+                    </a:lnR>
+                    <a:lnT w="6350" cap="flat" cmpd="sng" algn="ctr">
+                      <a:solidFill>
+                        <a:srgbClr val="DDDDDD"/>
+                      </a:solidFill>
+                      <a:prstDash val="solid"/>
+                      <a:round/>
+                      <a:headEnd type="none" w="med" len="med"/>
+                      <a:tailEnd type="none" w="med" len="med"/>
+                    </a:lnT>
+                    <a:lnB w="6350" cap="flat" cmpd="sng" algn="ctr">
+                      <a:solidFill>
+                        <a:srgbClr val="DDDDDD"/>
+                      </a:solidFill>
+                      <a:prstDash val="solid"/>
+                      <a:round/>
+                      <a:headEnd type="none" w="med" len="med"/>
+                      <a:tailEnd type="none" w="med" len="med"/>
+                    </a:lnB>
+                    <a:solidFill>
+                      <a:srgbClr val="FFFFFF"/>
+                    </a:solidFill>
+                  </a:tcPr>
+                </a:tc>
+              </a:tr>
+              <a:tr h="274320">
+                <a:tc>
+                  <a:txBody>
+                    <a:bodyPr/>
+                    <a:lstStyle/>
+                    <a:p>
+                      <a:pPr algn="l" indent="0" marL="0">
+                        <a:buNone/>
+                      </a:pPr>
+                      <a:r>
+                        <a:rPr lang="en-US" sz="1100" dirty="0">
+                          <a:solidFill>
+                            <a:srgbClr val="1F2A44"/>
+                          </a:solidFill>
+                          <a:latin typeface="Calibri" pitchFamily="34" charset="0"/>
+                          <a:ea typeface="Calibri" pitchFamily="34" charset="-122"/>
+                          <a:cs typeface="Calibri" pitchFamily="34" charset="-120"/>
+                        </a:rPr>
+                        <a:t>More than 7 days</a:t>
+                      </a:r>
+                      <a:endParaRPr lang="en-US" sz="1100" dirty="0">
+                        <a:latin typeface="Calibri" charset="0"/>
+                        <a:ea typeface="Calibri" charset="0"/>
+                        <a:cs typeface="Calibri" charset="0"/>
+                      </a:endParaRPr>
+                    </a:p>
+                  </a:txBody>
+                  <a:tcPr marL="38100" marR="12700" marT="12700" marB="12700" anchor="ctr">
+                    <a:lnL w="6350" cap="flat" cmpd="sng" algn="ctr">
+                      <a:solidFill>
+                        <a:srgbClr val="DDDDDD"/>
+                      </a:solidFill>
+                      <a:prstDash val="solid"/>
+                      <a:round/>
+                      <a:headEnd type="none" w="med" len="med"/>
+                      <a:tailEnd type="none" w="med" len="med"/>
+                    </a:lnL>
+                    <a:lnR w="6350" cap="flat" cmpd="sng" algn="ctr">
+                      <a:solidFill>
+                        <a:srgbClr val="DDDDDD"/>
+                      </a:solidFill>
+                      <a:prstDash val="solid"/>
+                      <a:round/>
+                      <a:headEnd type="none" w="med" len="med"/>
+                      <a:tailEnd type="none" w="med" len="med"/>
+                    </a:lnR>
+                    <a:lnT w="6350" cap="flat" cmpd="sng" algn="ctr">
+                      <a:solidFill>
+                        <a:srgbClr val="DDDDDD"/>
+                      </a:solidFill>
+                      <a:prstDash val="solid"/>
+                      <a:round/>
+                      <a:headEnd type="none" w="med" len="med"/>
+                      <a:tailEnd type="none" w="med" len="med"/>
+                    </a:lnT>
+                    <a:lnB w="6350" cap="flat" cmpd="sng" algn="ctr">
+                      <a:solidFill>
+                        <a:srgbClr val="DDDDDD"/>
+                      </a:solidFill>
+                      <a:prstDash val="solid"/>
+                      <a:round/>
+                      <a:headEnd type="none" w="med" len="med"/>
+                      <a:tailEnd type="none" w="med" len="med"/>
+                    </a:lnB>
+                    <a:solidFill>
+                      <a:srgbClr val="FFFFFF"/>
+                    </a:solidFill>
+                  </a:tcPr>
+                </a:tc>
+                <a:tc>
+                  <a:txBody>
+                    <a:bodyPr/>
+                    <a:lstStyle/>
+                    <a:p>
+                      <a:pPr algn="ctr" indent="0" marL="0">
+                        <a:buNone/>
+                      </a:pPr>
+                      <a:r>
+                        <a:rPr lang="en-US" sz="1100" dirty="0">
+                          <a:solidFill>
+                            <a:srgbClr val="1F2A44"/>
+                          </a:solidFill>
+                          <a:latin typeface="Calibri" pitchFamily="34" charset="0"/>
+                          <a:ea typeface="Calibri" pitchFamily="34" charset="-122"/>
+                          <a:cs typeface="Calibri" pitchFamily="34" charset="-120"/>
+                        </a:rPr>
+                        <a:t>1</a:t>
+                      </a:r>
+                      <a:endParaRPr lang="en-US" sz="1100" dirty="0">
+                        <a:latin typeface="Calibri" charset="0"/>
+                        <a:ea typeface="Calibri" charset="0"/>
+                        <a:cs typeface="Calibri" charset="0"/>
+                      </a:endParaRPr>
+                    </a:p>
+                  </a:txBody>
+                  <a:tcPr marL="38100" marR="12700" marT="12700" marB="12700" anchor="ctr">
+                    <a:lnL w="6350" cap="flat" cmpd="sng" algn="ctr">
+                      <a:solidFill>
+                        <a:srgbClr val="DDDDDD"/>
+                      </a:solidFill>
+                      <a:prstDash val="solid"/>
+                      <a:round/>
+                      <a:headEnd type="none" w="med" len="med"/>
+                      <a:tailEnd type="none" w="med" len="med"/>
+                    </a:lnL>
+                    <a:lnR w="6350" cap="flat" cmpd="sng" algn="ctr">
+                      <a:solidFill>
+                        <a:srgbClr val="DDDDDD"/>
+                      </a:solidFill>
+                      <a:prstDash val="solid"/>
+                      <a:round/>
+                      <a:headEnd type="none" w="med" len="med"/>
+                      <a:tailEnd type="none" w="med" len="med"/>
+                    </a:lnR>
+                    <a:lnT w="6350" cap="flat" cmpd="sng" algn="ctr">
+                      <a:solidFill>
+                        <a:srgbClr val="DDDDDD"/>
+                      </a:solidFill>
+                      <a:prstDash val="solid"/>
+                      <a:round/>
+                      <a:headEnd type="none" w="med" len="med"/>
+                      <a:tailEnd type="none" w="med" len="med"/>
+                    </a:lnT>
+                    <a:lnB w="6350" cap="flat" cmpd="sng" algn="ctr">
+                      <a:solidFill>
+                        <a:srgbClr val="DDDDDD"/>
+                      </a:solidFill>
+                      <a:prstDash val="solid"/>
+                      <a:round/>
+                      <a:headEnd type="none" w="med" len="med"/>
+                      <a:tailEnd type="none" w="med" len="med"/>
+                    </a:lnB>
+                    <a:solidFill>
+                      <a:srgbClr val="FFFFFF"/>
+                    </a:solidFill>
+                  </a:tcPr>
+                </a:tc>
+                <a:tc>
+                  <a:txBody>
+                    <a:bodyPr/>
+                    <a:lstStyle/>
+                    <a:p>
+                      <a:pPr algn="ctr" indent="0" marL="0">
+                        <a:buNone/>
+                      </a:pPr>
+                      <a:r>
+                        <a:rPr lang="en-US" sz="1100" dirty="0">
+                          <a:solidFill>
+                            <a:srgbClr val="1F2A44"/>
+                          </a:solidFill>
+                          <a:latin typeface="Calibri" pitchFamily="34" charset="0"/>
+                          <a:ea typeface="Calibri" pitchFamily="34" charset="-122"/>
+                          <a:cs typeface="Calibri" pitchFamily="34" charset="-120"/>
+                        </a:rPr>
+                        <a:t>1.4%</a:t>
+                      </a:r>
+                      <a:endParaRPr lang="en-US" sz="1100" dirty="0">
+                        <a:latin typeface="Calibri" charset="0"/>
+                        <a:ea typeface="Calibri" charset="0"/>
+                        <a:cs typeface="Calibri" charset="0"/>
+                      </a:endParaRPr>
+                    </a:p>
+                  </a:txBody>
+                  <a:tcPr marL="38100" marR="12700" marT="12700" marB="12700" anchor="ctr">
+                    <a:lnL w="6350" cap="flat" cmpd="sng" algn="ctr">
+                      <a:solidFill>
+                        <a:srgbClr val="DDDDDD"/>
+                      </a:solidFill>
+                      <a:prstDash val="solid"/>
+                      <a:round/>
+                      <a:headEnd type="none" w="med" len="med"/>
+                      <a:tailEnd type="none" w="med" len="med"/>
+                    </a:lnL>
+                    <a:lnR w="6350" cap="flat" cmpd="sng" algn="ctr">
+                      <a:solidFill>
+                        <a:srgbClr val="DDDDDD"/>
+                      </a:solidFill>
+                      <a:prstDash val="solid"/>
+                      <a:round/>
+                      <a:headEnd type="none" w="med" len="med"/>
+                      <a:tailEnd type="none" w="med" len="med"/>
+                    </a:lnR>
+                    <a:lnT w="6350" cap="flat" cmpd="sng" algn="ctr">
+                      <a:solidFill>
+                        <a:srgbClr val="DDDDDD"/>
+                      </a:solidFill>
+                      <a:prstDash val="solid"/>
+                      <a:round/>
+                      <a:headEnd type="none" w="med" len="med"/>
+                      <a:tailEnd type="none" w="med" len="med"/>
+                    </a:lnT>
+                    <a:lnB w="6350" cap="flat" cmpd="sng" algn="ctr">
+                      <a:solidFill>
+                        <a:srgbClr val="DDDDDD"/>
+                      </a:solidFill>
+                      <a:prstDash val="solid"/>
+                      <a:round/>
+                      <a:headEnd type="none" w="med" len="med"/>
+                      <a:tailEnd type="none" w="med" len="med"/>
+                    </a:lnB>
+                    <a:solidFill>
+                      <a:srgbClr val="FFFFFF"/>
+                    </a:solidFill>
+                  </a:tcPr>
+                </a:tc>
+              </a:tr>
+              <a:tr h="274320">
+                <a:tc>
+                  <a:txBody>
+                    <a:bodyPr/>
+                    <a:lstStyle/>
+                    <a:p>
+                      <a:pPr algn="l" indent="0" marL="0">
+                        <a:buNone/>
+                      </a:pPr>
+                      <a:r>
+                        <a:rPr lang="en-US" sz="1100" b="1" dirty="0">
+                          <a:solidFill>
+                            <a:srgbClr val="1F2A44"/>
+                          </a:solidFill>
+                          <a:latin typeface="Calibri" pitchFamily="34" charset="0"/>
+                          <a:ea typeface="Calibri" pitchFamily="34" charset="-122"/>
+                          <a:cs typeface="Calibri" pitchFamily="34" charset="-120"/>
+                        </a:rPr>
+                        <a:t>TOTAL</a:t>
+                      </a:r>
+                      <a:endParaRPr lang="en-US" sz="1100" dirty="0">
+                        <a:latin typeface="Calibri" charset="0"/>
+                        <a:ea typeface="Calibri" charset="0"/>
+                        <a:cs typeface="Calibri" charset="0"/>
+                      </a:endParaRPr>
+                    </a:p>
+                  </a:txBody>
+                  <a:tcPr marL="38100" marR="12700" marT="12700" marB="12700" anchor="ctr">
+                    <a:lnL w="6350" cap="flat" cmpd="sng" algn="ctr">
+                      <a:solidFill>
+                        <a:srgbClr val="DDDDDD"/>
+                      </a:solidFill>
+                      <a:prstDash val="solid"/>
+                      <a:round/>
+                      <a:headEnd type="none" w="med" len="med"/>
+                      <a:tailEnd type="none" w="med" len="med"/>
+                    </a:lnL>
+                    <a:lnR w="6350" cap="flat" cmpd="sng" algn="ctr">
+                      <a:solidFill>
+                        <a:srgbClr val="DDDDDD"/>
+                      </a:solidFill>
+                      <a:prstDash val="solid"/>
+                      <a:round/>
+                      <a:headEnd type="none" w="med" len="med"/>
+                      <a:tailEnd type="none" w="med" len="med"/>
+                    </a:lnR>
+                    <a:lnT w="6350" cap="flat" cmpd="sng" algn="ctr">
+                      <a:solidFill>
+                        <a:srgbClr val="DDDDDD"/>
+                      </a:solidFill>
+                      <a:prstDash val="solid"/>
+                      <a:round/>
+                      <a:headEnd type="none" w="med" len="med"/>
+                      <a:tailEnd type="none" w="med" len="med"/>
+                    </a:lnT>
+                    <a:lnB w="6350" cap="flat" cmpd="sng" algn="ctr">
+                      <a:solidFill>
+                        <a:srgbClr val="DDDDDD"/>
+                      </a:solidFill>
+                      <a:prstDash val="solid"/>
+                      <a:round/>
+                      <a:headEnd type="none" w="med" len="med"/>
+                      <a:tailEnd type="none" w="med" len="med"/>
+                    </a:lnB>
+                    <a:solidFill>
+                      <a:srgbClr val="E9F3EF"/>
+                    </a:solidFill>
+                  </a:tcPr>
+                </a:tc>
+                <a:tc>
+                  <a:txBody>
+                    <a:bodyPr/>
+                    <a:lstStyle/>
+                    <a:p>
+                      <a:pPr algn="ctr" indent="0" marL="0">
+                        <a:buNone/>
+                      </a:pPr>
+                      <a:r>
+                        <a:rPr lang="en-US" sz="1100" b="1" dirty="0">
+                          <a:solidFill>
+                            <a:srgbClr val="1F2A44"/>
+                          </a:solidFill>
+                          <a:latin typeface="Calibri" pitchFamily="34" charset="0"/>
+                          <a:ea typeface="Calibri" pitchFamily="34" charset="-122"/>
+                          <a:cs typeface="Calibri" pitchFamily="34" charset="-120"/>
+                        </a:rPr>
+                        <a:t>73</a:t>
+                      </a:r>
+                      <a:endParaRPr lang="en-US" sz="1100" dirty="0">
+                        <a:latin typeface="Calibri" charset="0"/>
+                        <a:ea typeface="Calibri" charset="0"/>
+                        <a:cs typeface="Calibri" charset="0"/>
+                      </a:endParaRPr>
+                    </a:p>
+                  </a:txBody>
+                  <a:tcPr marL="38100" marR="12700" marT="12700" marB="12700" anchor="ctr">
+                    <a:lnL w="6350" cap="flat" cmpd="sng" algn="ctr">
+                      <a:solidFill>
+                        <a:srgbClr val="DDDDDD"/>
+                      </a:solidFill>
+                      <a:prstDash val="solid"/>
+                      <a:round/>
+                      <a:headEnd type="none" w="med" len="med"/>
+                      <a:tailEnd type="none" w="med" len="med"/>
+                    </a:lnL>
+                    <a:lnR w="6350" cap="flat" cmpd="sng" algn="ctr">
+                      <a:solidFill>
+                        <a:srgbClr val="DDDDDD"/>
+                      </a:solidFill>
+                      <a:prstDash val="solid"/>
+                      <a:round/>
+                      <a:headEnd type="none" w="med" len="med"/>
+                      <a:tailEnd type="none" w="med" len="med"/>
+                    </a:lnR>
+                    <a:lnT w="6350" cap="flat" cmpd="sng" algn="ctr">
+                      <a:solidFill>
+                        <a:srgbClr val="DDDDDD"/>
+                      </a:solidFill>
+                      <a:prstDash val="solid"/>
+                      <a:round/>
+                      <a:headEnd type="none" w="med" len="med"/>
+                      <a:tailEnd type="none" w="med" len="med"/>
+                    </a:lnT>
+                    <a:lnB w="6350" cap="flat" cmpd="sng" algn="ctr">
+                      <a:solidFill>
+                        <a:srgbClr val="DDDDDD"/>
+                      </a:solidFill>
+                      <a:prstDash val="solid"/>
+                      <a:round/>
+                      <a:headEnd type="none" w="med" len="med"/>
+                      <a:tailEnd type="none" w="med" len="med"/>
+                    </a:lnB>
+                    <a:solidFill>
+                      <a:srgbClr val="E9F3EF"/>
+                    </a:solidFill>
+                  </a:tcPr>
+                </a:tc>
+                <a:tc>
+                  <a:txBody>
+                    <a:bodyPr/>
+                    <a:lstStyle/>
+                    <a:p>
+                      <a:pPr algn="ctr" indent="0" marL="0">
+                        <a:buNone/>
+                      </a:pPr>
+                      <a:r>
+                        <a:rPr lang="en-US" sz="1100" b="1" dirty="0">
+                          <a:solidFill>
+                            <a:srgbClr val="1F2A44"/>
+                          </a:solidFill>
+                          <a:latin typeface="Calibri" pitchFamily="34" charset="0"/>
+                          <a:ea typeface="Calibri" pitchFamily="34" charset="-122"/>
+                          <a:cs typeface="Calibri" pitchFamily="34" charset="-120"/>
+                        </a:rPr>
+                        <a:t>100%</a:t>
+                      </a:r>
+                      <a:endParaRPr lang="en-US" sz="1100" dirty="0">
+                        <a:latin typeface="Calibri" charset="0"/>
+                        <a:ea typeface="Calibri" charset="0"/>
+                        <a:cs typeface="Calibri" charset="0"/>
+                      </a:endParaRPr>
+                    </a:p>
+                  </a:txBody>
+                  <a:tcPr marL="38100" marR="12700" marT="12700" marB="12700" anchor="ctr">
+                    <a:lnL w="6350" cap="flat" cmpd="sng" algn="ctr">
+                      <a:solidFill>
+                        <a:srgbClr val="DDDDDD"/>
+                      </a:solidFill>
+                      <a:prstDash val="solid"/>
+                      <a:round/>
+                      <a:headEnd type="none" w="med" len="med"/>
+                      <a:tailEnd type="none" w="med" len="med"/>
+                    </a:lnL>
+                    <a:lnR w="6350" cap="flat" cmpd="sng" algn="ctr">
+                      <a:solidFill>
+                        <a:srgbClr val="DDDDDD"/>
+                      </a:solidFill>
+                      <a:prstDash val="solid"/>
+                      <a:round/>
+                      <a:headEnd type="none" w="med" len="med"/>
+                      <a:tailEnd type="none" w="med" len="med"/>
+                    </a:lnR>
+                    <a:lnT w="6350" cap="flat" cmpd="sng" algn="ctr">
+                      <a:solidFill>
+                        <a:srgbClr val="DDDDDD"/>
+                      </a:solidFill>
+                      <a:prstDash val="solid"/>
+                      <a:round/>
+                      <a:headEnd type="none" w="med" len="med"/>
+                      <a:tailEnd type="none" w="med" len="med"/>
+                    </a:lnT>
+                    <a:lnB w="6350" cap="flat" cmpd="sng" algn="ctr">
+                      <a:solidFill>
+                        <a:srgbClr val="DDDDDD"/>
+                      </a:solidFill>
+                      <a:prstDash val="solid"/>
+                      <a:round/>
+                      <a:headEnd type="none" w="med" len="med"/>
+                      <a:tailEnd type="none" w="med" len="med"/>
+                    </a:lnB>
+                    <a:solidFill>
+                      <a:srgbClr val="E9F3EF"/>
+                    </a:solidFill>
+                  </a:tcPr>
+                </a:tc>
+              </a:tr>
+            </a:tbl>
           </a:graphicData>
         </a:graphic>
       </p:graphicFrame>
@@ -4199,6 +5060,74 @@
                     <a:bodyPr/>
                     <a:lstStyle/>
                     <a:p>
+                      <a:pPr algn="l" indent="0" marL="0">
+                        <a:buNone/>
+                      </a:pPr>
+                      <a:r>
+                        <a:rPr lang="en-US" sz="1100" b="1" dirty="0">
+                          <a:solidFill>
+                            <a:srgbClr val="FFFFFF"/>
+                          </a:solidFill>
+                          <a:latin typeface="Calibri" pitchFamily="34" charset="0"/>
+                          <a:ea typeface="Calibri" pitchFamily="34" charset="-122"/>
+                          <a:cs typeface="Calibri" pitchFamily="34" charset="-120"/>
+                        </a:rPr>
+                        <a:t>Month</a:t>
+                      </a:r>
+                      <a:endParaRPr lang="en-US" sz="1100" dirty="0">
+                        <a:latin typeface="Calibri" charset="0"/>
+                        <a:ea typeface="Calibri" charset="0"/>
+                        <a:cs typeface="Calibri" charset="0"/>
+                      </a:endParaRPr>
+                    </a:p>
+                  </a:txBody>
+                  <a:tcPr marL="38100" marR="12700" marT="12700" marB="12700" anchor="ctr">
+                    <a:lnL w="6350" cap="flat" cmpd="sng" algn="ctr">
+                      <a:solidFill>
+                        <a:srgbClr val="DDDDDD"/>
+                      </a:solidFill>
+                      <a:prstDash val="solid"/>
+                      <a:round/>
+                      <a:headEnd type="none" w="med" len="med"/>
+                      <a:tailEnd type="none" w="med" len="med"/>
+                    </a:lnL>
+                    <a:lnR w="6350" cap="flat" cmpd="sng" algn="ctr">
+                      <a:solidFill>
+                        <a:srgbClr val="DDDDDD"/>
+                      </a:solidFill>
+                      <a:prstDash val="solid"/>
+                      <a:round/>
+                      <a:headEnd type="none" w="med" len="med"/>
+                      <a:tailEnd type="none" w="med" len="med"/>
+                    </a:lnR>
+                    <a:lnT w="6350" cap="flat" cmpd="sng" algn="ctr">
+                      <a:solidFill>
+                        <a:srgbClr val="DDDDDD"/>
+                      </a:solidFill>
+                      <a:prstDash val="solid"/>
+                      <a:round/>
+                      <a:headEnd type="none" w="med" len="med"/>
+                      <a:tailEnd type="none" w="med" len="med"/>
+                    </a:lnT>
+                    <a:lnB w="6350" cap="flat" cmpd="sng" algn="ctr">
+                      <a:solidFill>
+                        <a:srgbClr val="DDDDDD"/>
+                      </a:solidFill>
+                      <a:prstDash val="solid"/>
+                      <a:round/>
+                      <a:headEnd type="none" w="med" len="med"/>
+                      <a:tailEnd type="none" w="med" len="med"/>
+                    </a:lnB>
+                    <a:solidFill>
+                      <a:srgbClr val="158158"/>
+                    </a:solidFill>
+                  </a:tcPr>
+                </a:tc>
+                <a:tc>
+                  <a:txBody>
+                    <a:bodyPr/>
+                    <a:lstStyle/>
+                    <a:p>
                       <a:pPr algn="ctr" indent="0" marL="0">
                         <a:buNone/>
                       </a:pPr>
@@ -4211,7 +5140,7 @@
                           <a:ea typeface="Calibri" pitchFamily="34" charset="-122"/>
                           <a:cs typeface="Calibri" pitchFamily="34" charset="-120"/>
                         </a:rPr>
-                        <a:t>Month</a:t>
+                        <a:t>Created</a:t>
                       </a:r>
                       <a:endParaRPr lang="en-US" sz="1100" dirty="0">
                         <a:latin typeface="Calibri" charset="0"/>
@@ -4220,7 +5149,7 @@
                       </a:endParaRPr>
                     </a:p>
                   </a:txBody>
-                  <a:tcPr marL="91440" marR="91440" marT="45720" marB="45720" anchor="ctr">
+                  <a:tcPr marL="38100" marR="12700" marT="12700" marB="12700" anchor="ctr">
                     <a:lnL w="6350" cap="flat" cmpd="sng" algn="ctr">
                       <a:solidFill>
                         <a:srgbClr val="DDDDDD"/>
@@ -4279,7 +5208,7 @@
                           <a:ea typeface="Calibri" pitchFamily="34" charset="-122"/>
                           <a:cs typeface="Calibri" pitchFamily="34" charset="-120"/>
                         </a:rPr>
-                        <a:t>Created</a:t>
+                        <a:t>Completed</a:t>
                       </a:r>
                       <a:endParaRPr lang="en-US" sz="1100" dirty="0">
                         <a:latin typeface="Calibri" charset="0"/>
@@ -4288,7 +5217,7 @@
                       </a:endParaRPr>
                     </a:p>
                   </a:txBody>
-                  <a:tcPr marL="91440" marR="91440" marT="45720" marB="45720" anchor="ctr">
+                  <a:tcPr marL="38100" marR="12700" marT="12700" marB="12700" anchor="ctr">
                     <a:lnL w="6350" cap="flat" cmpd="sng" algn="ctr">
                       <a:solidFill>
                         <a:srgbClr val="DDDDDD"/>
@@ -4347,7 +5276,7 @@
                           <a:ea typeface="Calibri" pitchFamily="34" charset="-122"/>
                           <a:cs typeface="Calibri" pitchFamily="34" charset="-120"/>
                         </a:rPr>
-                        <a:t>Completed</a:t>
+                        <a:t>Avg. days</a:t>
                       </a:r>
                       <a:endParaRPr lang="en-US" sz="1100" dirty="0">
                         <a:latin typeface="Calibri" charset="0"/>
@@ -4356,7 +5285,7 @@
                       </a:endParaRPr>
                     </a:p>
                   </a:txBody>
-                  <a:tcPr marL="91440" marR="91440" marT="45720" marB="45720" anchor="ctr">
+                  <a:tcPr marL="38100" marR="12700" marT="12700" marB="12700" anchor="ctr">
                     <a:lnL w="6350" cap="flat" cmpd="sng" algn="ctr">
                       <a:solidFill>
                         <a:srgbClr val="DDDDDD"/>
@@ -4415,7 +5344,7 @@
                           <a:ea typeface="Calibri" pitchFamily="34" charset="-122"/>
                           <a:cs typeface="Calibri" pitchFamily="34" charset="-120"/>
                         </a:rPr>
-                        <a:t>Avg. days</a:t>
+                        <a:t>% same day</a:t>
                       </a:r>
                       <a:endParaRPr lang="en-US" sz="1100" dirty="0">
                         <a:latin typeface="Calibri" charset="0"/>
@@ -4424,75 +5353,7 @@
                       </a:endParaRPr>
                     </a:p>
                   </a:txBody>
-                  <a:tcPr marL="91440" marR="91440" marT="45720" marB="45720" anchor="ctr">
-                    <a:lnL w="6350" cap="flat" cmpd="sng" algn="ctr">
-                      <a:solidFill>
-                        <a:srgbClr val="DDDDDD"/>
-                      </a:solidFill>
-                      <a:prstDash val="solid"/>
-                      <a:round/>
-                      <a:headEnd type="none" w="med" len="med"/>
-                      <a:tailEnd type="none" w="med" len="med"/>
-                    </a:lnL>
-                    <a:lnR w="6350" cap="flat" cmpd="sng" algn="ctr">
-                      <a:solidFill>
-                        <a:srgbClr val="DDDDDD"/>
-                      </a:solidFill>
-                      <a:prstDash val="solid"/>
-                      <a:round/>
-                      <a:headEnd type="none" w="med" len="med"/>
-                      <a:tailEnd type="none" w="med" len="med"/>
-                    </a:lnR>
-                    <a:lnT w="6350" cap="flat" cmpd="sng" algn="ctr">
-                      <a:solidFill>
-                        <a:srgbClr val="DDDDDD"/>
-                      </a:solidFill>
-                      <a:prstDash val="solid"/>
-                      <a:round/>
-                      <a:headEnd type="none" w="med" len="med"/>
-                      <a:tailEnd type="none" w="med" len="med"/>
-                    </a:lnT>
-                    <a:lnB w="6350" cap="flat" cmpd="sng" algn="ctr">
-                      <a:solidFill>
-                        <a:srgbClr val="DDDDDD"/>
-                      </a:solidFill>
-                      <a:prstDash val="solid"/>
-                      <a:round/>
-                      <a:headEnd type="none" w="med" len="med"/>
-                      <a:tailEnd type="none" w="med" len="med"/>
-                    </a:lnB>
-                    <a:solidFill>
-                      <a:srgbClr val="158158"/>
-                    </a:solidFill>
-                  </a:tcPr>
-                </a:tc>
-                <a:tc>
-                  <a:txBody>
-                    <a:bodyPr/>
-                    <a:lstStyle/>
-                    <a:p>
-                      <a:pPr algn="ctr" indent="0" marL="0">
-                        <a:buNone/>
-                      </a:pPr>
-                      <a:r>
-                        <a:rPr lang="en-US" sz="1100" b="1" dirty="0">
-                          <a:solidFill>
-                            <a:srgbClr val="FFFFFF"/>
-                          </a:solidFill>
-                          <a:latin typeface="Calibri" pitchFamily="34" charset="0"/>
-                          <a:ea typeface="Calibri" pitchFamily="34" charset="-122"/>
-                          <a:cs typeface="Calibri" pitchFamily="34" charset="-120"/>
-                        </a:rPr>
-                        <a:t>% same day</a:t>
-                      </a:r>
-                      <a:endParaRPr lang="en-US" sz="1100" dirty="0">
-                        <a:latin typeface="Calibri" charset="0"/>
-                        <a:ea typeface="Calibri" charset="0"/>
-                        <a:cs typeface="Calibri" charset="0"/>
-                      </a:endParaRPr>
-                    </a:p>
-                  </a:txBody>
-                  <a:tcPr marL="91440" marR="91440" marT="45720" marB="45720" anchor="ctr">
+                  <a:tcPr marL="38100" marR="12700" marT="12700" marB="12700" anchor="ctr">
                     <a:lnL w="6350" cap="flat" cmpd="sng" algn="ctr">
                       <a:solidFill>
                         <a:srgbClr val="DDDDDD"/>
@@ -4541,6 +5402,74 @@
                     <a:bodyPr/>
                     <a:lstStyle/>
                     <a:p>
+                      <a:pPr algn="l" indent="0" marL="0">
+                        <a:buNone/>
+                      </a:pPr>
+                      <a:r>
+                        <a:rPr lang="en-US" sz="1100" dirty="0">
+                          <a:solidFill>
+                            <a:srgbClr val="1F2A44"/>
+                          </a:solidFill>
+                          <a:latin typeface="Calibri" pitchFamily="34" charset="0"/>
+                          <a:ea typeface="Calibri" pitchFamily="34" charset="-122"/>
+                          <a:cs typeface="Calibri" pitchFamily="34" charset="-120"/>
+                        </a:rPr>
+                        <a:t>Jul - 26</a:t>
+                      </a:r>
+                      <a:endParaRPr lang="en-US" sz="1100" dirty="0">
+                        <a:latin typeface="Calibri" charset="0"/>
+                        <a:ea typeface="Calibri" charset="0"/>
+                        <a:cs typeface="Calibri" charset="0"/>
+                      </a:endParaRPr>
+                    </a:p>
+                  </a:txBody>
+                  <a:tcPr marL="38100" marR="12700" marT="12700" marB="12700" anchor="ctr">
+                    <a:lnL w="6350" cap="flat" cmpd="sng" algn="ctr">
+                      <a:solidFill>
+                        <a:srgbClr val="DDDDDD"/>
+                      </a:solidFill>
+                      <a:prstDash val="solid"/>
+                      <a:round/>
+                      <a:headEnd type="none" w="med" len="med"/>
+                      <a:tailEnd type="none" w="med" len="med"/>
+                    </a:lnL>
+                    <a:lnR w="6350" cap="flat" cmpd="sng" algn="ctr">
+                      <a:solidFill>
+                        <a:srgbClr val="DDDDDD"/>
+                      </a:solidFill>
+                      <a:prstDash val="solid"/>
+                      <a:round/>
+                      <a:headEnd type="none" w="med" len="med"/>
+                      <a:tailEnd type="none" w="med" len="med"/>
+                    </a:lnR>
+                    <a:lnT w="6350" cap="flat" cmpd="sng" algn="ctr">
+                      <a:solidFill>
+                        <a:srgbClr val="DDDDDD"/>
+                      </a:solidFill>
+                      <a:prstDash val="solid"/>
+                      <a:round/>
+                      <a:headEnd type="none" w="med" len="med"/>
+                      <a:tailEnd type="none" w="med" len="med"/>
+                    </a:lnT>
+                    <a:lnB w="6350" cap="flat" cmpd="sng" algn="ctr">
+                      <a:solidFill>
+                        <a:srgbClr val="DDDDDD"/>
+                      </a:solidFill>
+                      <a:prstDash val="solid"/>
+                      <a:round/>
+                      <a:headEnd type="none" w="med" len="med"/>
+                      <a:tailEnd type="none" w="med" len="med"/>
+                    </a:lnB>
+                    <a:solidFill>
+                      <a:srgbClr val="FFFFFF"/>
+                    </a:solidFill>
+                  </a:tcPr>
+                </a:tc>
+                <a:tc>
+                  <a:txBody>
+                    <a:bodyPr/>
+                    <a:lstStyle/>
+                    <a:p>
                       <a:pPr algn="ctr" indent="0" marL="0">
                         <a:buNone/>
                       </a:pPr>
@@ -4553,7 +5482,7 @@
                           <a:ea typeface="Calibri" pitchFamily="34" charset="-122"/>
                           <a:cs typeface="Calibri" pitchFamily="34" charset="-120"/>
                         </a:rPr>
-                        <a:t>Jul - 26</a:t>
+                        <a:t>80</a:t>
                       </a:r>
                       <a:endParaRPr lang="en-US" sz="1100" dirty="0">
                         <a:latin typeface="Calibri" charset="0"/>
@@ -4562,7 +5491,7 @@
                       </a:endParaRPr>
                     </a:p>
                   </a:txBody>
-                  <a:tcPr marL="91440" marR="91440" marT="45720" marB="45720" anchor="ctr">
+                  <a:tcPr marL="38100" marR="12700" marT="12700" marB="12700" anchor="ctr">
                     <a:lnL w="6350" cap="flat" cmpd="sng" algn="ctr">
                       <a:solidFill>
                         <a:srgbClr val="DDDDDD"/>
@@ -4630,7 +5559,7 @@
                       </a:endParaRPr>
                     </a:p>
                   </a:txBody>
-                  <a:tcPr marL="91440" marR="91440" marT="45720" marB="45720" anchor="ctr">
+                  <a:tcPr marL="38100" marR="12700" marT="12700" marB="12700" anchor="ctr">
                     <a:lnL w="6350" cap="flat" cmpd="sng" algn="ctr">
                       <a:solidFill>
                         <a:srgbClr val="DDDDDD"/>
@@ -4689,7 +5618,7 @@
                           <a:ea typeface="Calibri" pitchFamily="34" charset="-122"/>
                           <a:cs typeface="Calibri" pitchFamily="34" charset="-120"/>
                         </a:rPr>
-                        <a:t>80</a:t>
+                        <a:t>3.9</a:t>
                       </a:r>
                       <a:endParaRPr lang="en-US" sz="1100" dirty="0">
                         <a:latin typeface="Calibri" charset="0"/>
@@ -4698,7 +5627,7 @@
                       </a:endParaRPr>
                     </a:p>
                   </a:txBody>
-                  <a:tcPr marL="91440" marR="91440" marT="45720" marB="45720" anchor="ctr">
+                  <a:tcPr marL="38100" marR="12700" marT="12700" marB="12700" anchor="ctr">
                     <a:lnL w="6350" cap="flat" cmpd="sng" algn="ctr">
                       <a:solidFill>
                         <a:srgbClr val="DDDDDD"/>
@@ -4757,7 +5686,7 @@
                           <a:ea typeface="Calibri" pitchFamily="34" charset="-122"/>
                           <a:cs typeface="Calibri" pitchFamily="34" charset="-120"/>
                         </a:rPr>
-                        <a:t>3.9</a:t>
+                        <a:t>72%</a:t>
                       </a:r>
                       <a:endParaRPr lang="en-US" sz="1100" dirty="0">
                         <a:latin typeface="Calibri" charset="0"/>
@@ -4766,75 +5695,7 @@
                       </a:endParaRPr>
                     </a:p>
                   </a:txBody>
-                  <a:tcPr marL="91440" marR="91440" marT="45720" marB="45720" anchor="ctr">
-                    <a:lnL w="6350" cap="flat" cmpd="sng" algn="ctr">
-                      <a:solidFill>
-                        <a:srgbClr val="DDDDDD"/>
-                      </a:solidFill>
-                      <a:prstDash val="solid"/>
-                      <a:round/>
-                      <a:headEnd type="none" w="med" len="med"/>
-                      <a:tailEnd type="none" w="med" len="med"/>
-                    </a:lnL>
-                    <a:lnR w="6350" cap="flat" cmpd="sng" algn="ctr">
-                      <a:solidFill>
-                        <a:srgbClr val="DDDDDD"/>
-                      </a:solidFill>
-                      <a:prstDash val="solid"/>
-                      <a:round/>
-                      <a:headEnd type="none" w="med" len="med"/>
-                      <a:tailEnd type="none" w="med" len="med"/>
-                    </a:lnR>
-                    <a:lnT w="6350" cap="flat" cmpd="sng" algn="ctr">
-                      <a:solidFill>
-                        <a:srgbClr val="DDDDDD"/>
-                      </a:solidFill>
-                      <a:prstDash val="solid"/>
-                      <a:round/>
-                      <a:headEnd type="none" w="med" len="med"/>
-                      <a:tailEnd type="none" w="med" len="med"/>
-                    </a:lnT>
-                    <a:lnB w="6350" cap="flat" cmpd="sng" algn="ctr">
-                      <a:solidFill>
-                        <a:srgbClr val="DDDDDD"/>
-                      </a:solidFill>
-                      <a:prstDash val="solid"/>
-                      <a:round/>
-                      <a:headEnd type="none" w="med" len="med"/>
-                      <a:tailEnd type="none" w="med" len="med"/>
-                    </a:lnB>
-                    <a:solidFill>
-                      <a:srgbClr val="FFFFFF"/>
-                    </a:solidFill>
-                  </a:tcPr>
-                </a:tc>
-                <a:tc>
-                  <a:txBody>
-                    <a:bodyPr/>
-                    <a:lstStyle/>
-                    <a:p>
-                      <a:pPr algn="ctr" indent="0" marL="0">
-                        <a:buNone/>
-                      </a:pPr>
-                      <a:r>
-                        <a:rPr lang="en-US" sz="1100" dirty="0">
-                          <a:solidFill>
-                            <a:srgbClr val="1F2A44"/>
-                          </a:solidFill>
-                          <a:latin typeface="Calibri" pitchFamily="34" charset="0"/>
-                          <a:ea typeface="Calibri" pitchFamily="34" charset="-122"/>
-                          <a:cs typeface="Calibri" pitchFamily="34" charset="-120"/>
-                        </a:rPr>
-                        <a:t>72%</a:t>
-                      </a:r>
-                      <a:endParaRPr lang="en-US" sz="1100" dirty="0">
-                        <a:latin typeface="Calibri" charset="0"/>
-                        <a:ea typeface="Calibri" charset="0"/>
-                        <a:cs typeface="Calibri" charset="0"/>
-                      </a:endParaRPr>
-                    </a:p>
-                  </a:txBody>
-                  <a:tcPr marL="91440" marR="91440" marT="45720" marB="45720" anchor="ctr">
+                  <a:tcPr marL="38100" marR="12700" marT="12700" marB="12700" anchor="ctr">
                     <a:lnL w="6350" cap="flat" cmpd="sng" algn="ctr">
                       <a:solidFill>
                         <a:srgbClr val="DDDDDD"/>
@@ -4883,6 +5744,74 @@
                     <a:bodyPr/>
                     <a:lstStyle/>
                     <a:p>
+                      <a:pPr algn="l" indent="0" marL="0">
+                        <a:buNone/>
+                      </a:pPr>
+                      <a:r>
+                        <a:rPr lang="en-US" sz="1100" dirty="0">
+                          <a:solidFill>
+                            <a:srgbClr val="1F2A44"/>
+                          </a:solidFill>
+                          <a:latin typeface="Calibri" pitchFamily="34" charset="0"/>
+                          <a:ea typeface="Calibri" pitchFamily="34" charset="-122"/>
+                          <a:cs typeface="Calibri" pitchFamily="34" charset="-120"/>
+                        </a:rPr>
+                        <a:t>Aug - 26</a:t>
+                      </a:r>
+                      <a:endParaRPr lang="en-US" sz="1100" dirty="0">
+                        <a:latin typeface="Calibri" charset="0"/>
+                        <a:ea typeface="Calibri" charset="0"/>
+                        <a:cs typeface="Calibri" charset="0"/>
+                      </a:endParaRPr>
+                    </a:p>
+                  </a:txBody>
+                  <a:tcPr marL="38100" marR="12700" marT="12700" marB="12700" anchor="ctr">
+                    <a:lnL w="6350" cap="flat" cmpd="sng" algn="ctr">
+                      <a:solidFill>
+                        <a:srgbClr val="DDDDDD"/>
+                      </a:solidFill>
+                      <a:prstDash val="solid"/>
+                      <a:round/>
+                      <a:headEnd type="none" w="med" len="med"/>
+                      <a:tailEnd type="none" w="med" len="med"/>
+                    </a:lnL>
+                    <a:lnR w="6350" cap="flat" cmpd="sng" algn="ctr">
+                      <a:solidFill>
+                        <a:srgbClr val="DDDDDD"/>
+                      </a:solidFill>
+                      <a:prstDash val="solid"/>
+                      <a:round/>
+                      <a:headEnd type="none" w="med" len="med"/>
+                      <a:tailEnd type="none" w="med" len="med"/>
+                    </a:lnR>
+                    <a:lnT w="6350" cap="flat" cmpd="sng" algn="ctr">
+                      <a:solidFill>
+                        <a:srgbClr val="DDDDDD"/>
+                      </a:solidFill>
+                      <a:prstDash val="solid"/>
+                      <a:round/>
+                      <a:headEnd type="none" w="med" len="med"/>
+                      <a:tailEnd type="none" w="med" len="med"/>
+                    </a:lnT>
+                    <a:lnB w="6350" cap="flat" cmpd="sng" algn="ctr">
+                      <a:solidFill>
+                        <a:srgbClr val="DDDDDD"/>
+                      </a:solidFill>
+                      <a:prstDash val="solid"/>
+                      <a:round/>
+                      <a:headEnd type="none" w="med" len="med"/>
+                      <a:tailEnd type="none" w="med" len="med"/>
+                    </a:lnB>
+                    <a:solidFill>
+                      <a:srgbClr val="FFFFFF"/>
+                    </a:solidFill>
+                  </a:tcPr>
+                </a:tc>
+                <a:tc>
+                  <a:txBody>
+                    <a:bodyPr/>
+                    <a:lstStyle/>
+                    <a:p>
                       <a:pPr algn="ctr" indent="0" marL="0">
                         <a:buNone/>
                       </a:pPr>
@@ -4895,7 +5824,7 @@
                           <a:ea typeface="Calibri" pitchFamily="34" charset="-122"/>
                           <a:cs typeface="Calibri" pitchFamily="34" charset="-120"/>
                         </a:rPr>
-                        <a:t>Aug - 26</a:t>
+                        <a:t>53</a:t>
                       </a:r>
                       <a:endParaRPr lang="en-US" sz="1100" dirty="0">
                         <a:latin typeface="Calibri" charset="0"/>
@@ -4904,7 +5833,7 @@
                       </a:endParaRPr>
                     </a:p>
                   </a:txBody>
-                  <a:tcPr marL="91440" marR="91440" marT="45720" marB="45720" anchor="ctr">
+                  <a:tcPr marL="38100" marR="12700" marT="12700" marB="12700" anchor="ctr">
                     <a:lnL w="6350" cap="flat" cmpd="sng" algn="ctr">
                       <a:solidFill>
                         <a:srgbClr val="DDDDDD"/>
@@ -4972,7 +5901,7 @@
                       </a:endParaRPr>
                     </a:p>
                   </a:txBody>
-                  <a:tcPr marL="91440" marR="91440" marT="45720" marB="45720" anchor="ctr">
+                  <a:tcPr marL="38100" marR="12700" marT="12700" marB="12700" anchor="ctr">
                     <a:lnL w="6350" cap="flat" cmpd="sng" algn="ctr">
                       <a:solidFill>
                         <a:srgbClr val="DDDDDD"/>
@@ -5031,7 +5960,7 @@
                           <a:ea typeface="Calibri" pitchFamily="34" charset="-122"/>
                           <a:cs typeface="Calibri" pitchFamily="34" charset="-120"/>
                         </a:rPr>
-                        <a:t>53</a:t>
+                        <a:t>4.1</a:t>
                       </a:r>
                       <a:endParaRPr lang="en-US" sz="1100" dirty="0">
                         <a:latin typeface="Calibri" charset="0"/>
@@ -5040,7 +5969,7 @@
                       </a:endParaRPr>
                     </a:p>
                   </a:txBody>
-                  <a:tcPr marL="91440" marR="91440" marT="45720" marB="45720" anchor="ctr">
+                  <a:tcPr marL="38100" marR="12700" marT="12700" marB="12700" anchor="ctr">
                     <a:lnL w="6350" cap="flat" cmpd="sng" algn="ctr">
                       <a:solidFill>
                         <a:srgbClr val="DDDDDD"/>
@@ -5099,7 +6028,7 @@
                           <a:ea typeface="Calibri" pitchFamily="34" charset="-122"/>
                           <a:cs typeface="Calibri" pitchFamily="34" charset="-120"/>
                         </a:rPr>
-                        <a:t>4.1</a:t>
+                        <a:t>68%</a:t>
                       </a:r>
                       <a:endParaRPr lang="en-US" sz="1100" dirty="0">
                         <a:latin typeface="Calibri" charset="0"/>
@@ -5108,75 +6037,7 @@
                       </a:endParaRPr>
                     </a:p>
                   </a:txBody>
-                  <a:tcPr marL="91440" marR="91440" marT="45720" marB="45720" anchor="ctr">
-                    <a:lnL w="6350" cap="flat" cmpd="sng" algn="ctr">
-                      <a:solidFill>
-                        <a:srgbClr val="DDDDDD"/>
-                      </a:solidFill>
-                      <a:prstDash val="solid"/>
-                      <a:round/>
-                      <a:headEnd type="none" w="med" len="med"/>
-                      <a:tailEnd type="none" w="med" len="med"/>
-                    </a:lnL>
-                    <a:lnR w="6350" cap="flat" cmpd="sng" algn="ctr">
-                      <a:solidFill>
-                        <a:srgbClr val="DDDDDD"/>
-                      </a:solidFill>
-                      <a:prstDash val="solid"/>
-                      <a:round/>
-                      <a:headEnd type="none" w="med" len="med"/>
-                      <a:tailEnd type="none" w="med" len="med"/>
-                    </a:lnR>
-                    <a:lnT w="6350" cap="flat" cmpd="sng" algn="ctr">
-                      <a:solidFill>
-                        <a:srgbClr val="DDDDDD"/>
-                      </a:solidFill>
-                      <a:prstDash val="solid"/>
-                      <a:round/>
-                      <a:headEnd type="none" w="med" len="med"/>
-                      <a:tailEnd type="none" w="med" len="med"/>
-                    </a:lnT>
-                    <a:lnB w="6350" cap="flat" cmpd="sng" algn="ctr">
-                      <a:solidFill>
-                        <a:srgbClr val="DDDDDD"/>
-                      </a:solidFill>
-                      <a:prstDash val="solid"/>
-                      <a:round/>
-                      <a:headEnd type="none" w="med" len="med"/>
-                      <a:tailEnd type="none" w="med" len="med"/>
-                    </a:lnB>
-                    <a:solidFill>
-                      <a:srgbClr val="FFFFFF"/>
-                    </a:solidFill>
-                  </a:tcPr>
-                </a:tc>
-                <a:tc>
-                  <a:txBody>
-                    <a:bodyPr/>
-                    <a:lstStyle/>
-                    <a:p>
-                      <a:pPr algn="ctr" indent="0" marL="0">
-                        <a:buNone/>
-                      </a:pPr>
-                      <a:r>
-                        <a:rPr lang="en-US" sz="1100" dirty="0">
-                          <a:solidFill>
-                            <a:srgbClr val="1F2A44"/>
-                          </a:solidFill>
-                          <a:latin typeface="Calibri" pitchFamily="34" charset="0"/>
-                          <a:ea typeface="Calibri" pitchFamily="34" charset="-122"/>
-                          <a:cs typeface="Calibri" pitchFamily="34" charset="-120"/>
-                        </a:rPr>
-                        <a:t>68%</a:t>
-                      </a:r>
-                      <a:endParaRPr lang="en-US" sz="1100" dirty="0">
-                        <a:latin typeface="Calibri" charset="0"/>
-                        <a:ea typeface="Calibri" charset="0"/>
-                        <a:cs typeface="Calibri" charset="0"/>
-                      </a:endParaRPr>
-                    </a:p>
-                  </a:txBody>
-                  <a:tcPr marL="91440" marR="91440" marT="45720" marB="45720" anchor="ctr">
+                  <a:tcPr marL="38100" marR="12700" marT="12700" marB="12700" anchor="ctr">
                     <a:lnL w="6350" cap="flat" cmpd="sng" algn="ctr">
                       <a:solidFill>
                         <a:srgbClr val="DDDDDD"/>
@@ -5225,6 +6086,74 @@
                     <a:bodyPr/>
                     <a:lstStyle/>
                     <a:p>
+                      <a:pPr algn="l" indent="0" marL="0">
+                        <a:buNone/>
+                      </a:pPr>
+                      <a:r>
+                        <a:rPr lang="en-US" sz="1100" b="1" dirty="0">
+                          <a:solidFill>
+                            <a:srgbClr val="1F2A44"/>
+                          </a:solidFill>
+                          <a:latin typeface="Calibri" pitchFamily="34" charset="0"/>
+                          <a:ea typeface="Calibri" pitchFamily="34" charset="-122"/>
+                          <a:cs typeface="Calibri" pitchFamily="34" charset="-120"/>
+                        </a:rPr>
+                        <a:t>Sep - 26</a:t>
+                      </a:r>
+                      <a:endParaRPr lang="en-US" sz="1100" dirty="0">
+                        <a:latin typeface="Calibri" charset="0"/>
+                        <a:ea typeface="Calibri" charset="0"/>
+                        <a:cs typeface="Calibri" charset="0"/>
+                      </a:endParaRPr>
+                    </a:p>
+                  </a:txBody>
+                  <a:tcPr marL="38100" marR="12700" marT="12700" marB="12700" anchor="ctr">
+                    <a:lnL w="6350" cap="flat" cmpd="sng" algn="ctr">
+                      <a:solidFill>
+                        <a:srgbClr val="DDDDDD"/>
+                      </a:solidFill>
+                      <a:prstDash val="solid"/>
+                      <a:round/>
+                      <a:headEnd type="none" w="med" len="med"/>
+                      <a:tailEnd type="none" w="med" len="med"/>
+                    </a:lnL>
+                    <a:lnR w="6350" cap="flat" cmpd="sng" algn="ctr">
+                      <a:solidFill>
+                        <a:srgbClr val="DDDDDD"/>
+                      </a:solidFill>
+                      <a:prstDash val="solid"/>
+                      <a:round/>
+                      <a:headEnd type="none" w="med" len="med"/>
+                      <a:tailEnd type="none" w="med" len="med"/>
+                    </a:lnR>
+                    <a:lnT w="6350" cap="flat" cmpd="sng" algn="ctr">
+                      <a:solidFill>
+                        <a:srgbClr val="DDDDDD"/>
+                      </a:solidFill>
+                      <a:prstDash val="solid"/>
+                      <a:round/>
+                      <a:headEnd type="none" w="med" len="med"/>
+                      <a:tailEnd type="none" w="med" len="med"/>
+                    </a:lnT>
+                    <a:lnB w="6350" cap="flat" cmpd="sng" algn="ctr">
+                      <a:solidFill>
+                        <a:srgbClr val="DDDDDD"/>
+                      </a:solidFill>
+                      <a:prstDash val="solid"/>
+                      <a:round/>
+                      <a:headEnd type="none" w="med" len="med"/>
+                      <a:tailEnd type="none" w="med" len="med"/>
+                    </a:lnB>
+                    <a:solidFill>
+                      <a:srgbClr val="E9F3EF"/>
+                    </a:solidFill>
+                  </a:tcPr>
+                </a:tc>
+                <a:tc>
+                  <a:txBody>
+                    <a:bodyPr/>
+                    <a:lstStyle/>
+                    <a:p>
                       <a:pPr algn="ctr" indent="0" marL="0">
                         <a:buNone/>
                       </a:pPr>
@@ -5237,7 +6166,7 @@
                           <a:ea typeface="Calibri" pitchFamily="34" charset="-122"/>
                           <a:cs typeface="Calibri" pitchFamily="34" charset="-120"/>
                         </a:rPr>
-                        <a:t>Sep - 26</a:t>
+                        <a:t>240</a:t>
                       </a:r>
                       <a:endParaRPr lang="en-US" sz="1100" dirty="0">
                         <a:latin typeface="Calibri" charset="0"/>
@@ -5246,7 +6175,7 @@
                       </a:endParaRPr>
                     </a:p>
                   </a:txBody>
-                  <a:tcPr marL="91440" marR="91440" marT="45720" marB="45720" anchor="ctr">
+                  <a:tcPr marL="38100" marR="12700" marT="12700" marB="12700" anchor="ctr">
                     <a:lnL w="6350" cap="flat" cmpd="sng" algn="ctr">
                       <a:solidFill>
                         <a:srgbClr val="DDDDDD"/>
@@ -5305,7 +6234,7 @@
                           <a:ea typeface="Calibri" pitchFamily="34" charset="-122"/>
                           <a:cs typeface="Calibri" pitchFamily="34" charset="-120"/>
                         </a:rPr>
-                        <a:t>240</a:t>
+                        <a:t>170</a:t>
                       </a:r>
                       <a:endParaRPr lang="en-US" sz="1100" dirty="0">
                         <a:latin typeface="Calibri" charset="0"/>
@@ -5314,7 +6243,7 @@
                       </a:endParaRPr>
                     </a:p>
                   </a:txBody>
-                  <a:tcPr marL="91440" marR="91440" marT="45720" marB="45720" anchor="ctr">
+                  <a:tcPr marL="38100" marR="12700" marT="12700" marB="12700" anchor="ctr">
                     <a:lnL w="6350" cap="flat" cmpd="sng" algn="ctr">
                       <a:solidFill>
                         <a:srgbClr val="DDDDDD"/>
@@ -5373,7 +6302,7 @@
                           <a:ea typeface="Calibri" pitchFamily="34" charset="-122"/>
                           <a:cs typeface="Calibri" pitchFamily="34" charset="-120"/>
                         </a:rPr>
-                        <a:t>170</a:t>
+                        <a:t>0.8</a:t>
                       </a:r>
                       <a:endParaRPr lang="en-US" sz="1100" dirty="0">
                         <a:latin typeface="Calibri" charset="0"/>
@@ -5382,7 +6311,7 @@
                       </a:endParaRPr>
                     </a:p>
                   </a:txBody>
-                  <a:tcPr marL="91440" marR="91440" marT="45720" marB="45720" anchor="ctr">
+                  <a:tcPr marL="38100" marR="12700" marT="12700" marB="12700" anchor="ctr">
                     <a:lnL w="6350" cap="flat" cmpd="sng" algn="ctr">
                       <a:solidFill>
                         <a:srgbClr val="DDDDDD"/>
@@ -5441,7 +6370,7 @@
                           <a:ea typeface="Calibri" pitchFamily="34" charset="-122"/>
                           <a:cs typeface="Calibri" pitchFamily="34" charset="-120"/>
                         </a:rPr>
-                        <a:t>0.8</a:t>
+                        <a:t>80%</a:t>
                       </a:r>
                       <a:endParaRPr lang="en-US" sz="1100" dirty="0">
                         <a:latin typeface="Calibri" charset="0"/>
@@ -5450,75 +6379,7 @@
                       </a:endParaRPr>
                     </a:p>
                   </a:txBody>
-                  <a:tcPr marL="91440" marR="91440" marT="45720" marB="45720" anchor="ctr">
-                    <a:lnL w="6350" cap="flat" cmpd="sng" algn="ctr">
-                      <a:solidFill>
-                        <a:srgbClr val="DDDDDD"/>
-                      </a:solidFill>
-                      <a:prstDash val="solid"/>
-                      <a:round/>
-                      <a:headEnd type="none" w="med" len="med"/>
-                      <a:tailEnd type="none" w="med" len="med"/>
-                    </a:lnL>
-                    <a:lnR w="6350" cap="flat" cmpd="sng" algn="ctr">
-                      <a:solidFill>
-                        <a:srgbClr val="DDDDDD"/>
-                      </a:solidFill>
-                      <a:prstDash val="solid"/>
-                      <a:round/>
-                      <a:headEnd type="none" w="med" len="med"/>
-                      <a:tailEnd type="none" w="med" len="med"/>
-                    </a:lnR>
-                    <a:lnT w="6350" cap="flat" cmpd="sng" algn="ctr">
-                      <a:solidFill>
-                        <a:srgbClr val="DDDDDD"/>
-                      </a:solidFill>
-                      <a:prstDash val="solid"/>
-                      <a:round/>
-                      <a:headEnd type="none" w="med" len="med"/>
-                      <a:tailEnd type="none" w="med" len="med"/>
-                    </a:lnT>
-                    <a:lnB w="6350" cap="flat" cmpd="sng" algn="ctr">
-                      <a:solidFill>
-                        <a:srgbClr val="DDDDDD"/>
-                      </a:solidFill>
-                      <a:prstDash val="solid"/>
-                      <a:round/>
-                      <a:headEnd type="none" w="med" len="med"/>
-                      <a:tailEnd type="none" w="med" len="med"/>
-                    </a:lnB>
-                    <a:solidFill>
-                      <a:srgbClr val="E9F3EF"/>
-                    </a:solidFill>
-                  </a:tcPr>
-                </a:tc>
-                <a:tc>
-                  <a:txBody>
-                    <a:bodyPr/>
-                    <a:lstStyle/>
-                    <a:p>
-                      <a:pPr algn="ctr" indent="0" marL="0">
-                        <a:buNone/>
-                      </a:pPr>
-                      <a:r>
-                        <a:rPr lang="en-US" sz="1100" b="1" dirty="0">
-                          <a:solidFill>
-                            <a:srgbClr val="1F2A44"/>
-                          </a:solidFill>
-                          <a:latin typeface="Calibri" pitchFamily="34" charset="0"/>
-                          <a:ea typeface="Calibri" pitchFamily="34" charset="-122"/>
-                          <a:cs typeface="Calibri" pitchFamily="34" charset="-120"/>
-                        </a:rPr>
-                        <a:t>80%</a:t>
-                      </a:r>
-                      <a:endParaRPr lang="en-US" sz="1100" dirty="0">
-                        <a:latin typeface="Calibri" charset="0"/>
-                        <a:ea typeface="Calibri" charset="0"/>
-                        <a:cs typeface="Calibri" charset="0"/>
-                      </a:endParaRPr>
-                    </a:p>
-                  </a:txBody>
-                  <a:tcPr marL="91440" marR="91440" marT="45720" marB="45720" anchor="ctr">
+                  <a:tcPr marL="38100" marR="12700" marT="12700" marB="12700" anchor="ctr">
                     <a:lnL w="6350" cap="flat" cmpd="sng" algn="ctr">
                       <a:solidFill>
                         <a:srgbClr val="DDDDDD"/>
@@ -5565,19 +6426,3837 @@
           </a:graphicData>
         </a:graphic>
       </p:graphicFrame>
+      <p:sp>
+        <p:nvSpPr>
+          <p:cNvPr id="19" name="Text 15"/>
+          <p:cNvSpPr txBox="1"/>
+          <p:nvPr/>
+        </p:nvSpPr>
+        <p:spPr>
+          <a:xfrm>
+            <a:off x="5394960" y="2377440"/>
+            <a:ext cx="3474720" cy="256032"/>
+          </a:xfrm>
+          <a:prstGeom prst="rect">
+            <a:avLst/>
+          </a:prstGeom>
+          <a:noFill/>
+          <a:ln/>
+        </p:spPr>
+        <p:txBody>
+          <a:bodyPr wrap="square" lIns="0" tIns="0" rIns="0" bIns="0" rtlCol="0" anchor="ctr"/>
+          <a:lstStyle/>
+          <a:p>
+            <a:pPr indent="0" marL="0">
+              <a:buNone/>
+            </a:pPr>
+            <a:r>
+              <a:rPr lang="en-US" sz="1200" b="1" dirty="0">
+                <a:solidFill>
+                  <a:srgbClr val="158158"/>
+                </a:solidFill>
+                <a:latin typeface="Calibri" pitchFamily="34" charset="0"/>
+                <a:ea typeface="Calibri" pitchFamily="34" charset="-122"/>
+                <a:cs typeface="Calibri" pitchFamily="34" charset="-120"/>
+              </a:rPr>
+              <a:t>Invoices by portal (platforms we use most)</a:t>
+            </a:r>
+            <a:endParaRPr lang="en-US" sz="1200" dirty="0"/>
+          </a:p>
+        </p:txBody>
+      </p:sp>
       <p:graphicFrame>
         <p:nvGraphicFramePr>
-          <p:cNvPr id="19" name="Chart 0" descr=""/>
-          <p:cNvGraphicFramePr/>
-          <p:nvPr/>
+          <p:cNvPr id="5" name="Table 1"/>
+          <p:cNvGraphicFramePr>
+            <a:graphicFrameLocks noGrp="1"/>
+          </p:cNvGraphicFramePr>
+          <p:nvPr>
+            <p:extLst>
+              <p:ext uri="{D42A27DB-BD31-4B8C-83A1-F6EECF244321}">
+                <p14:modId xmlns:p14="http://schemas.microsoft.com/office/powerpoint/2010/main" val="1579011935"/>
+              </p:ext>
+            </p:extLst>
+          </p:nvPr>
         </p:nvGraphicFramePr>
         <p:xfrm>
-          <a:off x="5394960" y="2468880"/>
-          <a:ext cx="3474720" cy="2331720"/>
+          <a:off x="5394960" y="2670048"/>
+          <a:ext cx="3474720" cy="914400"/>
         </p:xfrm>
-        <a:graphic xmlns:a="http://schemas.openxmlformats.org/drawingml/2006/main">
-          <a:graphicData uri="http://schemas.openxmlformats.org/drawingml/2006/chart">
-            <c:chart xmlns:c="http://schemas.openxmlformats.org/drawingml/2006/chart" r:id="rId2"/>
+        <a:graphic>
+          <a:graphicData uri="http://schemas.openxmlformats.org/drawingml/2006/table">
+            <a:tbl>
+              <a:tblPr/>
+              <a:tblGrid>
+                <a:gridCol w="1143000"/>
+                <a:gridCol w="548640"/>
+                <a:gridCol w="640080"/>
+                <a:gridCol w="548640"/>
+                <a:gridCol w="594360"/>
+              </a:tblGrid>
+              <a:tr h="214884">
+                <a:tc>
+                  <a:txBody>
+                    <a:bodyPr/>
+                    <a:lstStyle/>
+                    <a:p>
+                      <a:pPr algn="l" indent="0" marL="0">
+                        <a:buNone/>
+                      </a:pPr>
+                      <a:r>
+                        <a:rPr lang="en-US" sz="900" b="1" dirty="0">
+                          <a:solidFill>
+                            <a:srgbClr val="FFFFFF"/>
+                          </a:solidFill>
+                          <a:latin typeface="Calibri" pitchFamily="34" charset="0"/>
+                          <a:ea typeface="Calibri" pitchFamily="34" charset="-122"/>
+                          <a:cs typeface="Calibri" pitchFamily="34" charset="-120"/>
+                        </a:rPr>
+                        <a:t>Portal</a:t>
+                      </a:r>
+                      <a:endParaRPr lang="en-US" sz="900" dirty="0">
+                        <a:latin typeface="Calibri" charset="0"/>
+                        <a:ea typeface="Calibri" charset="0"/>
+                        <a:cs typeface="Calibri" charset="0"/>
+                      </a:endParaRPr>
+                    </a:p>
+                  </a:txBody>
+                  <a:tcPr marL="38100" marR="12700" marT="12700" marB="12700" anchor="ctr">
+                    <a:lnL w="6350" cap="flat" cmpd="sng" algn="ctr">
+                      <a:solidFill>
+                        <a:srgbClr val="DDDDDD"/>
+                      </a:solidFill>
+                      <a:prstDash val="solid"/>
+                      <a:round/>
+                      <a:headEnd type="none" w="med" len="med"/>
+                      <a:tailEnd type="none" w="med" len="med"/>
+                    </a:lnL>
+                    <a:lnR w="6350" cap="flat" cmpd="sng" algn="ctr">
+                      <a:solidFill>
+                        <a:srgbClr val="DDDDDD"/>
+                      </a:solidFill>
+                      <a:prstDash val="solid"/>
+                      <a:round/>
+                      <a:headEnd type="none" w="med" len="med"/>
+                      <a:tailEnd type="none" w="med" len="med"/>
+                    </a:lnR>
+                    <a:lnT w="6350" cap="flat" cmpd="sng" algn="ctr">
+                      <a:solidFill>
+                        <a:srgbClr val="DDDDDD"/>
+                      </a:solidFill>
+                      <a:prstDash val="solid"/>
+                      <a:round/>
+                      <a:headEnd type="none" w="med" len="med"/>
+                      <a:tailEnd type="none" w="med" len="med"/>
+                    </a:lnT>
+                    <a:lnB w="6350" cap="flat" cmpd="sng" algn="ctr">
+                      <a:solidFill>
+                        <a:srgbClr val="DDDDDD"/>
+                      </a:solidFill>
+                      <a:prstDash val="solid"/>
+                      <a:round/>
+                      <a:headEnd type="none" w="med" len="med"/>
+                      <a:tailEnd type="none" w="med" len="med"/>
+                    </a:lnB>
+                    <a:solidFill>
+                      <a:srgbClr val="158158"/>
+                    </a:solidFill>
+                  </a:tcPr>
+                </a:tc>
+                <a:tc>
+                  <a:txBody>
+                    <a:bodyPr/>
+                    <a:lstStyle/>
+                    <a:p>
+                      <a:pPr algn="ctr" indent="0" marL="0">
+                        <a:buNone/>
+                      </a:pPr>
+                      <a:r>
+                        <a:rPr lang="en-US" sz="900" b="1" dirty="0">
+                          <a:solidFill>
+                            <a:srgbClr val="FFFFFF"/>
+                          </a:solidFill>
+                          <a:latin typeface="Calibri" pitchFamily="34" charset="0"/>
+                          <a:ea typeface="Calibri" pitchFamily="34" charset="-122"/>
+                          <a:cs typeface="Calibri" pitchFamily="34" charset="-120"/>
+                        </a:rPr>
+                        <a:t># Upl.</a:t>
+                      </a:r>
+                      <a:endParaRPr lang="en-US" sz="900" dirty="0">
+                        <a:latin typeface="Calibri" charset="0"/>
+                        <a:ea typeface="Calibri" charset="0"/>
+                        <a:cs typeface="Calibri" charset="0"/>
+                      </a:endParaRPr>
+                    </a:p>
+                  </a:txBody>
+                  <a:tcPr marL="38100" marR="12700" marT="12700" marB="12700" anchor="ctr">
+                    <a:lnL w="6350" cap="flat" cmpd="sng" algn="ctr">
+                      <a:solidFill>
+                        <a:srgbClr val="DDDDDD"/>
+                      </a:solidFill>
+                      <a:prstDash val="solid"/>
+                      <a:round/>
+                      <a:headEnd type="none" w="med" len="med"/>
+                      <a:tailEnd type="none" w="med" len="med"/>
+                    </a:lnL>
+                    <a:lnR w="6350" cap="flat" cmpd="sng" algn="ctr">
+                      <a:solidFill>
+                        <a:srgbClr val="DDDDDD"/>
+                      </a:solidFill>
+                      <a:prstDash val="solid"/>
+                      <a:round/>
+                      <a:headEnd type="none" w="med" len="med"/>
+                      <a:tailEnd type="none" w="med" len="med"/>
+                    </a:lnR>
+                    <a:lnT w="6350" cap="flat" cmpd="sng" algn="ctr">
+                      <a:solidFill>
+                        <a:srgbClr val="DDDDDD"/>
+                      </a:solidFill>
+                      <a:prstDash val="solid"/>
+                      <a:round/>
+                      <a:headEnd type="none" w="med" len="med"/>
+                      <a:tailEnd type="none" w="med" len="med"/>
+                    </a:lnT>
+                    <a:lnB w="6350" cap="flat" cmpd="sng" algn="ctr">
+                      <a:solidFill>
+                        <a:srgbClr val="DDDDDD"/>
+                      </a:solidFill>
+                      <a:prstDash val="solid"/>
+                      <a:round/>
+                      <a:headEnd type="none" w="med" len="med"/>
+                      <a:tailEnd type="none" w="med" len="med"/>
+                    </a:lnB>
+                    <a:solidFill>
+                      <a:srgbClr val="158158"/>
+                    </a:solidFill>
+                  </a:tcPr>
+                </a:tc>
+                <a:tc>
+                  <a:txBody>
+                    <a:bodyPr/>
+                    <a:lstStyle/>
+                    <a:p>
+                      <a:pPr algn="ctr" indent="0" marL="0">
+                        <a:buNone/>
+                      </a:pPr>
+                      <a:r>
+                        <a:rPr lang="en-US" sz="900" b="1" dirty="0">
+                          <a:solidFill>
+                            <a:srgbClr val="FFFFFF"/>
+                          </a:solidFill>
+                          <a:latin typeface="Calibri" pitchFamily="34" charset="0"/>
+                          <a:ea typeface="Calibri" pitchFamily="34" charset="-122"/>
+                          <a:cs typeface="Calibri" pitchFamily="34" charset="-120"/>
+                        </a:rPr>
+                        <a:t>%</a:t>
+                      </a:r>
+                      <a:endParaRPr lang="en-US" sz="900" dirty="0">
+                        <a:latin typeface="Calibri" charset="0"/>
+                        <a:ea typeface="Calibri" charset="0"/>
+                        <a:cs typeface="Calibri" charset="0"/>
+                      </a:endParaRPr>
+                    </a:p>
+                  </a:txBody>
+                  <a:tcPr marL="38100" marR="12700" marT="12700" marB="12700" anchor="ctr">
+                    <a:lnL w="6350" cap="flat" cmpd="sng" algn="ctr">
+                      <a:solidFill>
+                        <a:srgbClr val="DDDDDD"/>
+                      </a:solidFill>
+                      <a:prstDash val="solid"/>
+                      <a:round/>
+                      <a:headEnd type="none" w="med" len="med"/>
+                      <a:tailEnd type="none" w="med" len="med"/>
+                    </a:lnL>
+                    <a:lnR w="6350" cap="flat" cmpd="sng" algn="ctr">
+                      <a:solidFill>
+                        <a:srgbClr val="DDDDDD"/>
+                      </a:solidFill>
+                      <a:prstDash val="solid"/>
+                      <a:round/>
+                      <a:headEnd type="none" w="med" len="med"/>
+                      <a:tailEnd type="none" w="med" len="med"/>
+                    </a:lnR>
+                    <a:lnT w="6350" cap="flat" cmpd="sng" algn="ctr">
+                      <a:solidFill>
+                        <a:srgbClr val="DDDDDD"/>
+                      </a:solidFill>
+                      <a:prstDash val="solid"/>
+                      <a:round/>
+                      <a:headEnd type="none" w="med" len="med"/>
+                      <a:tailEnd type="none" w="med" len="med"/>
+                    </a:lnT>
+                    <a:lnB w="6350" cap="flat" cmpd="sng" algn="ctr">
+                      <a:solidFill>
+                        <a:srgbClr val="DDDDDD"/>
+                      </a:solidFill>
+                      <a:prstDash val="solid"/>
+                      <a:round/>
+                      <a:headEnd type="none" w="med" len="med"/>
+                      <a:tailEnd type="none" w="med" len="med"/>
+                    </a:lnB>
+                    <a:solidFill>
+                      <a:srgbClr val="158158"/>
+                    </a:solidFill>
+                  </a:tcPr>
+                </a:tc>
+                <a:tc>
+                  <a:txBody>
+                    <a:bodyPr/>
+                    <a:lstStyle/>
+                    <a:p>
+                      <a:pPr algn="ctr" indent="0" marL="0">
+                        <a:buNone/>
+                      </a:pPr>
+                      <a:r>
+                        <a:rPr lang="en-US" sz="900" b="1" dirty="0">
+                          <a:solidFill>
+                            <a:srgbClr val="FFFFFF"/>
+                          </a:solidFill>
+                          <a:latin typeface="Calibri" pitchFamily="34" charset="0"/>
+                          <a:ea typeface="Calibri" pitchFamily="34" charset="-122"/>
+                          <a:cs typeface="Calibri" pitchFamily="34" charset="-120"/>
+                        </a:rPr>
+                        <a:t>Avg d</a:t>
+                      </a:r>
+                      <a:endParaRPr lang="en-US" sz="900" dirty="0">
+                        <a:latin typeface="Calibri" charset="0"/>
+                        <a:ea typeface="Calibri" charset="0"/>
+                        <a:cs typeface="Calibri" charset="0"/>
+                      </a:endParaRPr>
+                    </a:p>
+                  </a:txBody>
+                  <a:tcPr marL="38100" marR="12700" marT="12700" marB="12700" anchor="ctr">
+                    <a:lnL w="6350" cap="flat" cmpd="sng" algn="ctr">
+                      <a:solidFill>
+                        <a:srgbClr val="DDDDDD"/>
+                      </a:solidFill>
+                      <a:prstDash val="solid"/>
+                      <a:round/>
+                      <a:headEnd type="none" w="med" len="med"/>
+                      <a:tailEnd type="none" w="med" len="med"/>
+                    </a:lnL>
+                    <a:lnR w="6350" cap="flat" cmpd="sng" algn="ctr">
+                      <a:solidFill>
+                        <a:srgbClr val="DDDDDD"/>
+                      </a:solidFill>
+                      <a:prstDash val="solid"/>
+                      <a:round/>
+                      <a:headEnd type="none" w="med" len="med"/>
+                      <a:tailEnd type="none" w="med" len="med"/>
+                    </a:lnR>
+                    <a:lnT w="6350" cap="flat" cmpd="sng" algn="ctr">
+                      <a:solidFill>
+                        <a:srgbClr val="DDDDDD"/>
+                      </a:solidFill>
+                      <a:prstDash val="solid"/>
+                      <a:round/>
+                      <a:headEnd type="none" w="med" len="med"/>
+                      <a:tailEnd type="none" w="med" len="med"/>
+                    </a:lnT>
+                    <a:lnB w="6350" cap="flat" cmpd="sng" algn="ctr">
+                      <a:solidFill>
+                        <a:srgbClr val="DDDDDD"/>
+                      </a:solidFill>
+                      <a:prstDash val="solid"/>
+                      <a:round/>
+                      <a:headEnd type="none" w="med" len="med"/>
+                      <a:tailEnd type="none" w="med" len="med"/>
+                    </a:lnB>
+                    <a:solidFill>
+                      <a:srgbClr val="158158"/>
+                    </a:solidFill>
+                  </a:tcPr>
+                </a:tc>
+                <a:tc>
+                  <a:txBody>
+                    <a:bodyPr/>
+                    <a:lstStyle/>
+                    <a:p>
+                      <a:pPr algn="ctr" indent="0" marL="0">
+                        <a:buNone/>
+                      </a:pPr>
+                      <a:r>
+                        <a:rPr lang="en-US" sz="900" b="1" dirty="0">
+                          <a:solidFill>
+                            <a:srgbClr val="FFFFFF"/>
+                          </a:solidFill>
+                          <a:latin typeface="Calibri" pitchFamily="34" charset="0"/>
+                          <a:ea typeface="Calibri" pitchFamily="34" charset="-122"/>
+                          <a:cs typeface="Calibri" pitchFamily="34" charset="-120"/>
+                        </a:rPr>
+                        <a:t>% SD</a:t>
+                      </a:r>
+                      <a:endParaRPr lang="en-US" sz="900" dirty="0">
+                        <a:latin typeface="Calibri" charset="0"/>
+                        <a:ea typeface="Calibri" charset="0"/>
+                        <a:cs typeface="Calibri" charset="0"/>
+                      </a:endParaRPr>
+                    </a:p>
+                  </a:txBody>
+                  <a:tcPr marL="38100" marR="12700" marT="12700" marB="12700" anchor="ctr">
+                    <a:lnL w="6350" cap="flat" cmpd="sng" algn="ctr">
+                      <a:solidFill>
+                        <a:srgbClr val="DDDDDD"/>
+                      </a:solidFill>
+                      <a:prstDash val="solid"/>
+                      <a:round/>
+                      <a:headEnd type="none" w="med" len="med"/>
+                      <a:tailEnd type="none" w="med" len="med"/>
+                    </a:lnL>
+                    <a:lnR w="6350" cap="flat" cmpd="sng" algn="ctr">
+                      <a:solidFill>
+                        <a:srgbClr val="DDDDDD"/>
+                      </a:solidFill>
+                      <a:prstDash val="solid"/>
+                      <a:round/>
+                      <a:headEnd type="none" w="med" len="med"/>
+                      <a:tailEnd type="none" w="med" len="med"/>
+                    </a:lnR>
+                    <a:lnT w="6350" cap="flat" cmpd="sng" algn="ctr">
+                      <a:solidFill>
+                        <a:srgbClr val="DDDDDD"/>
+                      </a:solidFill>
+                      <a:prstDash val="solid"/>
+                      <a:round/>
+                      <a:headEnd type="none" w="med" len="med"/>
+                      <a:tailEnd type="none" w="med" len="med"/>
+                    </a:lnT>
+                    <a:lnB w="6350" cap="flat" cmpd="sng" algn="ctr">
+                      <a:solidFill>
+                        <a:srgbClr val="DDDDDD"/>
+                      </a:solidFill>
+                      <a:prstDash val="solid"/>
+                      <a:round/>
+                      <a:headEnd type="none" w="med" len="med"/>
+                      <a:tailEnd type="none" w="med" len="med"/>
+                    </a:lnB>
+                    <a:solidFill>
+                      <a:srgbClr val="158158"/>
+                    </a:solidFill>
+                  </a:tcPr>
+                </a:tc>
+              </a:tr>
+              <a:tr h="214884">
+                <a:tc>
+                  <a:txBody>
+                    <a:bodyPr/>
+                    <a:lstStyle/>
+                    <a:p>
+                      <a:pPr algn="l" indent="0" marL="0">
+                        <a:buNone/>
+                      </a:pPr>
+                      <a:r>
+                        <a:rPr lang="en-US" sz="900" dirty="0">
+                          <a:solidFill>
+                            <a:srgbClr val="1F2A44"/>
+                          </a:solidFill>
+                          <a:latin typeface="Calibri" pitchFamily="34" charset="0"/>
+                          <a:ea typeface="Calibri" pitchFamily="34" charset="-122"/>
+                          <a:cs typeface="Calibri" pitchFamily="34" charset="-120"/>
+                        </a:rPr>
+                        <a:t>Coupa</a:t>
+                      </a:r>
+                      <a:endParaRPr lang="en-US" sz="900" dirty="0">
+                        <a:latin typeface="Calibri" charset="0"/>
+                        <a:ea typeface="Calibri" charset="0"/>
+                        <a:cs typeface="Calibri" charset="0"/>
+                      </a:endParaRPr>
+                    </a:p>
+                  </a:txBody>
+                  <a:tcPr marL="38100" marR="12700" marT="12700" marB="12700" anchor="ctr">
+                    <a:lnL w="6350" cap="flat" cmpd="sng" algn="ctr">
+                      <a:solidFill>
+                        <a:srgbClr val="DDDDDD"/>
+                      </a:solidFill>
+                      <a:prstDash val="solid"/>
+                      <a:round/>
+                      <a:headEnd type="none" w="med" len="med"/>
+                      <a:tailEnd type="none" w="med" len="med"/>
+                    </a:lnL>
+                    <a:lnR w="6350" cap="flat" cmpd="sng" algn="ctr">
+                      <a:solidFill>
+                        <a:srgbClr val="DDDDDD"/>
+                      </a:solidFill>
+                      <a:prstDash val="solid"/>
+                      <a:round/>
+                      <a:headEnd type="none" w="med" len="med"/>
+                      <a:tailEnd type="none" w="med" len="med"/>
+                    </a:lnR>
+                    <a:lnT w="6350" cap="flat" cmpd="sng" algn="ctr">
+                      <a:solidFill>
+                        <a:srgbClr val="DDDDDD"/>
+                      </a:solidFill>
+                      <a:prstDash val="solid"/>
+                      <a:round/>
+                      <a:headEnd type="none" w="med" len="med"/>
+                      <a:tailEnd type="none" w="med" len="med"/>
+                    </a:lnT>
+                    <a:lnB w="6350" cap="flat" cmpd="sng" algn="ctr">
+                      <a:solidFill>
+                        <a:srgbClr val="DDDDDD"/>
+                      </a:solidFill>
+                      <a:prstDash val="solid"/>
+                      <a:round/>
+                      <a:headEnd type="none" w="med" len="med"/>
+                      <a:tailEnd type="none" w="med" len="med"/>
+                    </a:lnB>
+                    <a:solidFill>
+                      <a:srgbClr val="FFFFFF"/>
+                    </a:solidFill>
+                  </a:tcPr>
+                </a:tc>
+                <a:tc>
+                  <a:txBody>
+                    <a:bodyPr/>
+                    <a:lstStyle/>
+                    <a:p>
+                      <a:pPr algn="ctr" indent="0" marL="0">
+                        <a:buNone/>
+                      </a:pPr>
+                      <a:r>
+                        <a:rPr lang="en-US" sz="900" dirty="0">
+                          <a:solidFill>
+                            <a:srgbClr val="1F2A44"/>
+                          </a:solidFill>
+                          <a:latin typeface="Calibri" pitchFamily="34" charset="0"/>
+                          <a:ea typeface="Calibri" pitchFamily="34" charset="-122"/>
+                          <a:cs typeface="Calibri" pitchFamily="34" charset="-120"/>
+                        </a:rPr>
+                        <a:t>28</a:t>
+                      </a:r>
+                      <a:endParaRPr lang="en-US" sz="900" dirty="0">
+                        <a:latin typeface="Calibri" charset="0"/>
+                        <a:ea typeface="Calibri" charset="0"/>
+                        <a:cs typeface="Calibri" charset="0"/>
+                      </a:endParaRPr>
+                    </a:p>
+                  </a:txBody>
+                  <a:tcPr marL="38100" marR="12700" marT="12700" marB="12700" anchor="ctr">
+                    <a:lnL w="6350" cap="flat" cmpd="sng" algn="ctr">
+                      <a:solidFill>
+                        <a:srgbClr val="DDDDDD"/>
+                      </a:solidFill>
+                      <a:prstDash val="solid"/>
+                      <a:round/>
+                      <a:headEnd type="none" w="med" len="med"/>
+                      <a:tailEnd type="none" w="med" len="med"/>
+                    </a:lnL>
+                    <a:lnR w="6350" cap="flat" cmpd="sng" algn="ctr">
+                      <a:solidFill>
+                        <a:srgbClr val="DDDDDD"/>
+                      </a:solidFill>
+                      <a:prstDash val="solid"/>
+                      <a:round/>
+                      <a:headEnd type="none" w="med" len="med"/>
+                      <a:tailEnd type="none" w="med" len="med"/>
+                    </a:lnR>
+                    <a:lnT w="6350" cap="flat" cmpd="sng" algn="ctr">
+                      <a:solidFill>
+                        <a:srgbClr val="DDDDDD"/>
+                      </a:solidFill>
+                      <a:prstDash val="solid"/>
+                      <a:round/>
+                      <a:headEnd type="none" w="med" len="med"/>
+                      <a:tailEnd type="none" w="med" len="med"/>
+                    </a:lnT>
+                    <a:lnB w="6350" cap="flat" cmpd="sng" algn="ctr">
+                      <a:solidFill>
+                        <a:srgbClr val="DDDDDD"/>
+                      </a:solidFill>
+                      <a:prstDash val="solid"/>
+                      <a:round/>
+                      <a:headEnd type="none" w="med" len="med"/>
+                      <a:tailEnd type="none" w="med" len="med"/>
+                    </a:lnB>
+                    <a:solidFill>
+                      <a:srgbClr val="FFFFFF"/>
+                    </a:solidFill>
+                  </a:tcPr>
+                </a:tc>
+                <a:tc>
+                  <a:txBody>
+                    <a:bodyPr/>
+                    <a:lstStyle/>
+                    <a:p>
+                      <a:pPr algn="ctr" indent="0" marL="0">
+                        <a:buNone/>
+                      </a:pPr>
+                      <a:r>
+                        <a:rPr lang="en-US" sz="900" dirty="0">
+                          <a:solidFill>
+                            <a:srgbClr val="1F2A44"/>
+                          </a:solidFill>
+                          <a:latin typeface="Calibri" pitchFamily="34" charset="0"/>
+                          <a:ea typeface="Calibri" pitchFamily="34" charset="-122"/>
+                          <a:cs typeface="Calibri" pitchFamily="34" charset="-120"/>
+                        </a:rPr>
+                        <a:t>32.9%</a:t>
+                      </a:r>
+                      <a:endParaRPr lang="en-US" sz="900" dirty="0">
+                        <a:latin typeface="Calibri" charset="0"/>
+                        <a:ea typeface="Calibri" charset="0"/>
+                        <a:cs typeface="Calibri" charset="0"/>
+                      </a:endParaRPr>
+                    </a:p>
+                  </a:txBody>
+                  <a:tcPr marL="38100" marR="12700" marT="12700" marB="12700" anchor="ctr">
+                    <a:lnL w="6350" cap="flat" cmpd="sng" algn="ctr">
+                      <a:solidFill>
+                        <a:srgbClr val="DDDDDD"/>
+                      </a:solidFill>
+                      <a:prstDash val="solid"/>
+                      <a:round/>
+                      <a:headEnd type="none" w="med" len="med"/>
+                      <a:tailEnd type="none" w="med" len="med"/>
+                    </a:lnL>
+                    <a:lnR w="6350" cap="flat" cmpd="sng" algn="ctr">
+                      <a:solidFill>
+                        <a:srgbClr val="DDDDDD"/>
+                      </a:solidFill>
+                      <a:prstDash val="solid"/>
+                      <a:round/>
+                      <a:headEnd type="none" w="med" len="med"/>
+                      <a:tailEnd type="none" w="med" len="med"/>
+                    </a:lnR>
+                    <a:lnT w="6350" cap="flat" cmpd="sng" algn="ctr">
+                      <a:solidFill>
+                        <a:srgbClr val="DDDDDD"/>
+                      </a:solidFill>
+                      <a:prstDash val="solid"/>
+                      <a:round/>
+                      <a:headEnd type="none" w="med" len="med"/>
+                      <a:tailEnd type="none" w="med" len="med"/>
+                    </a:lnT>
+                    <a:lnB w="6350" cap="flat" cmpd="sng" algn="ctr">
+                      <a:solidFill>
+                        <a:srgbClr val="DDDDDD"/>
+                      </a:solidFill>
+                      <a:prstDash val="solid"/>
+                      <a:round/>
+                      <a:headEnd type="none" w="med" len="med"/>
+                      <a:tailEnd type="none" w="med" len="med"/>
+                    </a:lnB>
+                    <a:solidFill>
+                      <a:srgbClr val="FFFFFF"/>
+                    </a:solidFill>
+                  </a:tcPr>
+                </a:tc>
+                <a:tc>
+                  <a:txBody>
+                    <a:bodyPr/>
+                    <a:lstStyle/>
+                    <a:p>
+                      <a:pPr algn="ctr" indent="0" marL="0">
+                        <a:buNone/>
+                      </a:pPr>
+                      <a:r>
+                        <a:rPr lang="en-US" sz="900" dirty="0">
+                          <a:solidFill>
+                            <a:srgbClr val="1F2A44"/>
+                          </a:solidFill>
+                          <a:latin typeface="Calibri" pitchFamily="34" charset="0"/>
+                          <a:ea typeface="Calibri" pitchFamily="34" charset="-122"/>
+                          <a:cs typeface="Calibri" pitchFamily="34" charset="-120"/>
+                        </a:rPr>
+                        <a:t>0.3</a:t>
+                      </a:r>
+                      <a:endParaRPr lang="en-US" sz="900" dirty="0">
+                        <a:latin typeface="Calibri" charset="0"/>
+                        <a:ea typeface="Calibri" charset="0"/>
+                        <a:cs typeface="Calibri" charset="0"/>
+                      </a:endParaRPr>
+                    </a:p>
+                  </a:txBody>
+                  <a:tcPr marL="38100" marR="12700" marT="12700" marB="12700" anchor="ctr">
+                    <a:lnL w="6350" cap="flat" cmpd="sng" algn="ctr">
+                      <a:solidFill>
+                        <a:srgbClr val="DDDDDD"/>
+                      </a:solidFill>
+                      <a:prstDash val="solid"/>
+                      <a:round/>
+                      <a:headEnd type="none" w="med" len="med"/>
+                      <a:tailEnd type="none" w="med" len="med"/>
+                    </a:lnL>
+                    <a:lnR w="6350" cap="flat" cmpd="sng" algn="ctr">
+                      <a:solidFill>
+                        <a:srgbClr val="DDDDDD"/>
+                      </a:solidFill>
+                      <a:prstDash val="solid"/>
+                      <a:round/>
+                      <a:headEnd type="none" w="med" len="med"/>
+                      <a:tailEnd type="none" w="med" len="med"/>
+                    </a:lnR>
+                    <a:lnT w="6350" cap="flat" cmpd="sng" algn="ctr">
+                      <a:solidFill>
+                        <a:srgbClr val="DDDDDD"/>
+                      </a:solidFill>
+                      <a:prstDash val="solid"/>
+                      <a:round/>
+                      <a:headEnd type="none" w="med" len="med"/>
+                      <a:tailEnd type="none" w="med" len="med"/>
+                    </a:lnT>
+                    <a:lnB w="6350" cap="flat" cmpd="sng" algn="ctr">
+                      <a:solidFill>
+                        <a:srgbClr val="DDDDDD"/>
+                      </a:solidFill>
+                      <a:prstDash val="solid"/>
+                      <a:round/>
+                      <a:headEnd type="none" w="med" len="med"/>
+                      <a:tailEnd type="none" w="med" len="med"/>
+                    </a:lnB>
+                    <a:solidFill>
+                      <a:srgbClr val="FFFFFF"/>
+                    </a:solidFill>
+                  </a:tcPr>
+                </a:tc>
+                <a:tc>
+                  <a:txBody>
+                    <a:bodyPr/>
+                    <a:lstStyle/>
+                    <a:p>
+                      <a:pPr algn="ctr" indent="0" marL="0">
+                        <a:buNone/>
+                      </a:pPr>
+                      <a:r>
+                        <a:rPr lang="en-US" sz="900" dirty="0">
+                          <a:solidFill>
+                            <a:srgbClr val="1F2A44"/>
+                          </a:solidFill>
+                          <a:latin typeface="Calibri" pitchFamily="34" charset="0"/>
+                          <a:ea typeface="Calibri" pitchFamily="34" charset="-122"/>
+                          <a:cs typeface="Calibri" pitchFamily="34" charset="-120"/>
+                        </a:rPr>
+                        <a:t>92%</a:t>
+                      </a:r>
+                      <a:endParaRPr lang="en-US" sz="900" dirty="0">
+                        <a:latin typeface="Calibri" charset="0"/>
+                        <a:ea typeface="Calibri" charset="0"/>
+                        <a:cs typeface="Calibri" charset="0"/>
+                      </a:endParaRPr>
+                    </a:p>
+                  </a:txBody>
+                  <a:tcPr marL="38100" marR="12700" marT="12700" marB="12700" anchor="ctr">
+                    <a:lnL w="6350" cap="flat" cmpd="sng" algn="ctr">
+                      <a:solidFill>
+                        <a:srgbClr val="DDDDDD"/>
+                      </a:solidFill>
+                      <a:prstDash val="solid"/>
+                      <a:round/>
+                      <a:headEnd type="none" w="med" len="med"/>
+                      <a:tailEnd type="none" w="med" len="med"/>
+                    </a:lnL>
+                    <a:lnR w="6350" cap="flat" cmpd="sng" algn="ctr">
+                      <a:solidFill>
+                        <a:srgbClr val="DDDDDD"/>
+                      </a:solidFill>
+                      <a:prstDash val="solid"/>
+                      <a:round/>
+                      <a:headEnd type="none" w="med" len="med"/>
+                      <a:tailEnd type="none" w="med" len="med"/>
+                    </a:lnR>
+                    <a:lnT w="6350" cap="flat" cmpd="sng" algn="ctr">
+                      <a:solidFill>
+                        <a:srgbClr val="DDDDDD"/>
+                      </a:solidFill>
+                      <a:prstDash val="solid"/>
+                      <a:round/>
+                      <a:headEnd type="none" w="med" len="med"/>
+                      <a:tailEnd type="none" w="med" len="med"/>
+                    </a:lnT>
+                    <a:lnB w="6350" cap="flat" cmpd="sng" algn="ctr">
+                      <a:solidFill>
+                        <a:srgbClr val="DDDDDD"/>
+                      </a:solidFill>
+                      <a:prstDash val="solid"/>
+                      <a:round/>
+                      <a:headEnd type="none" w="med" len="med"/>
+                      <a:tailEnd type="none" w="med" len="med"/>
+                    </a:lnB>
+                    <a:solidFill>
+                      <a:srgbClr val="FFFFFF"/>
+                    </a:solidFill>
+                  </a:tcPr>
+                </a:tc>
+              </a:tr>
+              <a:tr h="214884">
+                <a:tc>
+                  <a:txBody>
+                    <a:bodyPr/>
+                    <a:lstStyle/>
+                    <a:p>
+                      <a:pPr algn="l" indent="0" marL="0">
+                        <a:buNone/>
+                      </a:pPr>
+                      <a:r>
+                        <a:rPr lang="en-US" sz="900" dirty="0">
+                          <a:solidFill>
+                            <a:srgbClr val="1F2A44"/>
+                          </a:solidFill>
+                          <a:latin typeface="Calibri" pitchFamily="34" charset="0"/>
+                          <a:ea typeface="Calibri" pitchFamily="34" charset="-122"/>
+                          <a:cs typeface="Calibri" pitchFamily="34" charset="-120"/>
+                        </a:rPr>
+                        <a:t>Ariba</a:t>
+                      </a:r>
+                      <a:endParaRPr lang="en-US" sz="900" dirty="0">
+                        <a:latin typeface="Calibri" charset="0"/>
+                        <a:ea typeface="Calibri" charset="0"/>
+                        <a:cs typeface="Calibri" charset="0"/>
+                      </a:endParaRPr>
+                    </a:p>
+                  </a:txBody>
+                  <a:tcPr marL="38100" marR="12700" marT="12700" marB="12700" anchor="ctr">
+                    <a:lnL w="6350" cap="flat" cmpd="sng" algn="ctr">
+                      <a:solidFill>
+                        <a:srgbClr val="DDDDDD"/>
+                      </a:solidFill>
+                      <a:prstDash val="solid"/>
+                      <a:round/>
+                      <a:headEnd type="none" w="med" len="med"/>
+                      <a:tailEnd type="none" w="med" len="med"/>
+                    </a:lnL>
+                    <a:lnR w="6350" cap="flat" cmpd="sng" algn="ctr">
+                      <a:solidFill>
+                        <a:srgbClr val="DDDDDD"/>
+                      </a:solidFill>
+                      <a:prstDash val="solid"/>
+                      <a:round/>
+                      <a:headEnd type="none" w="med" len="med"/>
+                      <a:tailEnd type="none" w="med" len="med"/>
+                    </a:lnR>
+                    <a:lnT w="6350" cap="flat" cmpd="sng" algn="ctr">
+                      <a:solidFill>
+                        <a:srgbClr val="DDDDDD"/>
+                      </a:solidFill>
+                      <a:prstDash val="solid"/>
+                      <a:round/>
+                      <a:headEnd type="none" w="med" len="med"/>
+                      <a:tailEnd type="none" w="med" len="med"/>
+                    </a:lnT>
+                    <a:lnB w="6350" cap="flat" cmpd="sng" algn="ctr">
+                      <a:solidFill>
+                        <a:srgbClr val="DDDDDD"/>
+                      </a:solidFill>
+                      <a:prstDash val="solid"/>
+                      <a:round/>
+                      <a:headEnd type="none" w="med" len="med"/>
+                      <a:tailEnd type="none" w="med" len="med"/>
+                    </a:lnB>
+                    <a:solidFill>
+                      <a:srgbClr val="FFFFFF"/>
+                    </a:solidFill>
+                  </a:tcPr>
+                </a:tc>
+                <a:tc>
+                  <a:txBody>
+                    <a:bodyPr/>
+                    <a:lstStyle/>
+                    <a:p>
+                      <a:pPr algn="ctr" indent="0" marL="0">
+                        <a:buNone/>
+                      </a:pPr>
+                      <a:r>
+                        <a:rPr lang="en-US" sz="900" dirty="0">
+                          <a:solidFill>
+                            <a:srgbClr val="1F2A44"/>
+                          </a:solidFill>
+                          <a:latin typeface="Calibri" pitchFamily="34" charset="0"/>
+                          <a:ea typeface="Calibri" pitchFamily="34" charset="-122"/>
+                          <a:cs typeface="Calibri" pitchFamily="34" charset="-120"/>
+                        </a:rPr>
+                        <a:t>18</a:t>
+                      </a:r>
+                      <a:endParaRPr lang="en-US" sz="900" dirty="0">
+                        <a:latin typeface="Calibri" charset="0"/>
+                        <a:ea typeface="Calibri" charset="0"/>
+                        <a:cs typeface="Calibri" charset="0"/>
+                      </a:endParaRPr>
+                    </a:p>
+                  </a:txBody>
+                  <a:tcPr marL="38100" marR="12700" marT="12700" marB="12700" anchor="ctr">
+                    <a:lnL w="6350" cap="flat" cmpd="sng" algn="ctr">
+                      <a:solidFill>
+                        <a:srgbClr val="DDDDDD"/>
+                      </a:solidFill>
+                      <a:prstDash val="solid"/>
+                      <a:round/>
+                      <a:headEnd type="none" w="med" len="med"/>
+                      <a:tailEnd type="none" w="med" len="med"/>
+                    </a:lnL>
+                    <a:lnR w="6350" cap="flat" cmpd="sng" algn="ctr">
+                      <a:solidFill>
+                        <a:srgbClr val="DDDDDD"/>
+                      </a:solidFill>
+                      <a:prstDash val="solid"/>
+                      <a:round/>
+                      <a:headEnd type="none" w="med" len="med"/>
+                      <a:tailEnd type="none" w="med" len="med"/>
+                    </a:lnR>
+                    <a:lnT w="6350" cap="flat" cmpd="sng" algn="ctr">
+                      <a:solidFill>
+                        <a:srgbClr val="DDDDDD"/>
+                      </a:solidFill>
+                      <a:prstDash val="solid"/>
+                      <a:round/>
+                      <a:headEnd type="none" w="med" len="med"/>
+                      <a:tailEnd type="none" w="med" len="med"/>
+                    </a:lnT>
+                    <a:lnB w="6350" cap="flat" cmpd="sng" algn="ctr">
+                      <a:solidFill>
+                        <a:srgbClr val="DDDDDD"/>
+                      </a:solidFill>
+                      <a:prstDash val="solid"/>
+                      <a:round/>
+                      <a:headEnd type="none" w="med" len="med"/>
+                      <a:tailEnd type="none" w="med" len="med"/>
+                    </a:lnB>
+                    <a:solidFill>
+                      <a:srgbClr val="FFFFFF"/>
+                    </a:solidFill>
+                  </a:tcPr>
+                </a:tc>
+                <a:tc>
+                  <a:txBody>
+                    <a:bodyPr/>
+                    <a:lstStyle/>
+                    <a:p>
+                      <a:pPr algn="ctr" indent="0" marL="0">
+                        <a:buNone/>
+                      </a:pPr>
+                      <a:r>
+                        <a:rPr lang="en-US" sz="900" dirty="0">
+                          <a:solidFill>
+                            <a:srgbClr val="1F2A44"/>
+                          </a:solidFill>
+                          <a:latin typeface="Calibri" pitchFamily="34" charset="0"/>
+                          <a:ea typeface="Calibri" pitchFamily="34" charset="-122"/>
+                          <a:cs typeface="Calibri" pitchFamily="34" charset="-120"/>
+                        </a:rPr>
+                        <a:t>21.2%</a:t>
+                      </a:r>
+                      <a:endParaRPr lang="en-US" sz="900" dirty="0">
+                        <a:latin typeface="Calibri" charset="0"/>
+                        <a:ea typeface="Calibri" charset="0"/>
+                        <a:cs typeface="Calibri" charset="0"/>
+                      </a:endParaRPr>
+                    </a:p>
+                  </a:txBody>
+                  <a:tcPr marL="38100" marR="12700" marT="12700" marB="12700" anchor="ctr">
+                    <a:lnL w="6350" cap="flat" cmpd="sng" algn="ctr">
+                      <a:solidFill>
+                        <a:srgbClr val="DDDDDD"/>
+                      </a:solidFill>
+                      <a:prstDash val="solid"/>
+                      <a:round/>
+                      <a:headEnd type="none" w="med" len="med"/>
+                      <a:tailEnd type="none" w="med" len="med"/>
+                    </a:lnL>
+                    <a:lnR w="6350" cap="flat" cmpd="sng" algn="ctr">
+                      <a:solidFill>
+                        <a:srgbClr val="DDDDDD"/>
+                      </a:solidFill>
+                      <a:prstDash val="solid"/>
+                      <a:round/>
+                      <a:headEnd type="none" w="med" len="med"/>
+                      <a:tailEnd type="none" w="med" len="med"/>
+                    </a:lnR>
+                    <a:lnT w="6350" cap="flat" cmpd="sng" algn="ctr">
+                      <a:solidFill>
+                        <a:srgbClr val="DDDDDD"/>
+                      </a:solidFill>
+                      <a:prstDash val="solid"/>
+                      <a:round/>
+                      <a:headEnd type="none" w="med" len="med"/>
+                      <a:tailEnd type="none" w="med" len="med"/>
+                    </a:lnT>
+                    <a:lnB w="6350" cap="flat" cmpd="sng" algn="ctr">
+                      <a:solidFill>
+                        <a:srgbClr val="DDDDDD"/>
+                      </a:solidFill>
+                      <a:prstDash val="solid"/>
+                      <a:round/>
+                      <a:headEnd type="none" w="med" len="med"/>
+                      <a:tailEnd type="none" w="med" len="med"/>
+                    </a:lnB>
+                    <a:solidFill>
+                      <a:srgbClr val="FFFFFF"/>
+                    </a:solidFill>
+                  </a:tcPr>
+                </a:tc>
+                <a:tc>
+                  <a:txBody>
+                    <a:bodyPr/>
+                    <a:lstStyle/>
+                    <a:p>
+                      <a:pPr algn="ctr" indent="0" marL="0">
+                        <a:buNone/>
+                      </a:pPr>
+                      <a:r>
+                        <a:rPr lang="en-US" sz="900" dirty="0">
+                          <a:solidFill>
+                            <a:srgbClr val="1F2A44"/>
+                          </a:solidFill>
+                          <a:latin typeface="Calibri" pitchFamily="34" charset="0"/>
+                          <a:ea typeface="Calibri" pitchFamily="34" charset="-122"/>
+                          <a:cs typeface="Calibri" pitchFamily="34" charset="-120"/>
+                        </a:rPr>
+                        <a:t>0.5</a:t>
+                      </a:r>
+                      <a:endParaRPr lang="en-US" sz="900" dirty="0">
+                        <a:latin typeface="Calibri" charset="0"/>
+                        <a:ea typeface="Calibri" charset="0"/>
+                        <a:cs typeface="Calibri" charset="0"/>
+                      </a:endParaRPr>
+                    </a:p>
+                  </a:txBody>
+                  <a:tcPr marL="38100" marR="12700" marT="12700" marB="12700" anchor="ctr">
+                    <a:lnL w="6350" cap="flat" cmpd="sng" algn="ctr">
+                      <a:solidFill>
+                        <a:srgbClr val="DDDDDD"/>
+                      </a:solidFill>
+                      <a:prstDash val="solid"/>
+                      <a:round/>
+                      <a:headEnd type="none" w="med" len="med"/>
+                      <a:tailEnd type="none" w="med" len="med"/>
+                    </a:lnL>
+                    <a:lnR w="6350" cap="flat" cmpd="sng" algn="ctr">
+                      <a:solidFill>
+                        <a:srgbClr val="DDDDDD"/>
+                      </a:solidFill>
+                      <a:prstDash val="solid"/>
+                      <a:round/>
+                      <a:headEnd type="none" w="med" len="med"/>
+                      <a:tailEnd type="none" w="med" len="med"/>
+                    </a:lnR>
+                    <a:lnT w="6350" cap="flat" cmpd="sng" algn="ctr">
+                      <a:solidFill>
+                        <a:srgbClr val="DDDDDD"/>
+                      </a:solidFill>
+                      <a:prstDash val="solid"/>
+                      <a:round/>
+                      <a:headEnd type="none" w="med" len="med"/>
+                      <a:tailEnd type="none" w="med" len="med"/>
+                    </a:lnT>
+                    <a:lnB w="6350" cap="flat" cmpd="sng" algn="ctr">
+                      <a:solidFill>
+                        <a:srgbClr val="DDDDDD"/>
+                      </a:solidFill>
+                      <a:prstDash val="solid"/>
+                      <a:round/>
+                      <a:headEnd type="none" w="med" len="med"/>
+                      <a:tailEnd type="none" w="med" len="med"/>
+                    </a:lnB>
+                    <a:solidFill>
+                      <a:srgbClr val="FFFFFF"/>
+                    </a:solidFill>
+                  </a:tcPr>
+                </a:tc>
+                <a:tc>
+                  <a:txBody>
+                    <a:bodyPr/>
+                    <a:lstStyle/>
+                    <a:p>
+                      <a:pPr algn="ctr" indent="0" marL="0">
+                        <a:buNone/>
+                      </a:pPr>
+                      <a:r>
+                        <a:rPr lang="en-US" sz="900" dirty="0">
+                          <a:solidFill>
+                            <a:srgbClr val="1F2A44"/>
+                          </a:solidFill>
+                          <a:latin typeface="Calibri" pitchFamily="34" charset="0"/>
+                          <a:ea typeface="Calibri" pitchFamily="34" charset="-122"/>
+                          <a:cs typeface="Calibri" pitchFamily="34" charset="-120"/>
+                        </a:rPr>
+                        <a:t>86%</a:t>
+                      </a:r>
+                      <a:endParaRPr lang="en-US" sz="900" dirty="0">
+                        <a:latin typeface="Calibri" charset="0"/>
+                        <a:ea typeface="Calibri" charset="0"/>
+                        <a:cs typeface="Calibri" charset="0"/>
+                      </a:endParaRPr>
+                    </a:p>
+                  </a:txBody>
+                  <a:tcPr marL="38100" marR="12700" marT="12700" marB="12700" anchor="ctr">
+                    <a:lnL w="6350" cap="flat" cmpd="sng" algn="ctr">
+                      <a:solidFill>
+                        <a:srgbClr val="DDDDDD"/>
+                      </a:solidFill>
+                      <a:prstDash val="solid"/>
+                      <a:round/>
+                      <a:headEnd type="none" w="med" len="med"/>
+                      <a:tailEnd type="none" w="med" len="med"/>
+                    </a:lnL>
+                    <a:lnR w="6350" cap="flat" cmpd="sng" algn="ctr">
+                      <a:solidFill>
+                        <a:srgbClr val="DDDDDD"/>
+                      </a:solidFill>
+                      <a:prstDash val="solid"/>
+                      <a:round/>
+                      <a:headEnd type="none" w="med" len="med"/>
+                      <a:tailEnd type="none" w="med" len="med"/>
+                    </a:lnR>
+                    <a:lnT w="6350" cap="flat" cmpd="sng" algn="ctr">
+                      <a:solidFill>
+                        <a:srgbClr val="DDDDDD"/>
+                      </a:solidFill>
+                      <a:prstDash val="solid"/>
+                      <a:round/>
+                      <a:headEnd type="none" w="med" len="med"/>
+                      <a:tailEnd type="none" w="med" len="med"/>
+                    </a:lnT>
+                    <a:lnB w="6350" cap="flat" cmpd="sng" algn="ctr">
+                      <a:solidFill>
+                        <a:srgbClr val="DDDDDD"/>
+                      </a:solidFill>
+                      <a:prstDash val="solid"/>
+                      <a:round/>
+                      <a:headEnd type="none" w="med" len="med"/>
+                      <a:tailEnd type="none" w="med" len="med"/>
+                    </a:lnB>
+                    <a:solidFill>
+                      <a:srgbClr val="FFFFFF"/>
+                    </a:solidFill>
+                  </a:tcPr>
+                </a:tc>
+              </a:tr>
+              <a:tr h="214884">
+                <a:tc>
+                  <a:txBody>
+                    <a:bodyPr/>
+                    <a:lstStyle/>
+                    <a:p>
+                      <a:pPr algn="l" indent="0" marL="0">
+                        <a:buNone/>
+                      </a:pPr>
+                      <a:r>
+                        <a:rPr lang="en-US" sz="900" dirty="0">
+                          <a:solidFill>
+                            <a:srgbClr val="1F2A44"/>
+                          </a:solidFill>
+                          <a:latin typeface="Calibri" pitchFamily="34" charset="0"/>
+                          <a:ea typeface="Calibri" pitchFamily="34" charset="-122"/>
+                          <a:cs typeface="Calibri" pitchFamily="34" charset="-120"/>
+                        </a:rPr>
+                        <a:t>Taulia</a:t>
+                      </a:r>
+                      <a:endParaRPr lang="en-US" sz="900" dirty="0">
+                        <a:latin typeface="Calibri" charset="0"/>
+                        <a:ea typeface="Calibri" charset="0"/>
+                        <a:cs typeface="Calibri" charset="0"/>
+                      </a:endParaRPr>
+                    </a:p>
+                  </a:txBody>
+                  <a:tcPr marL="38100" marR="12700" marT="12700" marB="12700" anchor="ctr">
+                    <a:lnL w="6350" cap="flat" cmpd="sng" algn="ctr">
+                      <a:solidFill>
+                        <a:srgbClr val="DDDDDD"/>
+                      </a:solidFill>
+                      <a:prstDash val="solid"/>
+                      <a:round/>
+                      <a:headEnd type="none" w="med" len="med"/>
+                      <a:tailEnd type="none" w="med" len="med"/>
+                    </a:lnL>
+                    <a:lnR w="6350" cap="flat" cmpd="sng" algn="ctr">
+                      <a:solidFill>
+                        <a:srgbClr val="DDDDDD"/>
+                      </a:solidFill>
+                      <a:prstDash val="solid"/>
+                      <a:round/>
+                      <a:headEnd type="none" w="med" len="med"/>
+                      <a:tailEnd type="none" w="med" len="med"/>
+                    </a:lnR>
+                    <a:lnT w="6350" cap="flat" cmpd="sng" algn="ctr">
+                      <a:solidFill>
+                        <a:srgbClr val="DDDDDD"/>
+                      </a:solidFill>
+                      <a:prstDash val="solid"/>
+                      <a:round/>
+                      <a:headEnd type="none" w="med" len="med"/>
+                      <a:tailEnd type="none" w="med" len="med"/>
+                    </a:lnT>
+                    <a:lnB w="6350" cap="flat" cmpd="sng" algn="ctr">
+                      <a:solidFill>
+                        <a:srgbClr val="DDDDDD"/>
+                      </a:solidFill>
+                      <a:prstDash val="solid"/>
+                      <a:round/>
+                      <a:headEnd type="none" w="med" len="med"/>
+                      <a:tailEnd type="none" w="med" len="med"/>
+                    </a:lnB>
+                    <a:solidFill>
+                      <a:srgbClr val="FFFFFF"/>
+                    </a:solidFill>
+                  </a:tcPr>
+                </a:tc>
+                <a:tc>
+                  <a:txBody>
+                    <a:bodyPr/>
+                    <a:lstStyle/>
+                    <a:p>
+                      <a:pPr algn="ctr" indent="0" marL="0">
+                        <a:buNone/>
+                      </a:pPr>
+                      <a:r>
+                        <a:rPr lang="en-US" sz="900" dirty="0">
+                          <a:solidFill>
+                            <a:srgbClr val="1F2A44"/>
+                          </a:solidFill>
+                          <a:latin typeface="Calibri" pitchFamily="34" charset="0"/>
+                          <a:ea typeface="Calibri" pitchFamily="34" charset="-122"/>
+                          <a:cs typeface="Calibri" pitchFamily="34" charset="-120"/>
+                        </a:rPr>
+                        <a:t>9</a:t>
+                      </a:r>
+                      <a:endParaRPr lang="en-US" sz="900" dirty="0">
+                        <a:latin typeface="Calibri" charset="0"/>
+                        <a:ea typeface="Calibri" charset="0"/>
+                        <a:cs typeface="Calibri" charset="0"/>
+                      </a:endParaRPr>
+                    </a:p>
+                  </a:txBody>
+                  <a:tcPr marL="38100" marR="12700" marT="12700" marB="12700" anchor="ctr">
+                    <a:lnL w="6350" cap="flat" cmpd="sng" algn="ctr">
+                      <a:solidFill>
+                        <a:srgbClr val="DDDDDD"/>
+                      </a:solidFill>
+                      <a:prstDash val="solid"/>
+                      <a:round/>
+                      <a:headEnd type="none" w="med" len="med"/>
+                      <a:tailEnd type="none" w="med" len="med"/>
+                    </a:lnL>
+                    <a:lnR w="6350" cap="flat" cmpd="sng" algn="ctr">
+                      <a:solidFill>
+                        <a:srgbClr val="DDDDDD"/>
+                      </a:solidFill>
+                      <a:prstDash val="solid"/>
+                      <a:round/>
+                      <a:headEnd type="none" w="med" len="med"/>
+                      <a:tailEnd type="none" w="med" len="med"/>
+                    </a:lnR>
+                    <a:lnT w="6350" cap="flat" cmpd="sng" algn="ctr">
+                      <a:solidFill>
+                        <a:srgbClr val="DDDDDD"/>
+                      </a:solidFill>
+                      <a:prstDash val="solid"/>
+                      <a:round/>
+                      <a:headEnd type="none" w="med" len="med"/>
+                      <a:tailEnd type="none" w="med" len="med"/>
+                    </a:lnT>
+                    <a:lnB w="6350" cap="flat" cmpd="sng" algn="ctr">
+                      <a:solidFill>
+                        <a:srgbClr val="DDDDDD"/>
+                      </a:solidFill>
+                      <a:prstDash val="solid"/>
+                      <a:round/>
+                      <a:headEnd type="none" w="med" len="med"/>
+                      <a:tailEnd type="none" w="med" len="med"/>
+                    </a:lnB>
+                    <a:solidFill>
+                      <a:srgbClr val="FFFFFF"/>
+                    </a:solidFill>
+                  </a:tcPr>
+                </a:tc>
+                <a:tc>
+                  <a:txBody>
+                    <a:bodyPr/>
+                    <a:lstStyle/>
+                    <a:p>
+                      <a:pPr algn="ctr" indent="0" marL="0">
+                        <a:buNone/>
+                      </a:pPr>
+                      <a:r>
+                        <a:rPr lang="en-US" sz="900" dirty="0">
+                          <a:solidFill>
+                            <a:srgbClr val="1F2A44"/>
+                          </a:solidFill>
+                          <a:latin typeface="Calibri" pitchFamily="34" charset="0"/>
+                          <a:ea typeface="Calibri" pitchFamily="34" charset="-122"/>
+                          <a:cs typeface="Calibri" pitchFamily="34" charset="-120"/>
+                        </a:rPr>
+                        <a:t>10.6%</a:t>
+                      </a:r>
+                      <a:endParaRPr lang="en-US" sz="900" dirty="0">
+                        <a:latin typeface="Calibri" charset="0"/>
+                        <a:ea typeface="Calibri" charset="0"/>
+                        <a:cs typeface="Calibri" charset="0"/>
+                      </a:endParaRPr>
+                    </a:p>
+                  </a:txBody>
+                  <a:tcPr marL="38100" marR="12700" marT="12700" marB="12700" anchor="ctr">
+                    <a:lnL w="6350" cap="flat" cmpd="sng" algn="ctr">
+                      <a:solidFill>
+                        <a:srgbClr val="DDDDDD"/>
+                      </a:solidFill>
+                      <a:prstDash val="solid"/>
+                      <a:round/>
+                      <a:headEnd type="none" w="med" len="med"/>
+                      <a:tailEnd type="none" w="med" len="med"/>
+                    </a:lnL>
+                    <a:lnR w="6350" cap="flat" cmpd="sng" algn="ctr">
+                      <a:solidFill>
+                        <a:srgbClr val="DDDDDD"/>
+                      </a:solidFill>
+                      <a:prstDash val="solid"/>
+                      <a:round/>
+                      <a:headEnd type="none" w="med" len="med"/>
+                      <a:tailEnd type="none" w="med" len="med"/>
+                    </a:lnR>
+                    <a:lnT w="6350" cap="flat" cmpd="sng" algn="ctr">
+                      <a:solidFill>
+                        <a:srgbClr val="DDDDDD"/>
+                      </a:solidFill>
+                      <a:prstDash val="solid"/>
+                      <a:round/>
+                      <a:headEnd type="none" w="med" len="med"/>
+                      <a:tailEnd type="none" w="med" len="med"/>
+                    </a:lnT>
+                    <a:lnB w="6350" cap="flat" cmpd="sng" algn="ctr">
+                      <a:solidFill>
+                        <a:srgbClr val="DDDDDD"/>
+                      </a:solidFill>
+                      <a:prstDash val="solid"/>
+                      <a:round/>
+                      <a:headEnd type="none" w="med" len="med"/>
+                      <a:tailEnd type="none" w="med" len="med"/>
+                    </a:lnB>
+                    <a:solidFill>
+                      <a:srgbClr val="FFFFFF"/>
+                    </a:solidFill>
+                  </a:tcPr>
+                </a:tc>
+                <a:tc>
+                  <a:txBody>
+                    <a:bodyPr/>
+                    <a:lstStyle/>
+                    <a:p>
+                      <a:pPr algn="ctr" indent="0" marL="0">
+                        <a:buNone/>
+                      </a:pPr>
+                      <a:r>
+                        <a:rPr lang="en-US" sz="900" dirty="0">
+                          <a:solidFill>
+                            <a:srgbClr val="1F2A44"/>
+                          </a:solidFill>
+                          <a:latin typeface="Calibri" pitchFamily="34" charset="0"/>
+                          <a:ea typeface="Calibri" pitchFamily="34" charset="-122"/>
+                          <a:cs typeface="Calibri" pitchFamily="34" charset="-120"/>
+                        </a:rPr>
+                        <a:t>0.4</a:t>
+                      </a:r>
+                      <a:endParaRPr lang="en-US" sz="900" dirty="0">
+                        <a:latin typeface="Calibri" charset="0"/>
+                        <a:ea typeface="Calibri" charset="0"/>
+                        <a:cs typeface="Calibri" charset="0"/>
+                      </a:endParaRPr>
+                    </a:p>
+                  </a:txBody>
+                  <a:tcPr marL="38100" marR="12700" marT="12700" marB="12700" anchor="ctr">
+                    <a:lnL w="6350" cap="flat" cmpd="sng" algn="ctr">
+                      <a:solidFill>
+                        <a:srgbClr val="DDDDDD"/>
+                      </a:solidFill>
+                      <a:prstDash val="solid"/>
+                      <a:round/>
+                      <a:headEnd type="none" w="med" len="med"/>
+                      <a:tailEnd type="none" w="med" len="med"/>
+                    </a:lnL>
+                    <a:lnR w="6350" cap="flat" cmpd="sng" algn="ctr">
+                      <a:solidFill>
+                        <a:srgbClr val="DDDDDD"/>
+                      </a:solidFill>
+                      <a:prstDash val="solid"/>
+                      <a:round/>
+                      <a:headEnd type="none" w="med" len="med"/>
+                      <a:tailEnd type="none" w="med" len="med"/>
+                    </a:lnR>
+                    <a:lnT w="6350" cap="flat" cmpd="sng" algn="ctr">
+                      <a:solidFill>
+                        <a:srgbClr val="DDDDDD"/>
+                      </a:solidFill>
+                      <a:prstDash val="solid"/>
+                      <a:round/>
+                      <a:headEnd type="none" w="med" len="med"/>
+                      <a:tailEnd type="none" w="med" len="med"/>
+                    </a:lnT>
+                    <a:lnB w="6350" cap="flat" cmpd="sng" algn="ctr">
+                      <a:solidFill>
+                        <a:srgbClr val="DDDDDD"/>
+                      </a:solidFill>
+                      <a:prstDash val="solid"/>
+                      <a:round/>
+                      <a:headEnd type="none" w="med" len="med"/>
+                      <a:tailEnd type="none" w="med" len="med"/>
+                    </a:lnB>
+                    <a:solidFill>
+                      <a:srgbClr val="FFFFFF"/>
+                    </a:solidFill>
+                  </a:tcPr>
+                </a:tc>
+                <a:tc>
+                  <a:txBody>
+                    <a:bodyPr/>
+                    <a:lstStyle/>
+                    <a:p>
+                      <a:pPr algn="ctr" indent="0" marL="0">
+                        <a:buNone/>
+                      </a:pPr>
+                      <a:r>
+                        <a:rPr lang="en-US" sz="900" dirty="0">
+                          <a:solidFill>
+                            <a:srgbClr val="1F2A44"/>
+                          </a:solidFill>
+                          <a:latin typeface="Calibri" pitchFamily="34" charset="0"/>
+                          <a:ea typeface="Calibri" pitchFamily="34" charset="-122"/>
+                          <a:cs typeface="Calibri" pitchFamily="34" charset="-120"/>
+                        </a:rPr>
+                        <a:t>78%</a:t>
+                      </a:r>
+                      <a:endParaRPr lang="en-US" sz="900" dirty="0">
+                        <a:latin typeface="Calibri" charset="0"/>
+                        <a:ea typeface="Calibri" charset="0"/>
+                        <a:cs typeface="Calibri" charset="0"/>
+                      </a:endParaRPr>
+                    </a:p>
+                  </a:txBody>
+                  <a:tcPr marL="38100" marR="12700" marT="12700" marB="12700" anchor="ctr">
+                    <a:lnL w="6350" cap="flat" cmpd="sng" algn="ctr">
+                      <a:solidFill>
+                        <a:srgbClr val="DDDDDD"/>
+                      </a:solidFill>
+                      <a:prstDash val="solid"/>
+                      <a:round/>
+                      <a:headEnd type="none" w="med" len="med"/>
+                      <a:tailEnd type="none" w="med" len="med"/>
+                    </a:lnL>
+                    <a:lnR w="6350" cap="flat" cmpd="sng" algn="ctr">
+                      <a:solidFill>
+                        <a:srgbClr val="DDDDDD"/>
+                      </a:solidFill>
+                      <a:prstDash val="solid"/>
+                      <a:round/>
+                      <a:headEnd type="none" w="med" len="med"/>
+                      <a:tailEnd type="none" w="med" len="med"/>
+                    </a:lnR>
+                    <a:lnT w="6350" cap="flat" cmpd="sng" algn="ctr">
+                      <a:solidFill>
+                        <a:srgbClr val="DDDDDD"/>
+                      </a:solidFill>
+                      <a:prstDash val="solid"/>
+                      <a:round/>
+                      <a:headEnd type="none" w="med" len="med"/>
+                      <a:tailEnd type="none" w="med" len="med"/>
+                    </a:lnT>
+                    <a:lnB w="6350" cap="flat" cmpd="sng" algn="ctr">
+                      <a:solidFill>
+                        <a:srgbClr val="DDDDDD"/>
+                      </a:solidFill>
+                      <a:prstDash val="solid"/>
+                      <a:round/>
+                      <a:headEnd type="none" w="med" len="med"/>
+                      <a:tailEnd type="none" w="med" len="med"/>
+                    </a:lnB>
+                    <a:solidFill>
+                      <a:srgbClr val="FFFFFF"/>
+                    </a:solidFill>
+                  </a:tcPr>
+                </a:tc>
+              </a:tr>
+              <a:tr h="214884">
+                <a:tc>
+                  <a:txBody>
+                    <a:bodyPr/>
+                    <a:lstStyle/>
+                    <a:p>
+                      <a:pPr algn="l" indent="0" marL="0">
+                        <a:buNone/>
+                      </a:pPr>
+                      <a:r>
+                        <a:rPr lang="en-US" sz="900" dirty="0">
+                          <a:solidFill>
+                            <a:srgbClr val="1F2A44"/>
+                          </a:solidFill>
+                          <a:latin typeface="Calibri" pitchFamily="34" charset="0"/>
+                          <a:ea typeface="Calibri" pitchFamily="34" charset="-122"/>
+                          <a:cs typeface="Calibri" pitchFamily="34" charset="-120"/>
+                        </a:rPr>
+                        <a:t>URL</a:t>
+                      </a:r>
+                      <a:endParaRPr lang="en-US" sz="900" dirty="0">
+                        <a:latin typeface="Calibri" charset="0"/>
+                        <a:ea typeface="Calibri" charset="0"/>
+                        <a:cs typeface="Calibri" charset="0"/>
+                      </a:endParaRPr>
+                    </a:p>
+                  </a:txBody>
+                  <a:tcPr marL="38100" marR="12700" marT="12700" marB="12700" anchor="ctr">
+                    <a:lnL w="6350" cap="flat" cmpd="sng" algn="ctr">
+                      <a:solidFill>
+                        <a:srgbClr val="DDDDDD"/>
+                      </a:solidFill>
+                      <a:prstDash val="solid"/>
+                      <a:round/>
+                      <a:headEnd type="none" w="med" len="med"/>
+                      <a:tailEnd type="none" w="med" len="med"/>
+                    </a:lnL>
+                    <a:lnR w="6350" cap="flat" cmpd="sng" algn="ctr">
+                      <a:solidFill>
+                        <a:srgbClr val="DDDDDD"/>
+                      </a:solidFill>
+                      <a:prstDash val="solid"/>
+                      <a:round/>
+                      <a:headEnd type="none" w="med" len="med"/>
+                      <a:tailEnd type="none" w="med" len="med"/>
+                    </a:lnR>
+                    <a:lnT w="6350" cap="flat" cmpd="sng" algn="ctr">
+                      <a:solidFill>
+                        <a:srgbClr val="DDDDDD"/>
+                      </a:solidFill>
+                      <a:prstDash val="solid"/>
+                      <a:round/>
+                      <a:headEnd type="none" w="med" len="med"/>
+                      <a:tailEnd type="none" w="med" len="med"/>
+                    </a:lnT>
+                    <a:lnB w="6350" cap="flat" cmpd="sng" algn="ctr">
+                      <a:solidFill>
+                        <a:srgbClr val="DDDDDD"/>
+                      </a:solidFill>
+                      <a:prstDash val="solid"/>
+                      <a:round/>
+                      <a:headEnd type="none" w="med" len="med"/>
+                      <a:tailEnd type="none" w="med" len="med"/>
+                    </a:lnB>
+                    <a:solidFill>
+                      <a:srgbClr val="FFFFFF"/>
+                    </a:solidFill>
+                  </a:tcPr>
+                </a:tc>
+                <a:tc>
+                  <a:txBody>
+                    <a:bodyPr/>
+                    <a:lstStyle/>
+                    <a:p>
+                      <a:pPr algn="ctr" indent="0" marL="0">
+                        <a:buNone/>
+                      </a:pPr>
+                      <a:r>
+                        <a:rPr lang="en-US" sz="900" dirty="0">
+                          <a:solidFill>
+                            <a:srgbClr val="1F2A44"/>
+                          </a:solidFill>
+                          <a:latin typeface="Calibri" pitchFamily="34" charset="0"/>
+                          <a:ea typeface="Calibri" pitchFamily="34" charset="-122"/>
+                          <a:cs typeface="Calibri" pitchFamily="34" charset="-120"/>
+                        </a:rPr>
+                        <a:t>6</a:t>
+                      </a:r>
+                      <a:endParaRPr lang="en-US" sz="900" dirty="0">
+                        <a:latin typeface="Calibri" charset="0"/>
+                        <a:ea typeface="Calibri" charset="0"/>
+                        <a:cs typeface="Calibri" charset="0"/>
+                      </a:endParaRPr>
+                    </a:p>
+                  </a:txBody>
+                  <a:tcPr marL="38100" marR="12700" marT="12700" marB="12700" anchor="ctr">
+                    <a:lnL w="6350" cap="flat" cmpd="sng" algn="ctr">
+                      <a:solidFill>
+                        <a:srgbClr val="DDDDDD"/>
+                      </a:solidFill>
+                      <a:prstDash val="solid"/>
+                      <a:round/>
+                      <a:headEnd type="none" w="med" len="med"/>
+                      <a:tailEnd type="none" w="med" len="med"/>
+                    </a:lnL>
+                    <a:lnR w="6350" cap="flat" cmpd="sng" algn="ctr">
+                      <a:solidFill>
+                        <a:srgbClr val="DDDDDD"/>
+                      </a:solidFill>
+                      <a:prstDash val="solid"/>
+                      <a:round/>
+                      <a:headEnd type="none" w="med" len="med"/>
+                      <a:tailEnd type="none" w="med" len="med"/>
+                    </a:lnR>
+                    <a:lnT w="6350" cap="flat" cmpd="sng" algn="ctr">
+                      <a:solidFill>
+                        <a:srgbClr val="DDDDDD"/>
+                      </a:solidFill>
+                      <a:prstDash val="solid"/>
+                      <a:round/>
+                      <a:headEnd type="none" w="med" len="med"/>
+                      <a:tailEnd type="none" w="med" len="med"/>
+                    </a:lnT>
+                    <a:lnB w="6350" cap="flat" cmpd="sng" algn="ctr">
+                      <a:solidFill>
+                        <a:srgbClr val="DDDDDD"/>
+                      </a:solidFill>
+                      <a:prstDash val="solid"/>
+                      <a:round/>
+                      <a:headEnd type="none" w="med" len="med"/>
+                      <a:tailEnd type="none" w="med" len="med"/>
+                    </a:lnB>
+                    <a:solidFill>
+                      <a:srgbClr val="FFFFFF"/>
+                    </a:solidFill>
+                  </a:tcPr>
+                </a:tc>
+                <a:tc>
+                  <a:txBody>
+                    <a:bodyPr/>
+                    <a:lstStyle/>
+                    <a:p>
+                      <a:pPr algn="ctr" indent="0" marL="0">
+                        <a:buNone/>
+                      </a:pPr>
+                      <a:r>
+                        <a:rPr lang="en-US" sz="900" dirty="0">
+                          <a:solidFill>
+                            <a:srgbClr val="1F2A44"/>
+                          </a:solidFill>
+                          <a:latin typeface="Calibri" pitchFamily="34" charset="0"/>
+                          <a:ea typeface="Calibri" pitchFamily="34" charset="-122"/>
+                          <a:cs typeface="Calibri" pitchFamily="34" charset="-120"/>
+                        </a:rPr>
+                        <a:t>7.1%</a:t>
+                      </a:r>
+                      <a:endParaRPr lang="en-US" sz="900" dirty="0">
+                        <a:latin typeface="Calibri" charset="0"/>
+                        <a:ea typeface="Calibri" charset="0"/>
+                        <a:cs typeface="Calibri" charset="0"/>
+                      </a:endParaRPr>
+                    </a:p>
+                  </a:txBody>
+                  <a:tcPr marL="38100" marR="12700" marT="12700" marB="12700" anchor="ctr">
+                    <a:lnL w="6350" cap="flat" cmpd="sng" algn="ctr">
+                      <a:solidFill>
+                        <a:srgbClr val="DDDDDD"/>
+                      </a:solidFill>
+                      <a:prstDash val="solid"/>
+                      <a:round/>
+                      <a:headEnd type="none" w="med" len="med"/>
+                      <a:tailEnd type="none" w="med" len="med"/>
+                    </a:lnL>
+                    <a:lnR w="6350" cap="flat" cmpd="sng" algn="ctr">
+                      <a:solidFill>
+                        <a:srgbClr val="DDDDDD"/>
+                      </a:solidFill>
+                      <a:prstDash val="solid"/>
+                      <a:round/>
+                      <a:headEnd type="none" w="med" len="med"/>
+                      <a:tailEnd type="none" w="med" len="med"/>
+                    </a:lnR>
+                    <a:lnT w="6350" cap="flat" cmpd="sng" algn="ctr">
+                      <a:solidFill>
+                        <a:srgbClr val="DDDDDD"/>
+                      </a:solidFill>
+                      <a:prstDash val="solid"/>
+                      <a:round/>
+                      <a:headEnd type="none" w="med" len="med"/>
+                      <a:tailEnd type="none" w="med" len="med"/>
+                    </a:lnT>
+                    <a:lnB w="6350" cap="flat" cmpd="sng" algn="ctr">
+                      <a:solidFill>
+                        <a:srgbClr val="DDDDDD"/>
+                      </a:solidFill>
+                      <a:prstDash val="solid"/>
+                      <a:round/>
+                      <a:headEnd type="none" w="med" len="med"/>
+                      <a:tailEnd type="none" w="med" len="med"/>
+                    </a:lnB>
+                    <a:solidFill>
+                      <a:srgbClr val="FFFFFF"/>
+                    </a:solidFill>
+                  </a:tcPr>
+                </a:tc>
+                <a:tc>
+                  <a:txBody>
+                    <a:bodyPr/>
+                    <a:lstStyle/>
+                    <a:p>
+                      <a:pPr algn="ctr" indent="0" marL="0">
+                        <a:buNone/>
+                      </a:pPr>
+                      <a:r>
+                        <a:rPr lang="en-US" sz="900" dirty="0">
+                          <a:solidFill>
+                            <a:srgbClr val="1F2A44"/>
+                          </a:solidFill>
+                          <a:latin typeface="Calibri" pitchFamily="34" charset="0"/>
+                          <a:ea typeface="Calibri" pitchFamily="34" charset="-122"/>
+                          <a:cs typeface="Calibri" pitchFamily="34" charset="-120"/>
+                        </a:rPr>
+                        <a:t>0.7</a:t>
+                      </a:r>
+                      <a:endParaRPr lang="en-US" sz="900" dirty="0">
+                        <a:latin typeface="Calibri" charset="0"/>
+                        <a:ea typeface="Calibri" charset="0"/>
+                        <a:cs typeface="Calibri" charset="0"/>
+                      </a:endParaRPr>
+                    </a:p>
+                  </a:txBody>
+                  <a:tcPr marL="38100" marR="12700" marT="12700" marB="12700" anchor="ctr">
+                    <a:lnL w="6350" cap="flat" cmpd="sng" algn="ctr">
+                      <a:solidFill>
+                        <a:srgbClr val="DDDDDD"/>
+                      </a:solidFill>
+                      <a:prstDash val="solid"/>
+                      <a:round/>
+                      <a:headEnd type="none" w="med" len="med"/>
+                      <a:tailEnd type="none" w="med" len="med"/>
+                    </a:lnL>
+                    <a:lnR w="6350" cap="flat" cmpd="sng" algn="ctr">
+                      <a:solidFill>
+                        <a:srgbClr val="DDDDDD"/>
+                      </a:solidFill>
+                      <a:prstDash val="solid"/>
+                      <a:round/>
+                      <a:headEnd type="none" w="med" len="med"/>
+                      <a:tailEnd type="none" w="med" len="med"/>
+                    </a:lnR>
+                    <a:lnT w="6350" cap="flat" cmpd="sng" algn="ctr">
+                      <a:solidFill>
+                        <a:srgbClr val="DDDDDD"/>
+                      </a:solidFill>
+                      <a:prstDash val="solid"/>
+                      <a:round/>
+                      <a:headEnd type="none" w="med" len="med"/>
+                      <a:tailEnd type="none" w="med" len="med"/>
+                    </a:lnT>
+                    <a:lnB w="6350" cap="flat" cmpd="sng" algn="ctr">
+                      <a:solidFill>
+                        <a:srgbClr val="DDDDDD"/>
+                      </a:solidFill>
+                      <a:prstDash val="solid"/>
+                      <a:round/>
+                      <a:headEnd type="none" w="med" len="med"/>
+                      <a:tailEnd type="none" w="med" len="med"/>
+                    </a:lnB>
+                    <a:solidFill>
+                      <a:srgbClr val="FFFFFF"/>
+                    </a:solidFill>
+                  </a:tcPr>
+                </a:tc>
+                <a:tc>
+                  <a:txBody>
+                    <a:bodyPr/>
+                    <a:lstStyle/>
+                    <a:p>
+                      <a:pPr algn="ctr" indent="0" marL="0">
+                        <a:buNone/>
+                      </a:pPr>
+                      <a:r>
+                        <a:rPr lang="en-US" sz="900" dirty="0">
+                          <a:solidFill>
+                            <a:srgbClr val="1F2A44"/>
+                          </a:solidFill>
+                          <a:latin typeface="Calibri" pitchFamily="34" charset="0"/>
+                          <a:ea typeface="Calibri" pitchFamily="34" charset="-122"/>
+                          <a:cs typeface="Calibri" pitchFamily="34" charset="-120"/>
+                        </a:rPr>
+                        <a:t>60%</a:t>
+                      </a:r>
+                      <a:endParaRPr lang="en-US" sz="900" dirty="0">
+                        <a:latin typeface="Calibri" charset="0"/>
+                        <a:ea typeface="Calibri" charset="0"/>
+                        <a:cs typeface="Calibri" charset="0"/>
+                      </a:endParaRPr>
+                    </a:p>
+                  </a:txBody>
+                  <a:tcPr marL="38100" marR="12700" marT="12700" marB="12700" anchor="ctr">
+                    <a:lnL w="6350" cap="flat" cmpd="sng" algn="ctr">
+                      <a:solidFill>
+                        <a:srgbClr val="DDDDDD"/>
+                      </a:solidFill>
+                      <a:prstDash val="solid"/>
+                      <a:round/>
+                      <a:headEnd type="none" w="med" len="med"/>
+                      <a:tailEnd type="none" w="med" len="med"/>
+                    </a:lnL>
+                    <a:lnR w="6350" cap="flat" cmpd="sng" algn="ctr">
+                      <a:solidFill>
+                        <a:srgbClr val="DDDDDD"/>
+                      </a:solidFill>
+                      <a:prstDash val="solid"/>
+                      <a:round/>
+                      <a:headEnd type="none" w="med" len="med"/>
+                      <a:tailEnd type="none" w="med" len="med"/>
+                    </a:lnR>
+                    <a:lnT w="6350" cap="flat" cmpd="sng" algn="ctr">
+                      <a:solidFill>
+                        <a:srgbClr val="DDDDDD"/>
+                      </a:solidFill>
+                      <a:prstDash val="solid"/>
+                      <a:round/>
+                      <a:headEnd type="none" w="med" len="med"/>
+                      <a:tailEnd type="none" w="med" len="med"/>
+                    </a:lnT>
+                    <a:lnB w="6350" cap="flat" cmpd="sng" algn="ctr">
+                      <a:solidFill>
+                        <a:srgbClr val="DDDDDD"/>
+                      </a:solidFill>
+                      <a:prstDash val="solid"/>
+                      <a:round/>
+                      <a:headEnd type="none" w="med" len="med"/>
+                      <a:tailEnd type="none" w="med" len="med"/>
+                    </a:lnB>
+                    <a:solidFill>
+                      <a:srgbClr val="FFFFFF"/>
+                    </a:solidFill>
+                  </a:tcPr>
+                </a:tc>
+              </a:tr>
+              <a:tr h="214884">
+                <a:tc>
+                  <a:txBody>
+                    <a:bodyPr/>
+                    <a:lstStyle/>
+                    <a:p>
+                      <a:pPr algn="l" indent="0" marL="0">
+                        <a:buNone/>
+                      </a:pPr>
+                      <a:r>
+                        <a:rPr lang="en-US" sz="900" dirty="0">
+                          <a:solidFill>
+                            <a:srgbClr val="1F2A44"/>
+                          </a:solidFill>
+                          <a:latin typeface="Calibri" pitchFamily="34" charset="0"/>
+                          <a:ea typeface="Calibri" pitchFamily="34" charset="-122"/>
+                          <a:cs typeface="Calibri" pitchFamily="34" charset="-120"/>
+                        </a:rPr>
+                        <a:t>Chorus Pro</a:t>
+                      </a:r>
+                      <a:endParaRPr lang="en-US" sz="900" dirty="0">
+                        <a:latin typeface="Calibri" charset="0"/>
+                        <a:ea typeface="Calibri" charset="0"/>
+                        <a:cs typeface="Calibri" charset="0"/>
+                      </a:endParaRPr>
+                    </a:p>
+                  </a:txBody>
+                  <a:tcPr marL="38100" marR="12700" marT="12700" marB="12700" anchor="ctr">
+                    <a:lnL w="6350" cap="flat" cmpd="sng" algn="ctr">
+                      <a:solidFill>
+                        <a:srgbClr val="DDDDDD"/>
+                      </a:solidFill>
+                      <a:prstDash val="solid"/>
+                      <a:round/>
+                      <a:headEnd type="none" w="med" len="med"/>
+                      <a:tailEnd type="none" w="med" len="med"/>
+                    </a:lnL>
+                    <a:lnR w="6350" cap="flat" cmpd="sng" algn="ctr">
+                      <a:solidFill>
+                        <a:srgbClr val="DDDDDD"/>
+                      </a:solidFill>
+                      <a:prstDash val="solid"/>
+                      <a:round/>
+                      <a:headEnd type="none" w="med" len="med"/>
+                      <a:tailEnd type="none" w="med" len="med"/>
+                    </a:lnR>
+                    <a:lnT w="6350" cap="flat" cmpd="sng" algn="ctr">
+                      <a:solidFill>
+                        <a:srgbClr val="DDDDDD"/>
+                      </a:solidFill>
+                      <a:prstDash val="solid"/>
+                      <a:round/>
+                      <a:headEnd type="none" w="med" len="med"/>
+                      <a:tailEnd type="none" w="med" len="med"/>
+                    </a:lnT>
+                    <a:lnB w="6350" cap="flat" cmpd="sng" algn="ctr">
+                      <a:solidFill>
+                        <a:srgbClr val="DDDDDD"/>
+                      </a:solidFill>
+                      <a:prstDash val="solid"/>
+                      <a:round/>
+                      <a:headEnd type="none" w="med" len="med"/>
+                      <a:tailEnd type="none" w="med" len="med"/>
+                    </a:lnB>
+                    <a:solidFill>
+                      <a:srgbClr val="FFFFFF"/>
+                    </a:solidFill>
+                  </a:tcPr>
+                </a:tc>
+                <a:tc>
+                  <a:txBody>
+                    <a:bodyPr/>
+                    <a:lstStyle/>
+                    <a:p>
+                      <a:pPr algn="ctr" indent="0" marL="0">
+                        <a:buNone/>
+                      </a:pPr>
+                      <a:r>
+                        <a:rPr lang="en-US" sz="900" dirty="0">
+                          <a:solidFill>
+                            <a:srgbClr val="1F2A44"/>
+                          </a:solidFill>
+                          <a:latin typeface="Calibri" pitchFamily="34" charset="0"/>
+                          <a:ea typeface="Calibri" pitchFamily="34" charset="-122"/>
+                          <a:cs typeface="Calibri" pitchFamily="34" charset="-120"/>
+                        </a:rPr>
+                        <a:t>5</a:t>
+                      </a:r>
+                      <a:endParaRPr lang="en-US" sz="900" dirty="0">
+                        <a:latin typeface="Calibri" charset="0"/>
+                        <a:ea typeface="Calibri" charset="0"/>
+                        <a:cs typeface="Calibri" charset="0"/>
+                      </a:endParaRPr>
+                    </a:p>
+                  </a:txBody>
+                  <a:tcPr marL="38100" marR="12700" marT="12700" marB="12700" anchor="ctr">
+                    <a:lnL w="6350" cap="flat" cmpd="sng" algn="ctr">
+                      <a:solidFill>
+                        <a:srgbClr val="DDDDDD"/>
+                      </a:solidFill>
+                      <a:prstDash val="solid"/>
+                      <a:round/>
+                      <a:headEnd type="none" w="med" len="med"/>
+                      <a:tailEnd type="none" w="med" len="med"/>
+                    </a:lnL>
+                    <a:lnR w="6350" cap="flat" cmpd="sng" algn="ctr">
+                      <a:solidFill>
+                        <a:srgbClr val="DDDDDD"/>
+                      </a:solidFill>
+                      <a:prstDash val="solid"/>
+                      <a:round/>
+                      <a:headEnd type="none" w="med" len="med"/>
+                      <a:tailEnd type="none" w="med" len="med"/>
+                    </a:lnR>
+                    <a:lnT w="6350" cap="flat" cmpd="sng" algn="ctr">
+                      <a:solidFill>
+                        <a:srgbClr val="DDDDDD"/>
+                      </a:solidFill>
+                      <a:prstDash val="solid"/>
+                      <a:round/>
+                      <a:headEnd type="none" w="med" len="med"/>
+                      <a:tailEnd type="none" w="med" len="med"/>
+                    </a:lnT>
+                    <a:lnB w="6350" cap="flat" cmpd="sng" algn="ctr">
+                      <a:solidFill>
+                        <a:srgbClr val="DDDDDD"/>
+                      </a:solidFill>
+                      <a:prstDash val="solid"/>
+                      <a:round/>
+                      <a:headEnd type="none" w="med" len="med"/>
+                      <a:tailEnd type="none" w="med" len="med"/>
+                    </a:lnB>
+                    <a:solidFill>
+                      <a:srgbClr val="FFFFFF"/>
+                    </a:solidFill>
+                  </a:tcPr>
+                </a:tc>
+                <a:tc>
+                  <a:txBody>
+                    <a:bodyPr/>
+                    <a:lstStyle/>
+                    <a:p>
+                      <a:pPr algn="ctr" indent="0" marL="0">
+                        <a:buNone/>
+                      </a:pPr>
+                      <a:r>
+                        <a:rPr lang="en-US" sz="900" dirty="0">
+                          <a:solidFill>
+                            <a:srgbClr val="1F2A44"/>
+                          </a:solidFill>
+                          <a:latin typeface="Calibri" pitchFamily="34" charset="0"/>
+                          <a:ea typeface="Calibri" pitchFamily="34" charset="-122"/>
+                          <a:cs typeface="Calibri" pitchFamily="34" charset="-120"/>
+                        </a:rPr>
+                        <a:t>5.9%</a:t>
+                      </a:r>
+                      <a:endParaRPr lang="en-US" sz="900" dirty="0">
+                        <a:latin typeface="Calibri" charset="0"/>
+                        <a:ea typeface="Calibri" charset="0"/>
+                        <a:cs typeface="Calibri" charset="0"/>
+                      </a:endParaRPr>
+                    </a:p>
+                  </a:txBody>
+                  <a:tcPr marL="38100" marR="12700" marT="12700" marB="12700" anchor="ctr">
+                    <a:lnL w="6350" cap="flat" cmpd="sng" algn="ctr">
+                      <a:solidFill>
+                        <a:srgbClr val="DDDDDD"/>
+                      </a:solidFill>
+                      <a:prstDash val="solid"/>
+                      <a:round/>
+                      <a:headEnd type="none" w="med" len="med"/>
+                      <a:tailEnd type="none" w="med" len="med"/>
+                    </a:lnL>
+                    <a:lnR w="6350" cap="flat" cmpd="sng" algn="ctr">
+                      <a:solidFill>
+                        <a:srgbClr val="DDDDDD"/>
+                      </a:solidFill>
+                      <a:prstDash val="solid"/>
+                      <a:round/>
+                      <a:headEnd type="none" w="med" len="med"/>
+                      <a:tailEnd type="none" w="med" len="med"/>
+                    </a:lnR>
+                    <a:lnT w="6350" cap="flat" cmpd="sng" algn="ctr">
+                      <a:solidFill>
+                        <a:srgbClr val="DDDDDD"/>
+                      </a:solidFill>
+                      <a:prstDash val="solid"/>
+                      <a:round/>
+                      <a:headEnd type="none" w="med" len="med"/>
+                      <a:tailEnd type="none" w="med" len="med"/>
+                    </a:lnT>
+                    <a:lnB w="6350" cap="flat" cmpd="sng" algn="ctr">
+                      <a:solidFill>
+                        <a:srgbClr val="DDDDDD"/>
+                      </a:solidFill>
+                      <a:prstDash val="solid"/>
+                      <a:round/>
+                      <a:headEnd type="none" w="med" len="med"/>
+                      <a:tailEnd type="none" w="med" len="med"/>
+                    </a:lnB>
+                    <a:solidFill>
+                      <a:srgbClr val="FFFFFF"/>
+                    </a:solidFill>
+                  </a:tcPr>
+                </a:tc>
+                <a:tc>
+                  <a:txBody>
+                    <a:bodyPr/>
+                    <a:lstStyle/>
+                    <a:p>
+                      <a:pPr algn="ctr" indent="0" marL="0">
+                        <a:buNone/>
+                      </a:pPr>
+                      <a:r>
+                        <a:rPr lang="en-US" sz="900" dirty="0">
+                          <a:solidFill>
+                            <a:srgbClr val="1F2A44"/>
+                          </a:solidFill>
+                          <a:latin typeface="Calibri" pitchFamily="34" charset="0"/>
+                          <a:ea typeface="Calibri" pitchFamily="34" charset="-122"/>
+                          <a:cs typeface="Calibri" pitchFamily="34" charset="-120"/>
+                        </a:rPr>
+                        <a:t>5.2</a:t>
+                      </a:r>
+                      <a:endParaRPr lang="en-US" sz="900" dirty="0">
+                        <a:latin typeface="Calibri" charset="0"/>
+                        <a:ea typeface="Calibri" charset="0"/>
+                        <a:cs typeface="Calibri" charset="0"/>
+                      </a:endParaRPr>
+                    </a:p>
+                  </a:txBody>
+                  <a:tcPr marL="38100" marR="12700" marT="12700" marB="12700" anchor="ctr">
+                    <a:lnL w="6350" cap="flat" cmpd="sng" algn="ctr">
+                      <a:solidFill>
+                        <a:srgbClr val="DDDDDD"/>
+                      </a:solidFill>
+                      <a:prstDash val="solid"/>
+                      <a:round/>
+                      <a:headEnd type="none" w="med" len="med"/>
+                      <a:tailEnd type="none" w="med" len="med"/>
+                    </a:lnL>
+                    <a:lnR w="6350" cap="flat" cmpd="sng" algn="ctr">
+                      <a:solidFill>
+                        <a:srgbClr val="DDDDDD"/>
+                      </a:solidFill>
+                      <a:prstDash val="solid"/>
+                      <a:round/>
+                      <a:headEnd type="none" w="med" len="med"/>
+                      <a:tailEnd type="none" w="med" len="med"/>
+                    </a:lnR>
+                    <a:lnT w="6350" cap="flat" cmpd="sng" algn="ctr">
+                      <a:solidFill>
+                        <a:srgbClr val="DDDDDD"/>
+                      </a:solidFill>
+                      <a:prstDash val="solid"/>
+                      <a:round/>
+                      <a:headEnd type="none" w="med" len="med"/>
+                      <a:tailEnd type="none" w="med" len="med"/>
+                    </a:lnT>
+                    <a:lnB w="6350" cap="flat" cmpd="sng" algn="ctr">
+                      <a:solidFill>
+                        <a:srgbClr val="DDDDDD"/>
+                      </a:solidFill>
+                      <a:prstDash val="solid"/>
+                      <a:round/>
+                      <a:headEnd type="none" w="med" len="med"/>
+                      <a:tailEnd type="none" w="med" len="med"/>
+                    </a:lnB>
+                    <a:solidFill>
+                      <a:srgbClr val="FFFFFF"/>
+                    </a:solidFill>
+                  </a:tcPr>
+                </a:tc>
+                <a:tc>
+                  <a:txBody>
+                    <a:bodyPr/>
+                    <a:lstStyle/>
+                    <a:p>
+                      <a:pPr algn="ctr" indent="0" marL="0">
+                        <a:buNone/>
+                      </a:pPr>
+                      <a:r>
+                        <a:rPr lang="en-US" sz="900" dirty="0">
+                          <a:solidFill>
+                            <a:srgbClr val="1F2A44"/>
+                          </a:solidFill>
+                          <a:latin typeface="Calibri" pitchFamily="34" charset="0"/>
+                          <a:ea typeface="Calibri" pitchFamily="34" charset="-122"/>
+                          <a:cs typeface="Calibri" pitchFamily="34" charset="-120"/>
+                        </a:rPr>
+                        <a:t>40%</a:t>
+                      </a:r>
+                      <a:endParaRPr lang="en-US" sz="900" dirty="0">
+                        <a:latin typeface="Calibri" charset="0"/>
+                        <a:ea typeface="Calibri" charset="0"/>
+                        <a:cs typeface="Calibri" charset="0"/>
+                      </a:endParaRPr>
+                    </a:p>
+                  </a:txBody>
+                  <a:tcPr marL="38100" marR="12700" marT="12700" marB="12700" anchor="ctr">
+                    <a:lnL w="6350" cap="flat" cmpd="sng" algn="ctr">
+                      <a:solidFill>
+                        <a:srgbClr val="DDDDDD"/>
+                      </a:solidFill>
+                      <a:prstDash val="solid"/>
+                      <a:round/>
+                      <a:headEnd type="none" w="med" len="med"/>
+                      <a:tailEnd type="none" w="med" len="med"/>
+                    </a:lnL>
+                    <a:lnR w="6350" cap="flat" cmpd="sng" algn="ctr">
+                      <a:solidFill>
+                        <a:srgbClr val="DDDDDD"/>
+                      </a:solidFill>
+                      <a:prstDash val="solid"/>
+                      <a:round/>
+                      <a:headEnd type="none" w="med" len="med"/>
+                      <a:tailEnd type="none" w="med" len="med"/>
+                    </a:lnR>
+                    <a:lnT w="6350" cap="flat" cmpd="sng" algn="ctr">
+                      <a:solidFill>
+                        <a:srgbClr val="DDDDDD"/>
+                      </a:solidFill>
+                      <a:prstDash val="solid"/>
+                      <a:round/>
+                      <a:headEnd type="none" w="med" len="med"/>
+                      <a:tailEnd type="none" w="med" len="med"/>
+                    </a:lnT>
+                    <a:lnB w="6350" cap="flat" cmpd="sng" algn="ctr">
+                      <a:solidFill>
+                        <a:srgbClr val="DDDDDD"/>
+                      </a:solidFill>
+                      <a:prstDash val="solid"/>
+                      <a:round/>
+                      <a:headEnd type="none" w="med" len="med"/>
+                      <a:tailEnd type="none" w="med" len="med"/>
+                    </a:lnB>
+                    <a:solidFill>
+                      <a:srgbClr val="FFFFFF"/>
+                    </a:solidFill>
+                  </a:tcPr>
+                </a:tc>
+              </a:tr>
+              <a:tr h="214884">
+                <a:tc>
+                  <a:txBody>
+                    <a:bodyPr/>
+                    <a:lstStyle/>
+                    <a:p>
+                      <a:pPr algn="l" indent="0" marL="0">
+                        <a:buNone/>
+                      </a:pPr>
+                      <a:r>
+                        <a:rPr lang="en-US" sz="900" dirty="0">
+                          <a:solidFill>
+                            <a:srgbClr val="1F2A44"/>
+                          </a:solidFill>
+                          <a:latin typeface="Calibri" pitchFamily="34" charset="0"/>
+                          <a:ea typeface="Calibri" pitchFamily="34" charset="-122"/>
+                          <a:cs typeface="Calibri" pitchFamily="34" charset="-120"/>
+                        </a:rPr>
+                        <a:t>Oracle</a:t>
+                      </a:r>
+                      <a:endParaRPr lang="en-US" sz="900" dirty="0">
+                        <a:latin typeface="Calibri" charset="0"/>
+                        <a:ea typeface="Calibri" charset="0"/>
+                        <a:cs typeface="Calibri" charset="0"/>
+                      </a:endParaRPr>
+                    </a:p>
+                  </a:txBody>
+                  <a:tcPr marL="38100" marR="12700" marT="12700" marB="12700" anchor="ctr">
+                    <a:lnL w="6350" cap="flat" cmpd="sng" algn="ctr">
+                      <a:solidFill>
+                        <a:srgbClr val="DDDDDD"/>
+                      </a:solidFill>
+                      <a:prstDash val="solid"/>
+                      <a:round/>
+                      <a:headEnd type="none" w="med" len="med"/>
+                      <a:tailEnd type="none" w="med" len="med"/>
+                    </a:lnL>
+                    <a:lnR w="6350" cap="flat" cmpd="sng" algn="ctr">
+                      <a:solidFill>
+                        <a:srgbClr val="DDDDDD"/>
+                      </a:solidFill>
+                      <a:prstDash val="solid"/>
+                      <a:round/>
+                      <a:headEnd type="none" w="med" len="med"/>
+                      <a:tailEnd type="none" w="med" len="med"/>
+                    </a:lnR>
+                    <a:lnT w="6350" cap="flat" cmpd="sng" algn="ctr">
+                      <a:solidFill>
+                        <a:srgbClr val="DDDDDD"/>
+                      </a:solidFill>
+                      <a:prstDash val="solid"/>
+                      <a:round/>
+                      <a:headEnd type="none" w="med" len="med"/>
+                      <a:tailEnd type="none" w="med" len="med"/>
+                    </a:lnT>
+                    <a:lnB w="6350" cap="flat" cmpd="sng" algn="ctr">
+                      <a:solidFill>
+                        <a:srgbClr val="DDDDDD"/>
+                      </a:solidFill>
+                      <a:prstDash val="solid"/>
+                      <a:round/>
+                      <a:headEnd type="none" w="med" len="med"/>
+                      <a:tailEnd type="none" w="med" len="med"/>
+                    </a:lnB>
+                    <a:solidFill>
+                      <a:srgbClr val="FFFFFF"/>
+                    </a:solidFill>
+                  </a:tcPr>
+                </a:tc>
+                <a:tc>
+                  <a:txBody>
+                    <a:bodyPr/>
+                    <a:lstStyle/>
+                    <a:p>
+                      <a:pPr algn="ctr" indent="0" marL="0">
+                        <a:buNone/>
+                      </a:pPr>
+                      <a:r>
+                        <a:rPr lang="en-US" sz="900" dirty="0">
+                          <a:solidFill>
+                            <a:srgbClr val="1F2A44"/>
+                          </a:solidFill>
+                          <a:latin typeface="Calibri" pitchFamily="34" charset="0"/>
+                          <a:ea typeface="Calibri" pitchFamily="34" charset="-122"/>
+                          <a:cs typeface="Calibri" pitchFamily="34" charset="-120"/>
+                        </a:rPr>
+                        <a:t>3</a:t>
+                      </a:r>
+                      <a:endParaRPr lang="en-US" sz="900" dirty="0">
+                        <a:latin typeface="Calibri" charset="0"/>
+                        <a:ea typeface="Calibri" charset="0"/>
+                        <a:cs typeface="Calibri" charset="0"/>
+                      </a:endParaRPr>
+                    </a:p>
+                  </a:txBody>
+                  <a:tcPr marL="38100" marR="12700" marT="12700" marB="12700" anchor="ctr">
+                    <a:lnL w="6350" cap="flat" cmpd="sng" algn="ctr">
+                      <a:solidFill>
+                        <a:srgbClr val="DDDDDD"/>
+                      </a:solidFill>
+                      <a:prstDash val="solid"/>
+                      <a:round/>
+                      <a:headEnd type="none" w="med" len="med"/>
+                      <a:tailEnd type="none" w="med" len="med"/>
+                    </a:lnL>
+                    <a:lnR w="6350" cap="flat" cmpd="sng" algn="ctr">
+                      <a:solidFill>
+                        <a:srgbClr val="DDDDDD"/>
+                      </a:solidFill>
+                      <a:prstDash val="solid"/>
+                      <a:round/>
+                      <a:headEnd type="none" w="med" len="med"/>
+                      <a:tailEnd type="none" w="med" len="med"/>
+                    </a:lnR>
+                    <a:lnT w="6350" cap="flat" cmpd="sng" algn="ctr">
+                      <a:solidFill>
+                        <a:srgbClr val="DDDDDD"/>
+                      </a:solidFill>
+                      <a:prstDash val="solid"/>
+                      <a:round/>
+                      <a:headEnd type="none" w="med" len="med"/>
+                      <a:tailEnd type="none" w="med" len="med"/>
+                    </a:lnT>
+                    <a:lnB w="6350" cap="flat" cmpd="sng" algn="ctr">
+                      <a:solidFill>
+                        <a:srgbClr val="DDDDDD"/>
+                      </a:solidFill>
+                      <a:prstDash val="solid"/>
+                      <a:round/>
+                      <a:headEnd type="none" w="med" len="med"/>
+                      <a:tailEnd type="none" w="med" len="med"/>
+                    </a:lnB>
+                    <a:solidFill>
+                      <a:srgbClr val="FFFFFF"/>
+                    </a:solidFill>
+                  </a:tcPr>
+                </a:tc>
+                <a:tc>
+                  <a:txBody>
+                    <a:bodyPr/>
+                    <a:lstStyle/>
+                    <a:p>
+                      <a:pPr algn="ctr" indent="0" marL="0">
+                        <a:buNone/>
+                      </a:pPr>
+                      <a:r>
+                        <a:rPr lang="en-US" sz="900" dirty="0">
+                          <a:solidFill>
+                            <a:srgbClr val="1F2A44"/>
+                          </a:solidFill>
+                          <a:latin typeface="Calibri" pitchFamily="34" charset="0"/>
+                          <a:ea typeface="Calibri" pitchFamily="34" charset="-122"/>
+                          <a:cs typeface="Calibri" pitchFamily="34" charset="-120"/>
+                        </a:rPr>
+                        <a:t>3.5%</a:t>
+                      </a:r>
+                      <a:endParaRPr lang="en-US" sz="900" dirty="0">
+                        <a:latin typeface="Calibri" charset="0"/>
+                        <a:ea typeface="Calibri" charset="0"/>
+                        <a:cs typeface="Calibri" charset="0"/>
+                      </a:endParaRPr>
+                    </a:p>
+                  </a:txBody>
+                  <a:tcPr marL="38100" marR="12700" marT="12700" marB="12700" anchor="ctr">
+                    <a:lnL w="6350" cap="flat" cmpd="sng" algn="ctr">
+                      <a:solidFill>
+                        <a:srgbClr val="DDDDDD"/>
+                      </a:solidFill>
+                      <a:prstDash val="solid"/>
+                      <a:round/>
+                      <a:headEnd type="none" w="med" len="med"/>
+                      <a:tailEnd type="none" w="med" len="med"/>
+                    </a:lnL>
+                    <a:lnR w="6350" cap="flat" cmpd="sng" algn="ctr">
+                      <a:solidFill>
+                        <a:srgbClr val="DDDDDD"/>
+                      </a:solidFill>
+                      <a:prstDash val="solid"/>
+                      <a:round/>
+                      <a:headEnd type="none" w="med" len="med"/>
+                      <a:tailEnd type="none" w="med" len="med"/>
+                    </a:lnR>
+                    <a:lnT w="6350" cap="flat" cmpd="sng" algn="ctr">
+                      <a:solidFill>
+                        <a:srgbClr val="DDDDDD"/>
+                      </a:solidFill>
+                      <a:prstDash val="solid"/>
+                      <a:round/>
+                      <a:headEnd type="none" w="med" len="med"/>
+                      <a:tailEnd type="none" w="med" len="med"/>
+                    </a:lnT>
+                    <a:lnB w="6350" cap="flat" cmpd="sng" algn="ctr">
+                      <a:solidFill>
+                        <a:srgbClr val="DDDDDD"/>
+                      </a:solidFill>
+                      <a:prstDash val="solid"/>
+                      <a:round/>
+                      <a:headEnd type="none" w="med" len="med"/>
+                      <a:tailEnd type="none" w="med" len="med"/>
+                    </a:lnB>
+                    <a:solidFill>
+                      <a:srgbClr val="FFFFFF"/>
+                    </a:solidFill>
+                  </a:tcPr>
+                </a:tc>
+                <a:tc>
+                  <a:txBody>
+                    <a:bodyPr/>
+                    <a:lstStyle/>
+                    <a:p>
+                      <a:pPr algn="ctr" indent="0" marL="0">
+                        <a:buNone/>
+                      </a:pPr>
+                      <a:r>
+                        <a:rPr lang="en-US" sz="900" dirty="0">
+                          <a:solidFill>
+                            <a:srgbClr val="1F2A44"/>
+                          </a:solidFill>
+                          <a:latin typeface="Calibri" pitchFamily="34" charset="0"/>
+                          <a:ea typeface="Calibri" pitchFamily="34" charset="-122"/>
+                          <a:cs typeface="Calibri" pitchFamily="34" charset="-120"/>
+                        </a:rPr>
+                        <a:t>0.6</a:t>
+                      </a:r>
+                      <a:endParaRPr lang="en-US" sz="900" dirty="0">
+                        <a:latin typeface="Calibri" charset="0"/>
+                        <a:ea typeface="Calibri" charset="0"/>
+                        <a:cs typeface="Calibri" charset="0"/>
+                      </a:endParaRPr>
+                    </a:p>
+                  </a:txBody>
+                  <a:tcPr marL="38100" marR="12700" marT="12700" marB="12700" anchor="ctr">
+                    <a:lnL w="6350" cap="flat" cmpd="sng" algn="ctr">
+                      <a:solidFill>
+                        <a:srgbClr val="DDDDDD"/>
+                      </a:solidFill>
+                      <a:prstDash val="solid"/>
+                      <a:round/>
+                      <a:headEnd type="none" w="med" len="med"/>
+                      <a:tailEnd type="none" w="med" len="med"/>
+                    </a:lnL>
+                    <a:lnR w="6350" cap="flat" cmpd="sng" algn="ctr">
+                      <a:solidFill>
+                        <a:srgbClr val="DDDDDD"/>
+                      </a:solidFill>
+                      <a:prstDash val="solid"/>
+                      <a:round/>
+                      <a:headEnd type="none" w="med" len="med"/>
+                      <a:tailEnd type="none" w="med" len="med"/>
+                    </a:lnR>
+                    <a:lnT w="6350" cap="flat" cmpd="sng" algn="ctr">
+                      <a:solidFill>
+                        <a:srgbClr val="DDDDDD"/>
+                      </a:solidFill>
+                      <a:prstDash val="solid"/>
+                      <a:round/>
+                      <a:headEnd type="none" w="med" len="med"/>
+                      <a:tailEnd type="none" w="med" len="med"/>
+                    </a:lnT>
+                    <a:lnB w="6350" cap="flat" cmpd="sng" algn="ctr">
+                      <a:solidFill>
+                        <a:srgbClr val="DDDDDD"/>
+                      </a:solidFill>
+                      <a:prstDash val="solid"/>
+                      <a:round/>
+                      <a:headEnd type="none" w="med" len="med"/>
+                      <a:tailEnd type="none" w="med" len="med"/>
+                    </a:lnB>
+                    <a:solidFill>
+                      <a:srgbClr val="FFFFFF"/>
+                    </a:solidFill>
+                  </a:tcPr>
+                </a:tc>
+                <a:tc>
+                  <a:txBody>
+                    <a:bodyPr/>
+                    <a:lstStyle/>
+                    <a:p>
+                      <a:pPr algn="ctr" indent="0" marL="0">
+                        <a:buNone/>
+                      </a:pPr>
+                      <a:r>
+                        <a:rPr lang="en-US" sz="900" dirty="0">
+                          <a:solidFill>
+                            <a:srgbClr val="1F2A44"/>
+                          </a:solidFill>
+                          <a:latin typeface="Calibri" pitchFamily="34" charset="0"/>
+                          <a:ea typeface="Calibri" pitchFamily="34" charset="-122"/>
+                          <a:cs typeface="Calibri" pitchFamily="34" charset="-120"/>
+                        </a:rPr>
+                        <a:t>100%</a:t>
+                      </a:r>
+                      <a:endParaRPr lang="en-US" sz="900" dirty="0">
+                        <a:latin typeface="Calibri" charset="0"/>
+                        <a:ea typeface="Calibri" charset="0"/>
+                        <a:cs typeface="Calibri" charset="0"/>
+                      </a:endParaRPr>
+                    </a:p>
+                  </a:txBody>
+                  <a:tcPr marL="38100" marR="12700" marT="12700" marB="12700" anchor="ctr">
+                    <a:lnL w="6350" cap="flat" cmpd="sng" algn="ctr">
+                      <a:solidFill>
+                        <a:srgbClr val="DDDDDD"/>
+                      </a:solidFill>
+                      <a:prstDash val="solid"/>
+                      <a:round/>
+                      <a:headEnd type="none" w="med" len="med"/>
+                      <a:tailEnd type="none" w="med" len="med"/>
+                    </a:lnL>
+                    <a:lnR w="6350" cap="flat" cmpd="sng" algn="ctr">
+                      <a:solidFill>
+                        <a:srgbClr val="DDDDDD"/>
+                      </a:solidFill>
+                      <a:prstDash val="solid"/>
+                      <a:round/>
+                      <a:headEnd type="none" w="med" len="med"/>
+                      <a:tailEnd type="none" w="med" len="med"/>
+                    </a:lnR>
+                    <a:lnT w="6350" cap="flat" cmpd="sng" algn="ctr">
+                      <a:solidFill>
+                        <a:srgbClr val="DDDDDD"/>
+                      </a:solidFill>
+                      <a:prstDash val="solid"/>
+                      <a:round/>
+                      <a:headEnd type="none" w="med" len="med"/>
+                      <a:tailEnd type="none" w="med" len="med"/>
+                    </a:lnT>
+                    <a:lnB w="6350" cap="flat" cmpd="sng" algn="ctr">
+                      <a:solidFill>
+                        <a:srgbClr val="DDDDDD"/>
+                      </a:solidFill>
+                      <a:prstDash val="solid"/>
+                      <a:round/>
+                      <a:headEnd type="none" w="med" len="med"/>
+                      <a:tailEnd type="none" w="med" len="med"/>
+                    </a:lnB>
+                    <a:solidFill>
+                      <a:srgbClr val="FFFFFF"/>
+                    </a:solidFill>
+                  </a:tcPr>
+                </a:tc>
+              </a:tr>
+              <a:tr h="214884">
+                <a:tc>
+                  <a:txBody>
+                    <a:bodyPr/>
+                    <a:lstStyle/>
+                    <a:p>
+                      <a:pPr algn="l" indent="0" marL="0">
+                        <a:buNone/>
+                      </a:pPr>
+                      <a:r>
+                        <a:rPr lang="en-US" sz="900" dirty="0">
+                          <a:solidFill>
+                            <a:srgbClr val="1F2A44"/>
+                          </a:solidFill>
+                          <a:latin typeface="Calibri" pitchFamily="34" charset="0"/>
+                          <a:ea typeface="Calibri" pitchFamily="34" charset="-122"/>
+                          <a:cs typeface="Calibri" pitchFamily="34" charset="-120"/>
+                        </a:rPr>
+                        <a:t>Ivalua</a:t>
+                      </a:r>
+                      <a:endParaRPr lang="en-US" sz="900" dirty="0">
+                        <a:latin typeface="Calibri" charset="0"/>
+                        <a:ea typeface="Calibri" charset="0"/>
+                        <a:cs typeface="Calibri" charset="0"/>
+                      </a:endParaRPr>
+                    </a:p>
+                  </a:txBody>
+                  <a:tcPr marL="38100" marR="12700" marT="12700" marB="12700" anchor="ctr">
+                    <a:lnL w="6350" cap="flat" cmpd="sng" algn="ctr">
+                      <a:solidFill>
+                        <a:srgbClr val="DDDDDD"/>
+                      </a:solidFill>
+                      <a:prstDash val="solid"/>
+                      <a:round/>
+                      <a:headEnd type="none" w="med" len="med"/>
+                      <a:tailEnd type="none" w="med" len="med"/>
+                    </a:lnL>
+                    <a:lnR w="6350" cap="flat" cmpd="sng" algn="ctr">
+                      <a:solidFill>
+                        <a:srgbClr val="DDDDDD"/>
+                      </a:solidFill>
+                      <a:prstDash val="solid"/>
+                      <a:round/>
+                      <a:headEnd type="none" w="med" len="med"/>
+                      <a:tailEnd type="none" w="med" len="med"/>
+                    </a:lnR>
+                    <a:lnT w="6350" cap="flat" cmpd="sng" algn="ctr">
+                      <a:solidFill>
+                        <a:srgbClr val="DDDDDD"/>
+                      </a:solidFill>
+                      <a:prstDash val="solid"/>
+                      <a:round/>
+                      <a:headEnd type="none" w="med" len="med"/>
+                      <a:tailEnd type="none" w="med" len="med"/>
+                    </a:lnT>
+                    <a:lnB w="6350" cap="flat" cmpd="sng" algn="ctr">
+                      <a:solidFill>
+                        <a:srgbClr val="DDDDDD"/>
+                      </a:solidFill>
+                      <a:prstDash val="solid"/>
+                      <a:round/>
+                      <a:headEnd type="none" w="med" len="med"/>
+                      <a:tailEnd type="none" w="med" len="med"/>
+                    </a:lnB>
+                    <a:solidFill>
+                      <a:srgbClr val="FFFFFF"/>
+                    </a:solidFill>
+                  </a:tcPr>
+                </a:tc>
+                <a:tc>
+                  <a:txBody>
+                    <a:bodyPr/>
+                    <a:lstStyle/>
+                    <a:p>
+                      <a:pPr algn="ctr" indent="0" marL="0">
+                        <a:buNone/>
+                      </a:pPr>
+                      <a:r>
+                        <a:rPr lang="en-US" sz="900" dirty="0">
+                          <a:solidFill>
+                            <a:srgbClr val="1F2A44"/>
+                          </a:solidFill>
+                          <a:latin typeface="Calibri" pitchFamily="34" charset="0"/>
+                          <a:ea typeface="Calibri" pitchFamily="34" charset="-122"/>
+                          <a:cs typeface="Calibri" pitchFamily="34" charset="-120"/>
+                        </a:rPr>
+                        <a:t>3</a:t>
+                      </a:r>
+                      <a:endParaRPr lang="en-US" sz="900" dirty="0">
+                        <a:latin typeface="Calibri" charset="0"/>
+                        <a:ea typeface="Calibri" charset="0"/>
+                        <a:cs typeface="Calibri" charset="0"/>
+                      </a:endParaRPr>
+                    </a:p>
+                  </a:txBody>
+                  <a:tcPr marL="38100" marR="12700" marT="12700" marB="12700" anchor="ctr">
+                    <a:lnL w="6350" cap="flat" cmpd="sng" algn="ctr">
+                      <a:solidFill>
+                        <a:srgbClr val="DDDDDD"/>
+                      </a:solidFill>
+                      <a:prstDash val="solid"/>
+                      <a:round/>
+                      <a:headEnd type="none" w="med" len="med"/>
+                      <a:tailEnd type="none" w="med" len="med"/>
+                    </a:lnL>
+                    <a:lnR w="6350" cap="flat" cmpd="sng" algn="ctr">
+                      <a:solidFill>
+                        <a:srgbClr val="DDDDDD"/>
+                      </a:solidFill>
+                      <a:prstDash val="solid"/>
+                      <a:round/>
+                      <a:headEnd type="none" w="med" len="med"/>
+                      <a:tailEnd type="none" w="med" len="med"/>
+                    </a:lnR>
+                    <a:lnT w="6350" cap="flat" cmpd="sng" algn="ctr">
+                      <a:solidFill>
+                        <a:srgbClr val="DDDDDD"/>
+                      </a:solidFill>
+                      <a:prstDash val="solid"/>
+                      <a:round/>
+                      <a:headEnd type="none" w="med" len="med"/>
+                      <a:tailEnd type="none" w="med" len="med"/>
+                    </a:lnT>
+                    <a:lnB w="6350" cap="flat" cmpd="sng" algn="ctr">
+                      <a:solidFill>
+                        <a:srgbClr val="DDDDDD"/>
+                      </a:solidFill>
+                      <a:prstDash val="solid"/>
+                      <a:round/>
+                      <a:headEnd type="none" w="med" len="med"/>
+                      <a:tailEnd type="none" w="med" len="med"/>
+                    </a:lnB>
+                    <a:solidFill>
+                      <a:srgbClr val="FFFFFF"/>
+                    </a:solidFill>
+                  </a:tcPr>
+                </a:tc>
+                <a:tc>
+                  <a:txBody>
+                    <a:bodyPr/>
+                    <a:lstStyle/>
+                    <a:p>
+                      <a:pPr algn="ctr" indent="0" marL="0">
+                        <a:buNone/>
+                      </a:pPr>
+                      <a:r>
+                        <a:rPr lang="en-US" sz="900" dirty="0">
+                          <a:solidFill>
+                            <a:srgbClr val="1F2A44"/>
+                          </a:solidFill>
+                          <a:latin typeface="Calibri" pitchFamily="34" charset="0"/>
+                          <a:ea typeface="Calibri" pitchFamily="34" charset="-122"/>
+                          <a:cs typeface="Calibri" pitchFamily="34" charset="-120"/>
+                        </a:rPr>
+                        <a:t>3.5%</a:t>
+                      </a:r>
+                      <a:endParaRPr lang="en-US" sz="900" dirty="0">
+                        <a:latin typeface="Calibri" charset="0"/>
+                        <a:ea typeface="Calibri" charset="0"/>
+                        <a:cs typeface="Calibri" charset="0"/>
+                      </a:endParaRPr>
+                    </a:p>
+                  </a:txBody>
+                  <a:tcPr marL="38100" marR="12700" marT="12700" marB="12700" anchor="ctr">
+                    <a:lnL w="6350" cap="flat" cmpd="sng" algn="ctr">
+                      <a:solidFill>
+                        <a:srgbClr val="DDDDDD"/>
+                      </a:solidFill>
+                      <a:prstDash val="solid"/>
+                      <a:round/>
+                      <a:headEnd type="none" w="med" len="med"/>
+                      <a:tailEnd type="none" w="med" len="med"/>
+                    </a:lnL>
+                    <a:lnR w="6350" cap="flat" cmpd="sng" algn="ctr">
+                      <a:solidFill>
+                        <a:srgbClr val="DDDDDD"/>
+                      </a:solidFill>
+                      <a:prstDash val="solid"/>
+                      <a:round/>
+                      <a:headEnd type="none" w="med" len="med"/>
+                      <a:tailEnd type="none" w="med" len="med"/>
+                    </a:lnR>
+                    <a:lnT w="6350" cap="flat" cmpd="sng" algn="ctr">
+                      <a:solidFill>
+                        <a:srgbClr val="DDDDDD"/>
+                      </a:solidFill>
+                      <a:prstDash val="solid"/>
+                      <a:round/>
+                      <a:headEnd type="none" w="med" len="med"/>
+                      <a:tailEnd type="none" w="med" len="med"/>
+                    </a:lnT>
+                    <a:lnB w="6350" cap="flat" cmpd="sng" algn="ctr">
+                      <a:solidFill>
+                        <a:srgbClr val="DDDDDD"/>
+                      </a:solidFill>
+                      <a:prstDash val="solid"/>
+                      <a:round/>
+                      <a:headEnd type="none" w="med" len="med"/>
+                      <a:tailEnd type="none" w="med" len="med"/>
+                    </a:lnB>
+                    <a:solidFill>
+                      <a:srgbClr val="FFFFFF"/>
+                    </a:solidFill>
+                  </a:tcPr>
+                </a:tc>
+                <a:tc>
+                  <a:txBody>
+                    <a:bodyPr/>
+                    <a:lstStyle/>
+                    <a:p>
+                      <a:pPr algn="ctr" indent="0" marL="0">
+                        <a:buNone/>
+                      </a:pPr>
+                      <a:r>
+                        <a:rPr lang="en-US" sz="900" dirty="0">
+                          <a:solidFill>
+                            <a:srgbClr val="1F2A44"/>
+                          </a:solidFill>
+                          <a:latin typeface="Calibri" pitchFamily="34" charset="0"/>
+                          <a:ea typeface="Calibri" pitchFamily="34" charset="-122"/>
+                          <a:cs typeface="Calibri" pitchFamily="34" charset="-120"/>
+                        </a:rPr>
+                        <a:t>0.6</a:t>
+                      </a:r>
+                      <a:endParaRPr lang="en-US" sz="900" dirty="0">
+                        <a:latin typeface="Calibri" charset="0"/>
+                        <a:ea typeface="Calibri" charset="0"/>
+                        <a:cs typeface="Calibri" charset="0"/>
+                      </a:endParaRPr>
+                    </a:p>
+                  </a:txBody>
+                  <a:tcPr marL="38100" marR="12700" marT="12700" marB="12700" anchor="ctr">
+                    <a:lnL w="6350" cap="flat" cmpd="sng" algn="ctr">
+                      <a:solidFill>
+                        <a:srgbClr val="DDDDDD"/>
+                      </a:solidFill>
+                      <a:prstDash val="solid"/>
+                      <a:round/>
+                      <a:headEnd type="none" w="med" len="med"/>
+                      <a:tailEnd type="none" w="med" len="med"/>
+                    </a:lnL>
+                    <a:lnR w="6350" cap="flat" cmpd="sng" algn="ctr">
+                      <a:solidFill>
+                        <a:srgbClr val="DDDDDD"/>
+                      </a:solidFill>
+                      <a:prstDash val="solid"/>
+                      <a:round/>
+                      <a:headEnd type="none" w="med" len="med"/>
+                      <a:tailEnd type="none" w="med" len="med"/>
+                    </a:lnR>
+                    <a:lnT w="6350" cap="flat" cmpd="sng" algn="ctr">
+                      <a:solidFill>
+                        <a:srgbClr val="DDDDDD"/>
+                      </a:solidFill>
+                      <a:prstDash val="solid"/>
+                      <a:round/>
+                      <a:headEnd type="none" w="med" len="med"/>
+                      <a:tailEnd type="none" w="med" len="med"/>
+                    </a:lnT>
+                    <a:lnB w="6350" cap="flat" cmpd="sng" algn="ctr">
+                      <a:solidFill>
+                        <a:srgbClr val="DDDDDD"/>
+                      </a:solidFill>
+                      <a:prstDash val="solid"/>
+                      <a:round/>
+                      <a:headEnd type="none" w="med" len="med"/>
+                      <a:tailEnd type="none" w="med" len="med"/>
+                    </a:lnB>
+                    <a:solidFill>
+                      <a:srgbClr val="FFFFFF"/>
+                    </a:solidFill>
+                  </a:tcPr>
+                </a:tc>
+                <a:tc>
+                  <a:txBody>
+                    <a:bodyPr/>
+                    <a:lstStyle/>
+                    <a:p>
+                      <a:pPr algn="ctr" indent="0" marL="0">
+                        <a:buNone/>
+                      </a:pPr>
+                      <a:r>
+                        <a:rPr lang="en-US" sz="900" dirty="0">
+                          <a:solidFill>
+                            <a:srgbClr val="1F2A44"/>
+                          </a:solidFill>
+                          <a:latin typeface="Calibri" pitchFamily="34" charset="0"/>
+                          <a:ea typeface="Calibri" pitchFamily="34" charset="-122"/>
+                          <a:cs typeface="Calibri" pitchFamily="34" charset="-120"/>
+                        </a:rPr>
+                        <a:t>100%</a:t>
+                      </a:r>
+                      <a:endParaRPr lang="en-US" sz="900" dirty="0">
+                        <a:latin typeface="Calibri" charset="0"/>
+                        <a:ea typeface="Calibri" charset="0"/>
+                        <a:cs typeface="Calibri" charset="0"/>
+                      </a:endParaRPr>
+                    </a:p>
+                  </a:txBody>
+                  <a:tcPr marL="38100" marR="12700" marT="12700" marB="12700" anchor="ctr">
+                    <a:lnL w="6350" cap="flat" cmpd="sng" algn="ctr">
+                      <a:solidFill>
+                        <a:srgbClr val="DDDDDD"/>
+                      </a:solidFill>
+                      <a:prstDash val="solid"/>
+                      <a:round/>
+                      <a:headEnd type="none" w="med" len="med"/>
+                      <a:tailEnd type="none" w="med" len="med"/>
+                    </a:lnL>
+                    <a:lnR w="6350" cap="flat" cmpd="sng" algn="ctr">
+                      <a:solidFill>
+                        <a:srgbClr val="DDDDDD"/>
+                      </a:solidFill>
+                      <a:prstDash val="solid"/>
+                      <a:round/>
+                      <a:headEnd type="none" w="med" len="med"/>
+                      <a:tailEnd type="none" w="med" len="med"/>
+                    </a:lnR>
+                    <a:lnT w="6350" cap="flat" cmpd="sng" algn="ctr">
+                      <a:solidFill>
+                        <a:srgbClr val="DDDDDD"/>
+                      </a:solidFill>
+                      <a:prstDash val="solid"/>
+                      <a:round/>
+                      <a:headEnd type="none" w="med" len="med"/>
+                      <a:tailEnd type="none" w="med" len="med"/>
+                    </a:lnT>
+                    <a:lnB w="6350" cap="flat" cmpd="sng" algn="ctr">
+                      <a:solidFill>
+                        <a:srgbClr val="DDDDDD"/>
+                      </a:solidFill>
+                      <a:prstDash val="solid"/>
+                      <a:round/>
+                      <a:headEnd type="none" w="med" len="med"/>
+                      <a:tailEnd type="none" w="med" len="med"/>
+                    </a:lnB>
+                    <a:solidFill>
+                      <a:srgbClr val="FFFFFF"/>
+                    </a:solidFill>
+                  </a:tcPr>
+                </a:tc>
+              </a:tr>
+              <a:tr h="214884">
+                <a:tc>
+                  <a:txBody>
+                    <a:bodyPr/>
+                    <a:lstStyle/>
+                    <a:p>
+                      <a:pPr algn="l" indent="0" marL="0">
+                        <a:buNone/>
+                      </a:pPr>
+                      <a:r>
+                        <a:rPr lang="en-US" sz="900" dirty="0">
+                          <a:solidFill>
+                            <a:srgbClr val="1F2A44"/>
+                          </a:solidFill>
+                          <a:latin typeface="Calibri" pitchFamily="34" charset="0"/>
+                          <a:ea typeface="Calibri" pitchFamily="34" charset="-122"/>
+                          <a:cs typeface="Calibri" pitchFamily="34" charset="-120"/>
+                        </a:rPr>
+                        <a:t>Vendors@Gov</a:t>
+                      </a:r>
+                      <a:endParaRPr lang="en-US" sz="900" dirty="0">
+                        <a:latin typeface="Calibri" charset="0"/>
+                        <a:ea typeface="Calibri" charset="0"/>
+                        <a:cs typeface="Calibri" charset="0"/>
+                      </a:endParaRPr>
+                    </a:p>
+                  </a:txBody>
+                  <a:tcPr marL="38100" marR="12700" marT="12700" marB="12700" anchor="ctr">
+                    <a:lnL w="6350" cap="flat" cmpd="sng" algn="ctr">
+                      <a:solidFill>
+                        <a:srgbClr val="DDDDDD"/>
+                      </a:solidFill>
+                      <a:prstDash val="solid"/>
+                      <a:round/>
+                      <a:headEnd type="none" w="med" len="med"/>
+                      <a:tailEnd type="none" w="med" len="med"/>
+                    </a:lnL>
+                    <a:lnR w="6350" cap="flat" cmpd="sng" algn="ctr">
+                      <a:solidFill>
+                        <a:srgbClr val="DDDDDD"/>
+                      </a:solidFill>
+                      <a:prstDash val="solid"/>
+                      <a:round/>
+                      <a:headEnd type="none" w="med" len="med"/>
+                      <a:tailEnd type="none" w="med" len="med"/>
+                    </a:lnR>
+                    <a:lnT w="6350" cap="flat" cmpd="sng" algn="ctr">
+                      <a:solidFill>
+                        <a:srgbClr val="DDDDDD"/>
+                      </a:solidFill>
+                      <a:prstDash val="solid"/>
+                      <a:round/>
+                      <a:headEnd type="none" w="med" len="med"/>
+                      <a:tailEnd type="none" w="med" len="med"/>
+                    </a:lnT>
+                    <a:lnB w="6350" cap="flat" cmpd="sng" algn="ctr">
+                      <a:solidFill>
+                        <a:srgbClr val="DDDDDD"/>
+                      </a:solidFill>
+                      <a:prstDash val="solid"/>
+                      <a:round/>
+                      <a:headEnd type="none" w="med" len="med"/>
+                      <a:tailEnd type="none" w="med" len="med"/>
+                    </a:lnB>
+                    <a:solidFill>
+                      <a:srgbClr val="FFFFFF"/>
+                    </a:solidFill>
+                  </a:tcPr>
+                </a:tc>
+                <a:tc>
+                  <a:txBody>
+                    <a:bodyPr/>
+                    <a:lstStyle/>
+                    <a:p>
+                      <a:pPr algn="ctr" indent="0" marL="0">
+                        <a:buNone/>
+                      </a:pPr>
+                      <a:r>
+                        <a:rPr lang="en-US" sz="900" dirty="0">
+                          <a:solidFill>
+                            <a:srgbClr val="1F2A44"/>
+                          </a:solidFill>
+                          <a:latin typeface="Calibri" pitchFamily="34" charset="0"/>
+                          <a:ea typeface="Calibri" pitchFamily="34" charset="-122"/>
+                          <a:cs typeface="Calibri" pitchFamily="34" charset="-120"/>
+                        </a:rPr>
+                        <a:t>2</a:t>
+                      </a:r>
+                      <a:endParaRPr lang="en-US" sz="900" dirty="0">
+                        <a:latin typeface="Calibri" charset="0"/>
+                        <a:ea typeface="Calibri" charset="0"/>
+                        <a:cs typeface="Calibri" charset="0"/>
+                      </a:endParaRPr>
+                    </a:p>
+                  </a:txBody>
+                  <a:tcPr marL="38100" marR="12700" marT="12700" marB="12700" anchor="ctr">
+                    <a:lnL w="6350" cap="flat" cmpd="sng" algn="ctr">
+                      <a:solidFill>
+                        <a:srgbClr val="DDDDDD"/>
+                      </a:solidFill>
+                      <a:prstDash val="solid"/>
+                      <a:round/>
+                      <a:headEnd type="none" w="med" len="med"/>
+                      <a:tailEnd type="none" w="med" len="med"/>
+                    </a:lnL>
+                    <a:lnR w="6350" cap="flat" cmpd="sng" algn="ctr">
+                      <a:solidFill>
+                        <a:srgbClr val="DDDDDD"/>
+                      </a:solidFill>
+                      <a:prstDash val="solid"/>
+                      <a:round/>
+                      <a:headEnd type="none" w="med" len="med"/>
+                      <a:tailEnd type="none" w="med" len="med"/>
+                    </a:lnR>
+                    <a:lnT w="6350" cap="flat" cmpd="sng" algn="ctr">
+                      <a:solidFill>
+                        <a:srgbClr val="DDDDDD"/>
+                      </a:solidFill>
+                      <a:prstDash val="solid"/>
+                      <a:round/>
+                      <a:headEnd type="none" w="med" len="med"/>
+                      <a:tailEnd type="none" w="med" len="med"/>
+                    </a:lnT>
+                    <a:lnB w="6350" cap="flat" cmpd="sng" algn="ctr">
+                      <a:solidFill>
+                        <a:srgbClr val="DDDDDD"/>
+                      </a:solidFill>
+                      <a:prstDash val="solid"/>
+                      <a:round/>
+                      <a:headEnd type="none" w="med" len="med"/>
+                      <a:tailEnd type="none" w="med" len="med"/>
+                    </a:lnB>
+                    <a:solidFill>
+                      <a:srgbClr val="FFFFFF"/>
+                    </a:solidFill>
+                  </a:tcPr>
+                </a:tc>
+                <a:tc>
+                  <a:txBody>
+                    <a:bodyPr/>
+                    <a:lstStyle/>
+                    <a:p>
+                      <a:pPr algn="ctr" indent="0" marL="0">
+                        <a:buNone/>
+                      </a:pPr>
+                      <a:r>
+                        <a:rPr lang="en-US" sz="900" dirty="0">
+                          <a:solidFill>
+                            <a:srgbClr val="1F2A44"/>
+                          </a:solidFill>
+                          <a:latin typeface="Calibri" pitchFamily="34" charset="0"/>
+                          <a:ea typeface="Calibri" pitchFamily="34" charset="-122"/>
+                          <a:cs typeface="Calibri" pitchFamily="34" charset="-120"/>
+                        </a:rPr>
+                        <a:t>2.4%</a:t>
+                      </a:r>
+                      <a:endParaRPr lang="en-US" sz="900" dirty="0">
+                        <a:latin typeface="Calibri" charset="0"/>
+                        <a:ea typeface="Calibri" charset="0"/>
+                        <a:cs typeface="Calibri" charset="0"/>
+                      </a:endParaRPr>
+                    </a:p>
+                  </a:txBody>
+                  <a:tcPr marL="38100" marR="12700" marT="12700" marB="12700" anchor="ctr">
+                    <a:lnL w="6350" cap="flat" cmpd="sng" algn="ctr">
+                      <a:solidFill>
+                        <a:srgbClr val="DDDDDD"/>
+                      </a:solidFill>
+                      <a:prstDash val="solid"/>
+                      <a:round/>
+                      <a:headEnd type="none" w="med" len="med"/>
+                      <a:tailEnd type="none" w="med" len="med"/>
+                    </a:lnL>
+                    <a:lnR w="6350" cap="flat" cmpd="sng" algn="ctr">
+                      <a:solidFill>
+                        <a:srgbClr val="DDDDDD"/>
+                      </a:solidFill>
+                      <a:prstDash val="solid"/>
+                      <a:round/>
+                      <a:headEnd type="none" w="med" len="med"/>
+                      <a:tailEnd type="none" w="med" len="med"/>
+                    </a:lnR>
+                    <a:lnT w="6350" cap="flat" cmpd="sng" algn="ctr">
+                      <a:solidFill>
+                        <a:srgbClr val="DDDDDD"/>
+                      </a:solidFill>
+                      <a:prstDash val="solid"/>
+                      <a:round/>
+                      <a:headEnd type="none" w="med" len="med"/>
+                      <a:tailEnd type="none" w="med" len="med"/>
+                    </a:lnT>
+                    <a:lnB w="6350" cap="flat" cmpd="sng" algn="ctr">
+                      <a:solidFill>
+                        <a:srgbClr val="DDDDDD"/>
+                      </a:solidFill>
+                      <a:prstDash val="solid"/>
+                      <a:round/>
+                      <a:headEnd type="none" w="med" len="med"/>
+                      <a:tailEnd type="none" w="med" len="med"/>
+                    </a:lnB>
+                    <a:solidFill>
+                      <a:srgbClr val="FFFFFF"/>
+                    </a:solidFill>
+                  </a:tcPr>
+                </a:tc>
+                <a:tc>
+                  <a:txBody>
+                    <a:bodyPr/>
+                    <a:lstStyle/>
+                    <a:p>
+                      <a:pPr algn="ctr" indent="0" marL="0">
+                        <a:buNone/>
+                      </a:pPr>
+                      <a:r>
+                        <a:rPr lang="en-US" sz="900" dirty="0">
+                          <a:solidFill>
+                            <a:srgbClr val="1F2A44"/>
+                          </a:solidFill>
+                          <a:latin typeface="Calibri" pitchFamily="34" charset="0"/>
+                          <a:ea typeface="Calibri" pitchFamily="34" charset="-122"/>
+                          <a:cs typeface="Calibri" pitchFamily="34" charset="-120"/>
+                        </a:rPr>
+                        <a:t>0.6</a:t>
+                      </a:r>
+                      <a:endParaRPr lang="en-US" sz="900" dirty="0">
+                        <a:latin typeface="Calibri" charset="0"/>
+                        <a:ea typeface="Calibri" charset="0"/>
+                        <a:cs typeface="Calibri" charset="0"/>
+                      </a:endParaRPr>
+                    </a:p>
+                  </a:txBody>
+                  <a:tcPr marL="38100" marR="12700" marT="12700" marB="12700" anchor="ctr">
+                    <a:lnL w="6350" cap="flat" cmpd="sng" algn="ctr">
+                      <a:solidFill>
+                        <a:srgbClr val="DDDDDD"/>
+                      </a:solidFill>
+                      <a:prstDash val="solid"/>
+                      <a:round/>
+                      <a:headEnd type="none" w="med" len="med"/>
+                      <a:tailEnd type="none" w="med" len="med"/>
+                    </a:lnL>
+                    <a:lnR w="6350" cap="flat" cmpd="sng" algn="ctr">
+                      <a:solidFill>
+                        <a:srgbClr val="DDDDDD"/>
+                      </a:solidFill>
+                      <a:prstDash val="solid"/>
+                      <a:round/>
+                      <a:headEnd type="none" w="med" len="med"/>
+                      <a:tailEnd type="none" w="med" len="med"/>
+                    </a:lnR>
+                    <a:lnT w="6350" cap="flat" cmpd="sng" algn="ctr">
+                      <a:solidFill>
+                        <a:srgbClr val="DDDDDD"/>
+                      </a:solidFill>
+                      <a:prstDash val="solid"/>
+                      <a:round/>
+                      <a:headEnd type="none" w="med" len="med"/>
+                      <a:tailEnd type="none" w="med" len="med"/>
+                    </a:lnT>
+                    <a:lnB w="6350" cap="flat" cmpd="sng" algn="ctr">
+                      <a:solidFill>
+                        <a:srgbClr val="DDDDDD"/>
+                      </a:solidFill>
+                      <a:prstDash val="solid"/>
+                      <a:round/>
+                      <a:headEnd type="none" w="med" len="med"/>
+                      <a:tailEnd type="none" w="med" len="med"/>
+                    </a:lnB>
+                    <a:solidFill>
+                      <a:srgbClr val="FFFFFF"/>
+                    </a:solidFill>
+                  </a:tcPr>
+                </a:tc>
+                <a:tc>
+                  <a:txBody>
+                    <a:bodyPr/>
+                    <a:lstStyle/>
+                    <a:p>
+                      <a:pPr algn="ctr" indent="0" marL="0">
+                        <a:buNone/>
+                      </a:pPr>
+                      <a:r>
+                        <a:rPr lang="en-US" sz="900" dirty="0">
+                          <a:solidFill>
+                            <a:srgbClr val="1F2A44"/>
+                          </a:solidFill>
+                          <a:latin typeface="Calibri" pitchFamily="34" charset="0"/>
+                          <a:ea typeface="Calibri" pitchFamily="34" charset="-122"/>
+                          <a:cs typeface="Calibri" pitchFamily="34" charset="-120"/>
+                        </a:rPr>
+                        <a:t>100%</a:t>
+                      </a:r>
+                      <a:endParaRPr lang="en-US" sz="900" dirty="0">
+                        <a:latin typeface="Calibri" charset="0"/>
+                        <a:ea typeface="Calibri" charset="0"/>
+                        <a:cs typeface="Calibri" charset="0"/>
+                      </a:endParaRPr>
+                    </a:p>
+                  </a:txBody>
+                  <a:tcPr marL="38100" marR="12700" marT="12700" marB="12700" anchor="ctr">
+                    <a:lnL w="6350" cap="flat" cmpd="sng" algn="ctr">
+                      <a:solidFill>
+                        <a:srgbClr val="DDDDDD"/>
+                      </a:solidFill>
+                      <a:prstDash val="solid"/>
+                      <a:round/>
+                      <a:headEnd type="none" w="med" len="med"/>
+                      <a:tailEnd type="none" w="med" len="med"/>
+                    </a:lnL>
+                    <a:lnR w="6350" cap="flat" cmpd="sng" algn="ctr">
+                      <a:solidFill>
+                        <a:srgbClr val="DDDDDD"/>
+                      </a:solidFill>
+                      <a:prstDash val="solid"/>
+                      <a:round/>
+                      <a:headEnd type="none" w="med" len="med"/>
+                      <a:tailEnd type="none" w="med" len="med"/>
+                    </a:lnR>
+                    <a:lnT w="6350" cap="flat" cmpd="sng" algn="ctr">
+                      <a:solidFill>
+                        <a:srgbClr val="DDDDDD"/>
+                      </a:solidFill>
+                      <a:prstDash val="solid"/>
+                      <a:round/>
+                      <a:headEnd type="none" w="med" len="med"/>
+                      <a:tailEnd type="none" w="med" len="med"/>
+                    </a:lnT>
+                    <a:lnB w="6350" cap="flat" cmpd="sng" algn="ctr">
+                      <a:solidFill>
+                        <a:srgbClr val="DDDDDD"/>
+                      </a:solidFill>
+                      <a:prstDash val="solid"/>
+                      <a:round/>
+                      <a:headEnd type="none" w="med" len="med"/>
+                      <a:tailEnd type="none" w="med" len="med"/>
+                    </a:lnB>
+                    <a:solidFill>
+                      <a:srgbClr val="FFFFFF"/>
+                    </a:solidFill>
+                  </a:tcPr>
+                </a:tc>
+              </a:tr>
+              <a:tr h="214884">
+                <a:tc>
+                  <a:txBody>
+                    <a:bodyPr/>
+                    <a:lstStyle/>
+                    <a:p>
+                      <a:pPr algn="l" indent="0" marL="0">
+                        <a:buNone/>
+                      </a:pPr>
+                      <a:r>
+                        <a:rPr lang="en-US" sz="900" dirty="0">
+                          <a:solidFill>
+                            <a:srgbClr val="1F2A44"/>
+                          </a:solidFill>
+                          <a:latin typeface="Calibri" pitchFamily="34" charset="0"/>
+                          <a:ea typeface="Calibri" pitchFamily="34" charset="-122"/>
+                          <a:cs typeface="Calibri" pitchFamily="34" charset="-120"/>
+                        </a:rPr>
+                        <a:t>Other</a:t>
+                      </a:r>
+                      <a:endParaRPr lang="en-US" sz="900" dirty="0">
+                        <a:latin typeface="Calibri" charset="0"/>
+                        <a:ea typeface="Calibri" charset="0"/>
+                        <a:cs typeface="Calibri" charset="0"/>
+                      </a:endParaRPr>
+                    </a:p>
+                  </a:txBody>
+                  <a:tcPr marL="38100" marR="12700" marT="12700" marB="12700" anchor="ctr">
+                    <a:lnL w="6350" cap="flat" cmpd="sng" algn="ctr">
+                      <a:solidFill>
+                        <a:srgbClr val="DDDDDD"/>
+                      </a:solidFill>
+                      <a:prstDash val="solid"/>
+                      <a:round/>
+                      <a:headEnd type="none" w="med" len="med"/>
+                      <a:tailEnd type="none" w="med" len="med"/>
+                    </a:lnL>
+                    <a:lnR w="6350" cap="flat" cmpd="sng" algn="ctr">
+                      <a:solidFill>
+                        <a:srgbClr val="DDDDDD"/>
+                      </a:solidFill>
+                      <a:prstDash val="solid"/>
+                      <a:round/>
+                      <a:headEnd type="none" w="med" len="med"/>
+                      <a:tailEnd type="none" w="med" len="med"/>
+                    </a:lnR>
+                    <a:lnT w="6350" cap="flat" cmpd="sng" algn="ctr">
+                      <a:solidFill>
+                        <a:srgbClr val="DDDDDD"/>
+                      </a:solidFill>
+                      <a:prstDash val="solid"/>
+                      <a:round/>
+                      <a:headEnd type="none" w="med" len="med"/>
+                      <a:tailEnd type="none" w="med" len="med"/>
+                    </a:lnT>
+                    <a:lnB w="6350" cap="flat" cmpd="sng" algn="ctr">
+                      <a:solidFill>
+                        <a:srgbClr val="DDDDDD"/>
+                      </a:solidFill>
+                      <a:prstDash val="solid"/>
+                      <a:round/>
+                      <a:headEnd type="none" w="med" len="med"/>
+                      <a:tailEnd type="none" w="med" len="med"/>
+                    </a:lnB>
+                    <a:solidFill>
+                      <a:srgbClr val="FFFFFF"/>
+                    </a:solidFill>
+                  </a:tcPr>
+                </a:tc>
+                <a:tc>
+                  <a:txBody>
+                    <a:bodyPr/>
+                    <a:lstStyle/>
+                    <a:p>
+                      <a:pPr algn="ctr" indent="0" marL="0">
+                        <a:buNone/>
+                      </a:pPr>
+                      <a:r>
+                        <a:rPr lang="en-US" sz="900" dirty="0">
+                          <a:solidFill>
+                            <a:srgbClr val="1F2A44"/>
+                          </a:solidFill>
+                          <a:latin typeface="Calibri" pitchFamily="34" charset="0"/>
+                          <a:ea typeface="Calibri" pitchFamily="34" charset="-122"/>
+                          <a:cs typeface="Calibri" pitchFamily="34" charset="-120"/>
+                        </a:rPr>
+                        <a:t>11</a:t>
+                      </a:r>
+                      <a:endParaRPr lang="en-US" sz="900" dirty="0">
+                        <a:latin typeface="Calibri" charset="0"/>
+                        <a:ea typeface="Calibri" charset="0"/>
+                        <a:cs typeface="Calibri" charset="0"/>
+                      </a:endParaRPr>
+                    </a:p>
+                  </a:txBody>
+                  <a:tcPr marL="38100" marR="12700" marT="12700" marB="12700" anchor="ctr">
+                    <a:lnL w="6350" cap="flat" cmpd="sng" algn="ctr">
+                      <a:solidFill>
+                        <a:srgbClr val="DDDDDD"/>
+                      </a:solidFill>
+                      <a:prstDash val="solid"/>
+                      <a:round/>
+                      <a:headEnd type="none" w="med" len="med"/>
+                      <a:tailEnd type="none" w="med" len="med"/>
+                    </a:lnL>
+                    <a:lnR w="6350" cap="flat" cmpd="sng" algn="ctr">
+                      <a:solidFill>
+                        <a:srgbClr val="DDDDDD"/>
+                      </a:solidFill>
+                      <a:prstDash val="solid"/>
+                      <a:round/>
+                      <a:headEnd type="none" w="med" len="med"/>
+                      <a:tailEnd type="none" w="med" len="med"/>
+                    </a:lnR>
+                    <a:lnT w="6350" cap="flat" cmpd="sng" algn="ctr">
+                      <a:solidFill>
+                        <a:srgbClr val="DDDDDD"/>
+                      </a:solidFill>
+                      <a:prstDash val="solid"/>
+                      <a:round/>
+                      <a:headEnd type="none" w="med" len="med"/>
+                      <a:tailEnd type="none" w="med" len="med"/>
+                    </a:lnT>
+                    <a:lnB w="6350" cap="flat" cmpd="sng" algn="ctr">
+                      <a:solidFill>
+                        <a:srgbClr val="DDDDDD"/>
+                      </a:solidFill>
+                      <a:prstDash val="solid"/>
+                      <a:round/>
+                      <a:headEnd type="none" w="med" len="med"/>
+                      <a:tailEnd type="none" w="med" len="med"/>
+                    </a:lnB>
+                    <a:solidFill>
+                      <a:srgbClr val="FFFFFF"/>
+                    </a:solidFill>
+                  </a:tcPr>
+                </a:tc>
+                <a:tc>
+                  <a:txBody>
+                    <a:bodyPr/>
+                    <a:lstStyle/>
+                    <a:p>
+                      <a:pPr algn="ctr" indent="0" marL="0">
+                        <a:buNone/>
+                      </a:pPr>
+                      <a:r>
+                        <a:rPr lang="en-US" sz="900" dirty="0">
+                          <a:solidFill>
+                            <a:srgbClr val="1F2A44"/>
+                          </a:solidFill>
+                          <a:latin typeface="Calibri" pitchFamily="34" charset="0"/>
+                          <a:ea typeface="Calibri" pitchFamily="34" charset="-122"/>
+                          <a:cs typeface="Calibri" pitchFamily="34" charset="-120"/>
+                        </a:rPr>
+                        <a:t>12.9%</a:t>
+                      </a:r>
+                      <a:endParaRPr lang="en-US" sz="900" dirty="0">
+                        <a:latin typeface="Calibri" charset="0"/>
+                        <a:ea typeface="Calibri" charset="0"/>
+                        <a:cs typeface="Calibri" charset="0"/>
+                      </a:endParaRPr>
+                    </a:p>
+                  </a:txBody>
+                  <a:tcPr marL="38100" marR="12700" marT="12700" marB="12700" anchor="ctr">
+                    <a:lnL w="6350" cap="flat" cmpd="sng" algn="ctr">
+                      <a:solidFill>
+                        <a:srgbClr val="DDDDDD"/>
+                      </a:solidFill>
+                      <a:prstDash val="solid"/>
+                      <a:round/>
+                      <a:headEnd type="none" w="med" len="med"/>
+                      <a:tailEnd type="none" w="med" len="med"/>
+                    </a:lnL>
+                    <a:lnR w="6350" cap="flat" cmpd="sng" algn="ctr">
+                      <a:solidFill>
+                        <a:srgbClr val="DDDDDD"/>
+                      </a:solidFill>
+                      <a:prstDash val="solid"/>
+                      <a:round/>
+                      <a:headEnd type="none" w="med" len="med"/>
+                      <a:tailEnd type="none" w="med" len="med"/>
+                    </a:lnR>
+                    <a:lnT w="6350" cap="flat" cmpd="sng" algn="ctr">
+                      <a:solidFill>
+                        <a:srgbClr val="DDDDDD"/>
+                      </a:solidFill>
+                      <a:prstDash val="solid"/>
+                      <a:round/>
+                      <a:headEnd type="none" w="med" len="med"/>
+                      <a:tailEnd type="none" w="med" len="med"/>
+                    </a:lnT>
+                    <a:lnB w="6350" cap="flat" cmpd="sng" algn="ctr">
+                      <a:solidFill>
+                        <a:srgbClr val="DDDDDD"/>
+                      </a:solidFill>
+                      <a:prstDash val="solid"/>
+                      <a:round/>
+                      <a:headEnd type="none" w="med" len="med"/>
+                      <a:tailEnd type="none" w="med" len="med"/>
+                    </a:lnB>
+                    <a:solidFill>
+                      <a:srgbClr val="FFFFFF"/>
+                    </a:solidFill>
+                  </a:tcPr>
+                </a:tc>
+                <a:tc>
+                  <a:txBody>
+                    <a:bodyPr/>
+                    <a:lstStyle/>
+                    <a:p>
+                      <a:pPr algn="ctr" indent="0" marL="0">
+                        <a:buNone/>
+                      </a:pPr>
+                      <a:r>
+                        <a:rPr lang="en-US" sz="900" dirty="0">
+                          <a:solidFill>
+                            <a:srgbClr val="1F2A44"/>
+                          </a:solidFill>
+                          <a:latin typeface="Calibri" pitchFamily="34" charset="0"/>
+                          <a:ea typeface="Calibri" pitchFamily="34" charset="-122"/>
+                          <a:cs typeface="Calibri" pitchFamily="34" charset="-120"/>
+                        </a:rPr>
+                        <a:t>0.2</a:t>
+                      </a:r>
+                      <a:endParaRPr lang="en-US" sz="900" dirty="0">
+                        <a:latin typeface="Calibri" charset="0"/>
+                        <a:ea typeface="Calibri" charset="0"/>
+                        <a:cs typeface="Calibri" charset="0"/>
+                      </a:endParaRPr>
+                    </a:p>
+                  </a:txBody>
+                  <a:tcPr marL="38100" marR="12700" marT="12700" marB="12700" anchor="ctr">
+                    <a:lnL w="6350" cap="flat" cmpd="sng" algn="ctr">
+                      <a:solidFill>
+                        <a:srgbClr val="DDDDDD"/>
+                      </a:solidFill>
+                      <a:prstDash val="solid"/>
+                      <a:round/>
+                      <a:headEnd type="none" w="med" len="med"/>
+                      <a:tailEnd type="none" w="med" len="med"/>
+                    </a:lnL>
+                    <a:lnR w="6350" cap="flat" cmpd="sng" algn="ctr">
+                      <a:solidFill>
+                        <a:srgbClr val="DDDDDD"/>
+                      </a:solidFill>
+                      <a:prstDash val="solid"/>
+                      <a:round/>
+                      <a:headEnd type="none" w="med" len="med"/>
+                      <a:tailEnd type="none" w="med" len="med"/>
+                    </a:lnR>
+                    <a:lnT w="6350" cap="flat" cmpd="sng" algn="ctr">
+                      <a:solidFill>
+                        <a:srgbClr val="DDDDDD"/>
+                      </a:solidFill>
+                      <a:prstDash val="solid"/>
+                      <a:round/>
+                      <a:headEnd type="none" w="med" len="med"/>
+                      <a:tailEnd type="none" w="med" len="med"/>
+                    </a:lnT>
+                    <a:lnB w="6350" cap="flat" cmpd="sng" algn="ctr">
+                      <a:solidFill>
+                        <a:srgbClr val="DDDDDD"/>
+                      </a:solidFill>
+                      <a:prstDash val="solid"/>
+                      <a:round/>
+                      <a:headEnd type="none" w="med" len="med"/>
+                      <a:tailEnd type="none" w="med" len="med"/>
+                    </a:lnB>
+                    <a:solidFill>
+                      <a:srgbClr val="FFFFFF"/>
+                    </a:solidFill>
+                  </a:tcPr>
+                </a:tc>
+                <a:tc>
+                  <a:txBody>
+                    <a:bodyPr/>
+                    <a:lstStyle/>
+                    <a:p>
+                      <a:pPr algn="ctr" indent="0" marL="0">
+                        <a:buNone/>
+                      </a:pPr>
+                      <a:r>
+                        <a:rPr lang="en-US" sz="900" dirty="0">
+                          <a:solidFill>
+                            <a:srgbClr val="1F2A44"/>
+                          </a:solidFill>
+                          <a:latin typeface="Calibri" pitchFamily="34" charset="0"/>
+                          <a:ea typeface="Calibri" pitchFamily="34" charset="-122"/>
+                          <a:cs typeface="Calibri" pitchFamily="34" charset="-120"/>
+                        </a:rPr>
+                        <a:t>100%</a:t>
+                      </a:r>
+                      <a:endParaRPr lang="en-US" sz="900" dirty="0">
+                        <a:latin typeface="Calibri" charset="0"/>
+                        <a:ea typeface="Calibri" charset="0"/>
+                        <a:cs typeface="Calibri" charset="0"/>
+                      </a:endParaRPr>
+                    </a:p>
+                  </a:txBody>
+                  <a:tcPr marL="38100" marR="12700" marT="12700" marB="12700" anchor="ctr">
+                    <a:lnL w="6350" cap="flat" cmpd="sng" algn="ctr">
+                      <a:solidFill>
+                        <a:srgbClr val="DDDDDD"/>
+                      </a:solidFill>
+                      <a:prstDash val="solid"/>
+                      <a:round/>
+                      <a:headEnd type="none" w="med" len="med"/>
+                      <a:tailEnd type="none" w="med" len="med"/>
+                    </a:lnL>
+                    <a:lnR w="6350" cap="flat" cmpd="sng" algn="ctr">
+                      <a:solidFill>
+                        <a:srgbClr val="DDDDDD"/>
+                      </a:solidFill>
+                      <a:prstDash val="solid"/>
+                      <a:round/>
+                      <a:headEnd type="none" w="med" len="med"/>
+                      <a:tailEnd type="none" w="med" len="med"/>
+                    </a:lnR>
+                    <a:lnT w="6350" cap="flat" cmpd="sng" algn="ctr">
+                      <a:solidFill>
+                        <a:srgbClr val="DDDDDD"/>
+                      </a:solidFill>
+                      <a:prstDash val="solid"/>
+                      <a:round/>
+                      <a:headEnd type="none" w="med" len="med"/>
+                      <a:tailEnd type="none" w="med" len="med"/>
+                    </a:lnT>
+                    <a:lnB w="6350" cap="flat" cmpd="sng" algn="ctr">
+                      <a:solidFill>
+                        <a:srgbClr val="DDDDDD"/>
+                      </a:solidFill>
+                      <a:prstDash val="solid"/>
+                      <a:round/>
+                      <a:headEnd type="none" w="med" len="med"/>
+                      <a:tailEnd type="none" w="med" len="med"/>
+                    </a:lnB>
+                    <a:solidFill>
+                      <a:srgbClr val="FFFFFF"/>
+                    </a:solidFill>
+                  </a:tcPr>
+                </a:tc>
+              </a:tr>
+              <a:tr h="214884">
+                <a:tc>
+                  <a:txBody>
+                    <a:bodyPr/>
+                    <a:lstStyle/>
+                    <a:p>
+                      <a:pPr algn="l" indent="0" marL="0">
+                        <a:buNone/>
+                      </a:pPr>
+                      <a:r>
+                        <a:rPr lang="en-US" sz="900" b="1" dirty="0">
+                          <a:solidFill>
+                            <a:srgbClr val="1F2A44"/>
+                          </a:solidFill>
+                          <a:latin typeface="Calibri" pitchFamily="34" charset="0"/>
+                          <a:ea typeface="Calibri" pitchFamily="34" charset="-122"/>
+                          <a:cs typeface="Calibri" pitchFamily="34" charset="-120"/>
+                        </a:rPr>
+                        <a:t>TOTAL</a:t>
+                      </a:r>
+                      <a:endParaRPr lang="en-US" sz="900" dirty="0">
+                        <a:latin typeface="Calibri" charset="0"/>
+                        <a:ea typeface="Calibri" charset="0"/>
+                        <a:cs typeface="Calibri" charset="0"/>
+                      </a:endParaRPr>
+                    </a:p>
+                  </a:txBody>
+                  <a:tcPr marL="38100" marR="12700" marT="12700" marB="12700" anchor="ctr">
+                    <a:lnL w="6350" cap="flat" cmpd="sng" algn="ctr">
+                      <a:solidFill>
+                        <a:srgbClr val="DDDDDD"/>
+                      </a:solidFill>
+                      <a:prstDash val="solid"/>
+                      <a:round/>
+                      <a:headEnd type="none" w="med" len="med"/>
+                      <a:tailEnd type="none" w="med" len="med"/>
+                    </a:lnL>
+                    <a:lnR w="6350" cap="flat" cmpd="sng" algn="ctr">
+                      <a:solidFill>
+                        <a:srgbClr val="DDDDDD"/>
+                      </a:solidFill>
+                      <a:prstDash val="solid"/>
+                      <a:round/>
+                      <a:headEnd type="none" w="med" len="med"/>
+                      <a:tailEnd type="none" w="med" len="med"/>
+                    </a:lnR>
+                    <a:lnT w="6350" cap="flat" cmpd="sng" algn="ctr">
+                      <a:solidFill>
+                        <a:srgbClr val="DDDDDD"/>
+                      </a:solidFill>
+                      <a:prstDash val="solid"/>
+                      <a:round/>
+                      <a:headEnd type="none" w="med" len="med"/>
+                      <a:tailEnd type="none" w="med" len="med"/>
+                    </a:lnT>
+                    <a:lnB w="6350" cap="flat" cmpd="sng" algn="ctr">
+                      <a:solidFill>
+                        <a:srgbClr val="DDDDDD"/>
+                      </a:solidFill>
+                      <a:prstDash val="solid"/>
+                      <a:round/>
+                      <a:headEnd type="none" w="med" len="med"/>
+                      <a:tailEnd type="none" w="med" len="med"/>
+                    </a:lnB>
+                    <a:solidFill>
+                      <a:srgbClr val="E9F3EF"/>
+                    </a:solidFill>
+                  </a:tcPr>
+                </a:tc>
+                <a:tc>
+                  <a:txBody>
+                    <a:bodyPr/>
+                    <a:lstStyle/>
+                    <a:p>
+                      <a:pPr algn="ctr" indent="0" marL="0">
+                        <a:buNone/>
+                      </a:pPr>
+                      <a:r>
+                        <a:rPr lang="en-US" sz="900" b="1" dirty="0">
+                          <a:solidFill>
+                            <a:srgbClr val="1F2A44"/>
+                          </a:solidFill>
+                          <a:latin typeface="Calibri" pitchFamily="34" charset="0"/>
+                          <a:ea typeface="Calibri" pitchFamily="34" charset="-122"/>
+                          <a:cs typeface="Calibri" pitchFamily="34" charset="-120"/>
+                        </a:rPr>
+                        <a:t>85</a:t>
+                      </a:r>
+                      <a:endParaRPr lang="en-US" sz="900" dirty="0">
+                        <a:latin typeface="Calibri" charset="0"/>
+                        <a:ea typeface="Calibri" charset="0"/>
+                        <a:cs typeface="Calibri" charset="0"/>
+                      </a:endParaRPr>
+                    </a:p>
+                  </a:txBody>
+                  <a:tcPr marL="38100" marR="12700" marT="12700" marB="12700" anchor="ctr">
+                    <a:lnL w="6350" cap="flat" cmpd="sng" algn="ctr">
+                      <a:solidFill>
+                        <a:srgbClr val="DDDDDD"/>
+                      </a:solidFill>
+                      <a:prstDash val="solid"/>
+                      <a:round/>
+                      <a:headEnd type="none" w="med" len="med"/>
+                      <a:tailEnd type="none" w="med" len="med"/>
+                    </a:lnL>
+                    <a:lnR w="6350" cap="flat" cmpd="sng" algn="ctr">
+                      <a:solidFill>
+                        <a:srgbClr val="DDDDDD"/>
+                      </a:solidFill>
+                      <a:prstDash val="solid"/>
+                      <a:round/>
+                      <a:headEnd type="none" w="med" len="med"/>
+                      <a:tailEnd type="none" w="med" len="med"/>
+                    </a:lnR>
+                    <a:lnT w="6350" cap="flat" cmpd="sng" algn="ctr">
+                      <a:solidFill>
+                        <a:srgbClr val="DDDDDD"/>
+                      </a:solidFill>
+                      <a:prstDash val="solid"/>
+                      <a:round/>
+                      <a:headEnd type="none" w="med" len="med"/>
+                      <a:tailEnd type="none" w="med" len="med"/>
+                    </a:lnT>
+                    <a:lnB w="6350" cap="flat" cmpd="sng" algn="ctr">
+                      <a:solidFill>
+                        <a:srgbClr val="DDDDDD"/>
+                      </a:solidFill>
+                      <a:prstDash val="solid"/>
+                      <a:round/>
+                      <a:headEnd type="none" w="med" len="med"/>
+                      <a:tailEnd type="none" w="med" len="med"/>
+                    </a:lnB>
+                    <a:solidFill>
+                      <a:srgbClr val="E9F3EF"/>
+                    </a:solidFill>
+                  </a:tcPr>
+                </a:tc>
+                <a:tc>
+                  <a:txBody>
+                    <a:bodyPr/>
+                    <a:lstStyle/>
+                    <a:p>
+                      <a:pPr algn="ctr" indent="0" marL="0">
+                        <a:buNone/>
+                      </a:pPr>
+                      <a:r>
+                        <a:rPr lang="en-US" sz="900" b="1" dirty="0">
+                          <a:solidFill>
+                            <a:srgbClr val="1F2A44"/>
+                          </a:solidFill>
+                          <a:latin typeface="Calibri" pitchFamily="34" charset="0"/>
+                          <a:ea typeface="Calibri" pitchFamily="34" charset="-122"/>
+                          <a:cs typeface="Calibri" pitchFamily="34" charset="-120"/>
+                        </a:rPr>
+                        <a:t>100%</a:t>
+                      </a:r>
+                      <a:endParaRPr lang="en-US" sz="900" dirty="0">
+                        <a:latin typeface="Calibri" charset="0"/>
+                        <a:ea typeface="Calibri" charset="0"/>
+                        <a:cs typeface="Calibri" charset="0"/>
+                      </a:endParaRPr>
+                    </a:p>
+                  </a:txBody>
+                  <a:tcPr marL="38100" marR="12700" marT="12700" marB="12700" anchor="ctr">
+                    <a:lnL w="6350" cap="flat" cmpd="sng" algn="ctr">
+                      <a:solidFill>
+                        <a:srgbClr val="DDDDDD"/>
+                      </a:solidFill>
+                      <a:prstDash val="solid"/>
+                      <a:round/>
+                      <a:headEnd type="none" w="med" len="med"/>
+                      <a:tailEnd type="none" w="med" len="med"/>
+                    </a:lnL>
+                    <a:lnR w="6350" cap="flat" cmpd="sng" algn="ctr">
+                      <a:solidFill>
+                        <a:srgbClr val="DDDDDD"/>
+                      </a:solidFill>
+                      <a:prstDash val="solid"/>
+                      <a:round/>
+                      <a:headEnd type="none" w="med" len="med"/>
+                      <a:tailEnd type="none" w="med" len="med"/>
+                    </a:lnR>
+                    <a:lnT w="6350" cap="flat" cmpd="sng" algn="ctr">
+                      <a:solidFill>
+                        <a:srgbClr val="DDDDDD"/>
+                      </a:solidFill>
+                      <a:prstDash val="solid"/>
+                      <a:round/>
+                      <a:headEnd type="none" w="med" len="med"/>
+                      <a:tailEnd type="none" w="med" len="med"/>
+                    </a:lnT>
+                    <a:lnB w="6350" cap="flat" cmpd="sng" algn="ctr">
+                      <a:solidFill>
+                        <a:srgbClr val="DDDDDD"/>
+                      </a:solidFill>
+                      <a:prstDash val="solid"/>
+                      <a:round/>
+                      <a:headEnd type="none" w="med" len="med"/>
+                      <a:tailEnd type="none" w="med" len="med"/>
+                    </a:lnB>
+                    <a:solidFill>
+                      <a:srgbClr val="E9F3EF"/>
+                    </a:solidFill>
+                  </a:tcPr>
+                </a:tc>
+                <a:tc>
+                  <a:txBody>
+                    <a:bodyPr/>
+                    <a:lstStyle/>
+                    <a:p>
+                      <a:pPr algn="ctr" indent="0" marL="0">
+                        <a:buNone/>
+                      </a:pPr>
+                      <a:r>
+                        <a:rPr lang="en-US" sz="900" b="1" dirty="0">
+                          <a:solidFill>
+                            <a:srgbClr val="1F2A44"/>
+                          </a:solidFill>
+                          <a:latin typeface="Calibri" pitchFamily="34" charset="0"/>
+                          <a:ea typeface="Calibri" pitchFamily="34" charset="-122"/>
+                          <a:cs typeface="Calibri" pitchFamily="34" charset="-120"/>
+                        </a:rPr>
+                        <a:t>0.7</a:t>
+                      </a:r>
+                      <a:endParaRPr lang="en-US" sz="900" dirty="0">
+                        <a:latin typeface="Calibri" charset="0"/>
+                        <a:ea typeface="Calibri" charset="0"/>
+                        <a:cs typeface="Calibri" charset="0"/>
+                      </a:endParaRPr>
+                    </a:p>
+                  </a:txBody>
+                  <a:tcPr marL="38100" marR="12700" marT="12700" marB="12700" anchor="ctr">
+                    <a:lnL w="6350" cap="flat" cmpd="sng" algn="ctr">
+                      <a:solidFill>
+                        <a:srgbClr val="DDDDDD"/>
+                      </a:solidFill>
+                      <a:prstDash val="solid"/>
+                      <a:round/>
+                      <a:headEnd type="none" w="med" len="med"/>
+                      <a:tailEnd type="none" w="med" len="med"/>
+                    </a:lnL>
+                    <a:lnR w="6350" cap="flat" cmpd="sng" algn="ctr">
+                      <a:solidFill>
+                        <a:srgbClr val="DDDDDD"/>
+                      </a:solidFill>
+                      <a:prstDash val="solid"/>
+                      <a:round/>
+                      <a:headEnd type="none" w="med" len="med"/>
+                      <a:tailEnd type="none" w="med" len="med"/>
+                    </a:lnR>
+                    <a:lnT w="6350" cap="flat" cmpd="sng" algn="ctr">
+                      <a:solidFill>
+                        <a:srgbClr val="DDDDDD"/>
+                      </a:solidFill>
+                      <a:prstDash val="solid"/>
+                      <a:round/>
+                      <a:headEnd type="none" w="med" len="med"/>
+                      <a:tailEnd type="none" w="med" len="med"/>
+                    </a:lnT>
+                    <a:lnB w="6350" cap="flat" cmpd="sng" algn="ctr">
+                      <a:solidFill>
+                        <a:srgbClr val="DDDDDD"/>
+                      </a:solidFill>
+                      <a:prstDash val="solid"/>
+                      <a:round/>
+                      <a:headEnd type="none" w="med" len="med"/>
+                      <a:tailEnd type="none" w="med" len="med"/>
+                    </a:lnB>
+                    <a:solidFill>
+                      <a:srgbClr val="E9F3EF"/>
+                    </a:solidFill>
+                  </a:tcPr>
+                </a:tc>
+                <a:tc>
+                  <a:txBody>
+                    <a:bodyPr/>
+                    <a:lstStyle/>
+                    <a:p>
+                      <a:pPr algn="ctr" indent="0" marL="0">
+                        <a:buNone/>
+                      </a:pPr>
+                      <a:r>
+                        <a:rPr lang="en-US" sz="900" b="1" dirty="0">
+                          <a:solidFill>
+                            <a:srgbClr val="1F2A44"/>
+                          </a:solidFill>
+                          <a:latin typeface="Calibri" pitchFamily="34" charset="0"/>
+                          <a:ea typeface="Calibri" pitchFamily="34" charset="-122"/>
+                          <a:cs typeface="Calibri" pitchFamily="34" charset="-120"/>
+                        </a:rPr>
+                        <a:t>85%</a:t>
+                      </a:r>
+                      <a:endParaRPr lang="en-US" sz="900" dirty="0">
+                        <a:latin typeface="Calibri" charset="0"/>
+                        <a:ea typeface="Calibri" charset="0"/>
+                        <a:cs typeface="Calibri" charset="0"/>
+                      </a:endParaRPr>
+                    </a:p>
+                  </a:txBody>
+                  <a:tcPr marL="38100" marR="12700" marT="12700" marB="12700" anchor="ctr">
+                    <a:lnL w="6350" cap="flat" cmpd="sng" algn="ctr">
+                      <a:solidFill>
+                        <a:srgbClr val="DDDDDD"/>
+                      </a:solidFill>
+                      <a:prstDash val="solid"/>
+                      <a:round/>
+                      <a:headEnd type="none" w="med" len="med"/>
+                      <a:tailEnd type="none" w="med" len="med"/>
+                    </a:lnL>
+                    <a:lnR w="6350" cap="flat" cmpd="sng" algn="ctr">
+                      <a:solidFill>
+                        <a:srgbClr val="DDDDDD"/>
+                      </a:solidFill>
+                      <a:prstDash val="solid"/>
+                      <a:round/>
+                      <a:headEnd type="none" w="med" len="med"/>
+                      <a:tailEnd type="none" w="med" len="med"/>
+                    </a:lnR>
+                    <a:lnT w="6350" cap="flat" cmpd="sng" algn="ctr">
+                      <a:solidFill>
+                        <a:srgbClr val="DDDDDD"/>
+                      </a:solidFill>
+                      <a:prstDash val="solid"/>
+                      <a:round/>
+                      <a:headEnd type="none" w="med" len="med"/>
+                      <a:tailEnd type="none" w="med" len="med"/>
+                    </a:lnT>
+                    <a:lnB w="6350" cap="flat" cmpd="sng" algn="ctr">
+                      <a:solidFill>
+                        <a:srgbClr val="DDDDDD"/>
+                      </a:solidFill>
+                      <a:prstDash val="solid"/>
+                      <a:round/>
+                      <a:headEnd type="none" w="med" len="med"/>
+                      <a:tailEnd type="none" w="med" len="med"/>
+                    </a:lnB>
+                    <a:solidFill>
+                      <a:srgbClr val="E9F3EF"/>
+                    </a:solidFill>
+                  </a:tcPr>
+                </a:tc>
+              </a:tr>
+            </a:tbl>
           </a:graphicData>
         </a:graphic>
       </p:graphicFrame>

--- a/Portal_Metrics_Monthly_Sep-26.pptx
+++ b/Portal_Metrics_Monthly_Sep-26.pptx
@@ -479,7 +479,7 @@
           <a:lstStyle/>
           <a:p>
             <a:pPr>
-              <a:defRPr sz="1200" b="0" i="0" u="none" strike="noStrike">
+              <a:defRPr sz="1300" b="0" i="0" u="none" strike="noStrike">
                 <a:solidFill>
                   <a:srgbClr val="158158"/>
                 </a:solidFill>
@@ -487,13 +487,13 @@
               </a:defRPr>
             </a:pPr>
             <a:r>
-              <a:rPr sz="1200" b="0" i="0" u="none" strike="noStrike">
+              <a:rPr sz="1300" b="0" i="0" u="none" strike="noStrike">
                 <a:solidFill>
                   <a:srgbClr val="158158"/>
                 </a:solidFill>
                 <a:latin typeface="Calibri"/>
               </a:rPr>
-              <a:t>Invoices by portal (platforms we use most)</a:t>
+              <a:t>Resolution distribution (%)</a:t>
             </a:r>
           </a:p>
         </c:rich>
@@ -504,10 +504,8 @@
     <c:autoTitleDeleted val="0"/>
     <c:plotArea>
       <c:layout/>
-      <c:barChart>
-        <c:barDir val="bar"/>
-        <c:grouping val="clustered"/>
-        <c:varyColors val="0"/>
+      <c:doughnutChart>
+        <c:varyColors val="1"/>
         <c:ser>
           <c:idx val="0"/>
           <c:order val="0"/>
@@ -517,208 +515,273 @@
               <c:strCache>
                 <c:ptCount val="1"/>
                 <c:pt idx="0">
-                  <c:v>Invoices</c:v>
+                  <c:v>Distribution</c:v>
                 </c:pt>
               </c:strCache>
             </c:strRef>
           </c:tx>
           <c:spPr>
             <a:solidFill>
-              <a:srgbClr val="158158"/>
+              <a:schemeClr val="accent1"/>
             </a:solidFill>
+            <a:ln w="9525" cap="flat">
+              <a:solidFill>
+                <a:srgbClr val="F9F9F9"/>
+              </a:solidFill>
+              <a:prstDash val="solid"/>
+              <a:round/>
+            </a:ln>
             <a:effectLst/>
           </c:spPr>
-          <c:invertIfNegative val="0"/>
+          <c:dPt>
+            <c:idx val="0"/>
+            <c:bubble3D val="0"/>
+            <c:spPr>
+              <a:solidFill>
+                <a:srgbClr val="50B432"/>
+              </a:solidFill>
+              <a:effectLst/>
+            </c:spPr>
+          </c:dPt>
+          <c:dPt>
+            <c:idx val="1"/>
+            <c:bubble3D val="0"/>
+            <c:spPr>
+              <a:solidFill>
+                <a:srgbClr val="53B5E0"/>
+              </a:solidFill>
+              <a:effectLst/>
+            </c:spPr>
+          </c:dPt>
+          <c:dPt>
+            <c:idx val="2"/>
+            <c:bubble3D val="0"/>
+            <c:spPr>
+              <a:solidFill>
+                <a:srgbClr val="4292E1"/>
+              </a:solidFill>
+              <a:effectLst/>
+            </c:spPr>
+          </c:dPt>
+          <c:dPt>
+            <c:idx val="3"/>
+            <c:bubble3D val="0"/>
+            <c:spPr>
+              <a:solidFill>
+                <a:srgbClr val="ED8B1B"/>
+              </a:solidFill>
+              <a:effectLst/>
+            </c:spPr>
+          </c:dPt>
+          <c:dPt>
+            <c:idx val="4"/>
+            <c:bubble3D val="0"/>
+            <c:spPr>
+              <a:solidFill>
+                <a:srgbClr val="4A2ADB"/>
+              </a:solidFill>
+              <a:effectLst/>
+            </c:spPr>
+          </c:dPt>
           <c:dLbls>
-            <c:numFmt formatCode="#,##0" sourceLinked="0"/>
+            <c:dLbl>
+              <c:idx val="0"/>
+              <c:numFmt formatCode="0%" sourceLinked="0"/>
+              <c:spPr/>
+              <c:txPr>
+                <a:bodyPr/>
+                <a:lstStyle/>
+                <a:p>
+                  <a:pPr>
+                    <a:defRPr sz="900" b="0" i="0" u="none" strike="noStrike">
+                      <a:solidFill>
+                        <a:srgbClr val="FFFFFF"/>
+                      </a:solidFill>
+                      <a:latin typeface="Calibri"/>
+                    </a:defRPr>
+                  </a:pPr>
+                </a:p>
+              </c:txPr>
+              <c:showLegendKey val="0"/>
+              <c:showVal val="0"/>
+              <c:showCatName val="0"/>
+              <c:showSerName val="0"/>
+              <c:showPercent val="1"/>
+              <c:showBubbleSize val="0"/>
+            </c:dLbl>
+            <c:dLbl>
+              <c:idx val="1"/>
+              <c:numFmt formatCode="0%" sourceLinked="0"/>
+              <c:spPr/>
+              <c:txPr>
+                <a:bodyPr/>
+                <a:lstStyle/>
+                <a:p>
+                  <a:pPr>
+                    <a:defRPr sz="900" b="0" i="0" u="none" strike="noStrike">
+                      <a:solidFill>
+                        <a:srgbClr val="FFFFFF"/>
+                      </a:solidFill>
+                      <a:latin typeface="Calibri"/>
+                    </a:defRPr>
+                  </a:pPr>
+                </a:p>
+              </c:txPr>
+              <c:showLegendKey val="0"/>
+              <c:showVal val="0"/>
+              <c:showCatName val="0"/>
+              <c:showSerName val="0"/>
+              <c:showPercent val="1"/>
+              <c:showBubbleSize val="0"/>
+            </c:dLbl>
+            <c:dLbl>
+              <c:idx val="2"/>
+              <c:numFmt formatCode="0%" sourceLinked="0"/>
+              <c:spPr/>
+              <c:txPr>
+                <a:bodyPr/>
+                <a:lstStyle/>
+                <a:p>
+                  <a:pPr>
+                    <a:defRPr sz="900" b="0" i="0" u="none" strike="noStrike">
+                      <a:solidFill>
+                        <a:srgbClr val="FFFFFF"/>
+                      </a:solidFill>
+                      <a:latin typeface="Calibri"/>
+                    </a:defRPr>
+                  </a:pPr>
+                </a:p>
+              </c:txPr>
+              <c:showLegendKey val="0"/>
+              <c:showVal val="0"/>
+              <c:showCatName val="0"/>
+              <c:showSerName val="0"/>
+              <c:showPercent val="1"/>
+              <c:showBubbleSize val="0"/>
+            </c:dLbl>
+            <c:dLbl>
+              <c:idx val="3"/>
+              <c:numFmt formatCode="0%" sourceLinked="0"/>
+              <c:spPr/>
+              <c:txPr>
+                <a:bodyPr/>
+                <a:lstStyle/>
+                <a:p>
+                  <a:pPr>
+                    <a:defRPr sz="900" b="0" i="0" u="none" strike="noStrike">
+                      <a:solidFill>
+                        <a:srgbClr val="FFFFFF"/>
+                      </a:solidFill>
+                      <a:latin typeface="Calibri"/>
+                    </a:defRPr>
+                  </a:pPr>
+                </a:p>
+              </c:txPr>
+              <c:showLegendKey val="0"/>
+              <c:showVal val="0"/>
+              <c:showCatName val="0"/>
+              <c:showSerName val="0"/>
+              <c:showPercent val="1"/>
+              <c:showBubbleSize val="0"/>
+            </c:dLbl>
+            <c:dLbl>
+              <c:idx val="4"/>
+              <c:numFmt formatCode="0%" sourceLinked="0"/>
+              <c:spPr/>
+              <c:txPr>
+                <a:bodyPr/>
+                <a:lstStyle/>
+                <a:p>
+                  <a:pPr>
+                    <a:defRPr sz="900" b="0" i="0" u="none" strike="noStrike">
+                      <a:solidFill>
+                        <a:srgbClr val="FFFFFF"/>
+                      </a:solidFill>
+                      <a:latin typeface="Calibri"/>
+                    </a:defRPr>
+                  </a:pPr>
+                </a:p>
+              </c:txPr>
+              <c:showLegendKey val="0"/>
+              <c:showVal val="0"/>
+              <c:showCatName val="0"/>
+              <c:showSerName val="0"/>
+              <c:showPercent val="1"/>
+              <c:showBubbleSize val="0"/>
+            </c:dLbl>
+            <c:numFmt formatCode="0%" sourceLinked="0"/>
             <c:txPr>
               <a:bodyPr/>
               <a:lstStyle/>
               <a:p>
                 <a:pPr>
-                  <a:defRPr b="0" i="0" strike="noStrike" sz="1000" u="none">
+                  <a:defRPr sz="1800" b="0" i="0" u="none" strike="noStrike">
                     <a:solidFill>
-                      <a:srgbClr val="1F2A44"/>
+                      <a:srgbClr val="000000"/>
                     </a:solidFill>
-                    <a:latin typeface="Calibri"/>
+                    <a:latin typeface="Arial"/>
                   </a:defRPr>
                 </a:pPr>
               </a:p>
             </c:txPr>
             <c:showLegendKey val="0"/>
-            <c:showVal val="1"/>
-            <c:showCatName val="0"/>
+            <c:showVal val="0"/>
+            <c:showCatName val="1"/>
             <c:showSerName val="0"/>
-            <c:showPercent val="0"/>
+            <c:showPercent val="1"/>
             <c:showBubbleSize val="0"/>
             <c:showLeaderLines val="0"/>
           </c:dLbls>
           <c:cat>
-            <c:multiLvlStrRef>
-              <c:f>Sheet1!$A$2:$A$7</c:f>
-              <c:multiLvlStrCache>
-                <c:ptCount val="6"/>
-                <c:lvl>
-                  <c:pt idx="0">
-                    <c:v>Coupa</c:v>
-                  </c:pt>
-                  <c:pt idx="1">
-                    <c:v>Ariba</c:v>
-                  </c:pt>
-                  <c:pt idx="2">
-                    <c:v>Taulia</c:v>
-                  </c:pt>
-                  <c:pt idx="3">
-                    <c:v>URL</c:v>
-                  </c:pt>
-                  <c:pt idx="4">
-                    <c:v>Chorus Pro</c:v>
-                  </c:pt>
-                  <c:pt idx="5">
-                    <c:v>Oracle</c:v>
-                  </c:pt>
-                </c:lvl>
-              </c:multiLvlStrCache>
-            </c:multiLvlStrRef>
+            <c:strRef>
+              <c:f>Sheet1!$A$2:$A$6</c:f>
+              <c:strCache>
+                <c:ptCount val="5"/>
+                <c:pt idx="0">
+                  <c:v>Same day</c:v>
+                </c:pt>
+                <c:pt idx="1">
+                  <c:v>1-2 d</c:v>
+                </c:pt>
+                <c:pt idx="2">
+                  <c:v>2-4 d</c:v>
+                </c:pt>
+                <c:pt idx="3">
+                  <c:v>4-7 d</c:v>
+                </c:pt>
+                <c:pt idx="4">
+                  <c:v>&gt;7 d</c:v>
+                </c:pt>
+              </c:strCache>
+            </c:strRef>
           </c:cat>
           <c:val>
             <c:numRef>
-              <c:f>Sheet1!$B$2:$B$7</c:f>
+              <c:f>Sheet1!$B$2:$B$6</c:f>
               <c:numCache>
-                <c:formatCode>General</c:formatCode>
-                <c:ptCount val="6"/>
+                <c:ptCount val="5"/>
                 <c:pt idx="0">
-                  <c:v>28</c:v>
+                  <c:v>136</c:v>
                 </c:pt>
                 <c:pt idx="1">
-                  <c:v>18</c:v>
+                  <c:v>26</c:v>
                 </c:pt>
                 <c:pt idx="2">
-                  <c:v>9</c:v>
+                  <c:v>37</c:v>
                 </c:pt>
                 <c:pt idx="3">
-                  <c:v>6</c:v>
+                  <c:v>2</c:v>
                 </c:pt>
                 <c:pt idx="4">
-                  <c:v>5</c:v>
-                </c:pt>
-                <c:pt idx="5">
                   <c:v>3</c:v>
                 </c:pt>
               </c:numCache>
             </c:numRef>
           </c:val>
         </c:ser>
-        <c:dLbls>
-          <c:numFmt formatCode="#,##0" sourceLinked="0"/>
-          <c:txPr>
-            <a:bodyPr/>
-            <a:lstStyle/>
-            <a:p>
-              <a:pPr>
-                <a:defRPr b="0" i="0" strike="noStrike" sz="1000" u="none">
-                  <a:solidFill>
-                    <a:srgbClr val="1F2A44"/>
-                  </a:solidFill>
-                  <a:latin typeface="Calibri"/>
-                </a:defRPr>
-              </a:pPr>
-            </a:p>
-          </c:txPr>
-          <c:showLegendKey val="0"/>
-          <c:showVal val="1"/>
-          <c:showCatName val="0"/>
-          <c:showSerName val="0"/>
-          <c:showPercent val="0"/>
-          <c:showBubbleSize val="0"/>
-          <c:showLeaderLines val="0"/>
-        </c:dLbls>
-        <c:gapWidth val="150"/>
-        <c:overlap val="0"/>
-        <c:axId val="2094734554"/>
-        <c:axId val="2094734552"/>
-        <c:axId val="2094734556"/>
-      </c:barChart>
-      <c:catAx>
-        <c:axId val="2094734554"/>
-        <c:scaling>
-          <c:orientation val="minMax"/>
-        </c:scaling>
-        <c:delete val="0"/>
-        <c:axPos val="l"/>
-        <c:numFmt formatCode="General" sourceLinked="1"/>
-        <c:majorTickMark val="out"/>
-        <c:minorTickMark val="none"/>
-        <c:tickLblPos val="nextTo"/>
-        <c:spPr>
-          <a:ln w="12700" cap="flat">
-            <a:solidFill>
-              <a:srgbClr val="888888"/>
-            </a:solidFill>
-            <a:prstDash val="solid"/>
-            <a:round/>
-          </a:ln>
-        </c:spPr>
-        <c:txPr>
-          <a:bodyPr/>
-          <a:lstStyle/>
-          <a:p>
-            <a:pPr>
-              <a:defRPr sz="1000" b="0" i="0" u="none" strike="noStrike">
-                <a:solidFill>
-                  <a:srgbClr val="6B7B84"/>
-                </a:solidFill>
-                <a:latin typeface="Calibri"/>
-              </a:defRPr>
-            </a:pPr>
-            <a:endParaRPr lang="en-US"/>
-          </a:p>
-        </c:txPr>
-        <c:crossAx val="2094734552"/>
-        <c:crosses val="autoZero"/>
-        <c:auto val="1"/>
-        <c:lblAlgn val="ctr"/>
-        <c:noMultiLvlLbl val="1"/>
-      </c:catAx>
-      <c:valAx>
-        <c:axId val="2094734552"/>
-        <c:scaling>
-          <c:orientation val="minMax"/>
-        </c:scaling>
-        <c:delete val="1"/>
-        <c:axPos val="b"/>
-        <c:numFmt formatCode="General" sourceLinked="0"/>
-        <c:majorTickMark val="out"/>
-        <c:minorTickMark val="none"/>
-        <c:tickLblPos val="low"/>
-        <c:spPr>
-          <a:ln w="12700" cap="flat">
-            <a:solidFill>
-              <a:srgbClr val="888888"/>
-            </a:solidFill>
-            <a:prstDash val="solid"/>
-            <a:round/>
-          </a:ln>
-        </c:spPr>
-        <c:txPr>
-          <a:bodyPr/>
-          <a:lstStyle/>
-          <a:p>
-            <a:pPr>
-              <a:defRPr sz="1200" b="0" i="0" u="none" strike="noStrike">
-                <a:solidFill>
-                  <a:srgbClr val="000000"/>
-                </a:solidFill>
-                <a:latin typeface="Arial"/>
-              </a:defRPr>
-            </a:pPr>
-            <a:endParaRPr lang="en-US"/>
-          </a:p>
-        </c:txPr>
-        <c:crossAx val="2094734554"/>
-        <c:crosses val="autoZero"/>
-        <c:crossBetween val="between"/>
-      </c:valAx>
+        <c:firstSliceAng val="0"/>
+        <c:holeSize val="58"/>
+      </c:doughnutChart>
       <c:spPr>
         <a:noFill/>
         <a:ln>
@@ -727,6 +790,26 @@
         <a:effectLst/>
       </c:spPr>
     </c:plotArea>
+    <c:legend>
+      <c:legendPos val="r"/>
+      <c:overlay val="0"/>
+      <c:txPr>
+        <a:bodyPr/>
+        <a:lstStyle/>
+        <a:p>
+          <a:pPr>
+            <a:defRPr sz="1000">
+              <a:solidFill>
+                <a:srgbClr val="1F2A44"/>
+              </a:solidFill>
+              <a:latin typeface="Calibri"/>
+              <a:cs typeface="Calibri"/>
+            </a:defRPr>
+          </a:pPr>
+          <a:endParaRPr lang="en-US"/>
+        </a:p>
+      </c:txPr>
+    </c:legend>
     <c:plotVisOnly val="1"/>
     <c:dispBlanksAs val="span"/>
   </c:chart>
